--- a/R/presentation/統計計算.pptx
+++ b/R/presentation/統計計算.pptx
@@ -10,12 +10,14 @@
     <p:sldId id="258" r:id="rId4"/>
     <p:sldId id="259" r:id="rId5"/>
     <p:sldId id="260" r:id="rId6"/>
-    <p:sldId id="261" r:id="rId7"/>
-    <p:sldId id="262" r:id="rId8"/>
-    <p:sldId id="263" r:id="rId9"/>
-    <p:sldId id="264" r:id="rId10"/>
-    <p:sldId id="266" r:id="rId11"/>
-    <p:sldId id="265" r:id="rId12"/>
+    <p:sldId id="262" r:id="rId7"/>
+    <p:sldId id="263" r:id="rId8"/>
+    <p:sldId id="264" r:id="rId9"/>
+    <p:sldId id="266" r:id="rId10"/>
+    <p:sldId id="268" r:id="rId11"/>
+    <p:sldId id="269" r:id="rId12"/>
+    <p:sldId id="270" r:id="rId13"/>
+    <p:sldId id="271" r:id="rId14"/>
   </p:sldIdLst>
   <p:sldSz cx="12192000" cy="6858000"/>
   <p:notesSz cx="6858000" cy="9144000"/>
@@ -3408,7 +3410,7 @@
         <p:cNvPr id="1" name="">
           <a:extLst>
             <a:ext uri="{FF2B5EF4-FFF2-40B4-BE49-F238E27FC236}">
-              <a16:creationId xmlns:a16="http://schemas.microsoft.com/office/drawing/2014/main" id="{155FE065-1083-E3AA-89D2-48DFFEBB22FB}"/>
+              <a16:creationId xmlns:a16="http://schemas.microsoft.com/office/drawing/2014/main" id="{A11B529A-3711-E449-E949-CF78506B43D1}"/>
             </a:ext>
           </a:extLst>
         </p:cNvPr>
@@ -3428,7 +3430,7 @@
           <p:cNvPr id="2" name="標題 1">
             <a:extLst>
               <a:ext uri="{FF2B5EF4-FFF2-40B4-BE49-F238E27FC236}">
-                <a16:creationId xmlns:a16="http://schemas.microsoft.com/office/drawing/2014/main" id="{8E87F900-06DA-417E-F0A2-6F535EBD17BB}"/>
+                <a16:creationId xmlns:a16="http://schemas.microsoft.com/office/drawing/2014/main" id="{4E38731B-FB1B-E71D-6971-5FC80C05A3E6}"/>
               </a:ext>
             </a:extLst>
           </p:cNvPr>
@@ -3446,17 +3448,22 @@
           <a:p>
             <a:r>
               <a:rPr lang="zh-TW" altLang="en-US" dirty="0"/>
-              <a:t>換門選到跑車的機率估計值分布</a:t>
+              <a:t>換門選到跑車的機率</a:t>
             </a:r>
+            <a:r>
+              <a:rPr lang="en-US" altLang="zh-TW" dirty="0"/>
+              <a:t>bootstrap</a:t>
+            </a:r>
+            <a:endParaRPr lang="zh-TW" altLang="en-US" dirty="0"/>
           </a:p>
         </p:txBody>
       </p:sp>
       <p:pic>
         <p:nvPicPr>
-          <p:cNvPr id="4" name="圖片 3">
-            <a:extLst>
-              <a:ext uri="{FF2B5EF4-FFF2-40B4-BE49-F238E27FC236}">
-                <a16:creationId xmlns:a16="http://schemas.microsoft.com/office/drawing/2014/main" id="{8DCD45FD-EC4B-4CB6-6626-A3ED6BC2A19E}"/>
+          <p:cNvPr id="6" name="圖片 5">
+            <a:extLst>
+              <a:ext uri="{FF2B5EF4-FFF2-40B4-BE49-F238E27FC236}">
+                <a16:creationId xmlns:a16="http://schemas.microsoft.com/office/drawing/2014/main" id="{EC04CD31-E58F-A599-9C8F-0CBA9E39E7F3}"/>
               </a:ext>
             </a:extLst>
           </p:cNvPr>
@@ -3473,18 +3480,626 @@
         </p:blipFill>
         <p:spPr>
           <a:xfrm>
-            <a:off x="2490699" y="1564564"/>
-            <a:ext cx="7210601" cy="4739964"/>
+            <a:off x="838200" y="1381247"/>
+            <a:ext cx="6698216" cy="5111628"/>
           </a:xfrm>
           <a:prstGeom prst="rect">
             <a:avLst/>
           </a:prstGeom>
         </p:spPr>
       </p:pic>
+      <p:graphicFrame>
+        <p:nvGraphicFramePr>
+          <p:cNvPr id="7" name="表格 6">
+            <a:extLst>
+              <a:ext uri="{FF2B5EF4-FFF2-40B4-BE49-F238E27FC236}">
+                <a16:creationId xmlns:a16="http://schemas.microsoft.com/office/drawing/2014/main" id="{04067146-CC14-C1C9-4C9B-61DAB749A3B5}"/>
+              </a:ext>
+            </a:extLst>
+          </p:cNvPr>
+          <p:cNvGraphicFramePr>
+            <a:graphicFrameLocks noGrp="1"/>
+          </p:cNvGraphicFramePr>
+          <p:nvPr>
+            <p:extLst>
+              <p:ext uri="{D42A27DB-BD31-4B8C-83A1-F6EECF244321}">
+                <p14:modId xmlns:p14="http://schemas.microsoft.com/office/powerpoint/2010/main" val="700759900"/>
+              </p:ext>
+            </p:extLst>
+          </p:nvPr>
+        </p:nvGraphicFramePr>
+        <p:xfrm>
+          <a:off x="5938344" y="3429000"/>
+          <a:ext cx="5962868" cy="1325563"/>
+        </p:xfrm>
+        <a:graphic>
+          <a:graphicData uri="http://schemas.openxmlformats.org/drawingml/2006/table">
+            <a:tbl>
+              <a:tblPr firstRow="1" bandRow="1">
+                <a:tableStyleId>{5C22544A-7EE6-4342-B048-85BDC9FD1C3A}</a:tableStyleId>
+              </a:tblPr>
+              <a:tblGrid>
+                <a:gridCol w="1490717">
+                  <a:extLst>
+                    <a:ext uri="{9D8B030D-6E8A-4147-A177-3AD203B41FA5}">
+                      <a16:colId xmlns:a16="http://schemas.microsoft.com/office/drawing/2014/main" val="3945390195"/>
+                    </a:ext>
+                  </a:extLst>
+                </a:gridCol>
+                <a:gridCol w="1490717">
+                  <a:extLst>
+                    <a:ext uri="{9D8B030D-6E8A-4147-A177-3AD203B41FA5}">
+                      <a16:colId xmlns:a16="http://schemas.microsoft.com/office/drawing/2014/main" val="1634968925"/>
+                    </a:ext>
+                  </a:extLst>
+                </a:gridCol>
+                <a:gridCol w="1490717">
+                  <a:extLst>
+                    <a:ext uri="{9D8B030D-6E8A-4147-A177-3AD203B41FA5}">
+                      <a16:colId xmlns:a16="http://schemas.microsoft.com/office/drawing/2014/main" val="2116488310"/>
+                    </a:ext>
+                  </a:extLst>
+                </a:gridCol>
+                <a:gridCol w="1490717">
+                  <a:extLst>
+                    <a:ext uri="{9D8B030D-6E8A-4147-A177-3AD203B41FA5}">
+                      <a16:colId xmlns:a16="http://schemas.microsoft.com/office/drawing/2014/main" val="1012104654"/>
+                    </a:ext>
+                  </a:extLst>
+                </a:gridCol>
+              </a:tblGrid>
+              <a:tr h="502857">
+                <a:tc>
+                  <a:txBody>
+                    <a:bodyPr/>
+                    <a:lstStyle/>
+                    <a:p>
+                      <a:pPr algn="ctr"/>
+                      <a:endParaRPr lang="zh-TW" altLang="en-US" sz="1800" b="0" dirty="0">
+                        <a:solidFill>
+                          <a:schemeClr val="tx1"/>
+                        </a:solidFill>
+                      </a:endParaRPr>
+                    </a:p>
+                  </a:txBody>
+                  <a:tcPr anchor="ctr">
+                    <a:lnL w="12700" cap="flat" cmpd="sng" algn="ctr">
+                      <a:solidFill>
+                        <a:schemeClr val="tx1"/>
+                      </a:solidFill>
+                      <a:prstDash val="solid"/>
+                      <a:round/>
+                      <a:headEnd type="none" w="med" len="med"/>
+                      <a:tailEnd type="none" w="med" len="med"/>
+                    </a:lnL>
+                    <a:lnR w="12700" cap="flat" cmpd="sng" algn="ctr">
+                      <a:solidFill>
+                        <a:schemeClr val="tx1"/>
+                      </a:solidFill>
+                      <a:prstDash val="solid"/>
+                      <a:round/>
+                      <a:headEnd type="none" w="med" len="med"/>
+                      <a:tailEnd type="none" w="med" len="med"/>
+                    </a:lnR>
+                    <a:lnT w="12700" cap="flat" cmpd="sng" algn="ctr">
+                      <a:solidFill>
+                        <a:schemeClr val="tx1"/>
+                      </a:solidFill>
+                      <a:prstDash val="solid"/>
+                      <a:round/>
+                      <a:headEnd type="none" w="med" len="med"/>
+                      <a:tailEnd type="none" w="med" len="med"/>
+                    </a:lnT>
+                    <a:lnB w="12700" cap="flat" cmpd="sng" algn="ctr">
+                      <a:solidFill>
+                        <a:schemeClr val="tx1"/>
+                      </a:solidFill>
+                      <a:prstDash val="solid"/>
+                      <a:round/>
+                      <a:headEnd type="none" w="med" len="med"/>
+                      <a:tailEnd type="none" w="med" len="med"/>
+                    </a:lnB>
+                    <a:noFill/>
+                  </a:tcPr>
+                </a:tc>
+                <a:tc>
+                  <a:txBody>
+                    <a:bodyPr/>
+                    <a:lstStyle/>
+                    <a:p>
+                      <a:pPr algn="ctr" latinLnBrk="1"/>
+                      <a:r>
+                        <a:rPr lang="en-US" altLang="zh-TW" sz="1800" b="0" i="0" kern="1200" dirty="0">
+                          <a:solidFill>
+                            <a:schemeClr val="tx1"/>
+                          </a:solidFill>
+                          <a:effectLst/>
+                          <a:latin typeface="+mn-lt"/>
+                          <a:ea typeface="+mn-ea"/>
+                          <a:cs typeface="+mn-cs"/>
+                        </a:rPr>
+                        <a:t>original</a:t>
+                      </a:r>
+                    </a:p>
+                  </a:txBody>
+                  <a:tcPr anchor="ctr">
+                    <a:lnL w="12700" cap="flat" cmpd="sng" algn="ctr">
+                      <a:solidFill>
+                        <a:schemeClr val="tx1"/>
+                      </a:solidFill>
+                      <a:prstDash val="solid"/>
+                      <a:round/>
+                      <a:headEnd type="none" w="med" len="med"/>
+                      <a:tailEnd type="none" w="med" len="med"/>
+                    </a:lnL>
+                    <a:lnR w="12700" cap="flat" cmpd="sng" algn="ctr">
+                      <a:solidFill>
+                        <a:schemeClr val="tx1"/>
+                      </a:solidFill>
+                      <a:prstDash val="solid"/>
+                      <a:round/>
+                      <a:headEnd type="none" w="med" len="med"/>
+                      <a:tailEnd type="none" w="med" len="med"/>
+                    </a:lnR>
+                    <a:lnT w="12700" cap="flat" cmpd="sng" algn="ctr">
+                      <a:solidFill>
+                        <a:schemeClr val="tx1"/>
+                      </a:solidFill>
+                      <a:prstDash val="solid"/>
+                      <a:round/>
+                      <a:headEnd type="none" w="med" len="med"/>
+                      <a:tailEnd type="none" w="med" len="med"/>
+                    </a:lnT>
+                    <a:lnB w="12700" cap="flat" cmpd="sng" algn="ctr">
+                      <a:solidFill>
+                        <a:schemeClr val="tx1"/>
+                      </a:solidFill>
+                      <a:prstDash val="solid"/>
+                      <a:round/>
+                      <a:headEnd type="none" w="med" len="med"/>
+                      <a:tailEnd type="none" w="med" len="med"/>
+                    </a:lnB>
+                    <a:noFill/>
+                  </a:tcPr>
+                </a:tc>
+                <a:tc>
+                  <a:txBody>
+                    <a:bodyPr/>
+                    <a:lstStyle/>
+                    <a:p>
+                      <a:pPr algn="ctr" latinLnBrk="1"/>
+                      <a:r>
+                        <a:rPr lang="en-US" altLang="zh-TW" sz="1800" b="0" i="0" kern="1200" dirty="0">
+                          <a:solidFill>
+                            <a:schemeClr val="tx1"/>
+                          </a:solidFill>
+                          <a:effectLst/>
+                          <a:latin typeface="+mn-lt"/>
+                          <a:ea typeface="+mn-ea"/>
+                          <a:cs typeface="+mn-cs"/>
+                        </a:rPr>
+                        <a:t>bias</a:t>
+                      </a:r>
+                    </a:p>
+                  </a:txBody>
+                  <a:tcPr anchor="ctr">
+                    <a:lnL w="12700" cap="flat" cmpd="sng" algn="ctr">
+                      <a:solidFill>
+                        <a:schemeClr val="tx1"/>
+                      </a:solidFill>
+                      <a:prstDash val="solid"/>
+                      <a:round/>
+                      <a:headEnd type="none" w="med" len="med"/>
+                      <a:tailEnd type="none" w="med" len="med"/>
+                    </a:lnL>
+                    <a:lnR w="12700" cap="flat" cmpd="sng" algn="ctr">
+                      <a:solidFill>
+                        <a:schemeClr val="tx1"/>
+                      </a:solidFill>
+                      <a:prstDash val="solid"/>
+                      <a:round/>
+                      <a:headEnd type="none" w="med" len="med"/>
+                      <a:tailEnd type="none" w="med" len="med"/>
+                    </a:lnR>
+                    <a:lnT w="12700" cap="flat" cmpd="sng" algn="ctr">
+                      <a:solidFill>
+                        <a:schemeClr val="tx1"/>
+                      </a:solidFill>
+                      <a:prstDash val="solid"/>
+                      <a:round/>
+                      <a:headEnd type="none" w="med" len="med"/>
+                      <a:tailEnd type="none" w="med" len="med"/>
+                    </a:lnT>
+                    <a:lnB w="12700" cap="flat" cmpd="sng" algn="ctr">
+                      <a:solidFill>
+                        <a:schemeClr val="tx1"/>
+                      </a:solidFill>
+                      <a:prstDash val="solid"/>
+                      <a:round/>
+                      <a:headEnd type="none" w="med" len="med"/>
+                      <a:tailEnd type="none" w="med" len="med"/>
+                    </a:lnB>
+                    <a:noFill/>
+                  </a:tcPr>
+                </a:tc>
+                <a:tc>
+                  <a:txBody>
+                    <a:bodyPr/>
+                    <a:lstStyle/>
+                    <a:p>
+                      <a:pPr marL="0" marR="0" lvl="0" indent="0" algn="ctr" defTabSz="914400" rtl="0" eaLnBrk="1" fontAlgn="auto" latinLnBrk="0" hangingPunct="1">
+                        <a:lnSpc>
+                          <a:spcPct val="100000"/>
+                        </a:lnSpc>
+                        <a:spcBef>
+                          <a:spcPts val="0"/>
+                        </a:spcBef>
+                        <a:spcAft>
+                          <a:spcPts val="0"/>
+                        </a:spcAft>
+                        <a:buClrTx/>
+                        <a:buSzTx/>
+                        <a:buFontTx/>
+                        <a:buNone/>
+                        <a:tabLst/>
+                        <a:defRPr/>
+                      </a:pPr>
+                      <a:r>
+                        <a:rPr lang="en-US" altLang="zh-TW" sz="1800" b="0" i="0" kern="1200" dirty="0">
+                          <a:solidFill>
+                            <a:schemeClr val="tx1"/>
+                          </a:solidFill>
+                          <a:effectLst/>
+                          <a:latin typeface="+mn-lt"/>
+                          <a:ea typeface="+mn-ea"/>
+                          <a:cs typeface="+mn-cs"/>
+                        </a:rPr>
+                        <a:t>std. error</a:t>
+                      </a:r>
+                    </a:p>
+                  </a:txBody>
+                  <a:tcPr anchor="ctr">
+                    <a:lnL w="12700" cap="flat" cmpd="sng" algn="ctr">
+                      <a:solidFill>
+                        <a:schemeClr val="tx1"/>
+                      </a:solidFill>
+                      <a:prstDash val="solid"/>
+                      <a:round/>
+                      <a:headEnd type="none" w="med" len="med"/>
+                      <a:tailEnd type="none" w="med" len="med"/>
+                    </a:lnL>
+                    <a:lnR w="12700" cap="flat" cmpd="sng" algn="ctr">
+                      <a:solidFill>
+                        <a:schemeClr val="tx1"/>
+                      </a:solidFill>
+                      <a:prstDash val="solid"/>
+                      <a:round/>
+                      <a:headEnd type="none" w="med" len="med"/>
+                      <a:tailEnd type="none" w="med" len="med"/>
+                    </a:lnR>
+                    <a:lnT w="12700" cap="flat" cmpd="sng" algn="ctr">
+                      <a:solidFill>
+                        <a:schemeClr val="tx1"/>
+                      </a:solidFill>
+                      <a:prstDash val="solid"/>
+                      <a:round/>
+                      <a:headEnd type="none" w="med" len="med"/>
+                      <a:tailEnd type="none" w="med" len="med"/>
+                    </a:lnT>
+                    <a:lnB w="12700" cap="flat" cmpd="sng" algn="ctr">
+                      <a:solidFill>
+                        <a:schemeClr val="tx1"/>
+                      </a:solidFill>
+                      <a:prstDash val="solid"/>
+                      <a:round/>
+                      <a:headEnd type="none" w="med" len="med"/>
+                      <a:tailEnd type="none" w="med" len="med"/>
+                    </a:lnB>
+                    <a:noFill/>
+                  </a:tcPr>
+                </a:tc>
+                <a:extLst>
+                  <a:ext uri="{0D108BD9-81ED-4DB2-BD59-A6C34878D82A}">
+                    <a16:rowId xmlns:a16="http://schemas.microsoft.com/office/drawing/2014/main" val="3221030795"/>
+                  </a:ext>
+                </a:extLst>
+              </a:tr>
+              <a:tr h="822706">
+                <a:tc>
+                  <a:txBody>
+                    <a:bodyPr/>
+                    <a:lstStyle/>
+                    <a:p>
+                      <a:pPr marL="0" marR="0" lvl="0" indent="0" algn="ctr" defTabSz="914400" rtl="0" eaLnBrk="1" fontAlgn="auto" latinLnBrk="0" hangingPunct="1">
+                        <a:lnSpc>
+                          <a:spcPct val="100000"/>
+                        </a:lnSpc>
+                        <a:spcBef>
+                          <a:spcPts val="0"/>
+                        </a:spcBef>
+                        <a:spcAft>
+                          <a:spcPts val="0"/>
+                        </a:spcAft>
+                        <a:buClrTx/>
+                        <a:buSzTx/>
+                        <a:buFontTx/>
+                        <a:buNone/>
+                        <a:tabLst/>
+                        <a:defRPr/>
+                      </a:pPr>
+                      <a:r>
+                        <a:rPr lang="en-US" altLang="zh-TW" sz="1800" b="0" i="0" kern="1200" dirty="0" err="1">
+                          <a:solidFill>
+                            <a:schemeClr val="tx1"/>
+                          </a:solidFill>
+                          <a:effectLst/>
+                          <a:latin typeface="+mn-lt"/>
+                          <a:ea typeface="+mn-ea"/>
+                          <a:cs typeface="+mn-cs"/>
+                        </a:rPr>
+                        <a:t>boostrap</a:t>
+                      </a:r>
+                      <a:endParaRPr lang="zh-TW" altLang="en-US" sz="1800" b="0" i="0" kern="1200" dirty="0">
+                        <a:solidFill>
+                          <a:schemeClr val="tx1"/>
+                        </a:solidFill>
+                        <a:effectLst/>
+                        <a:latin typeface="+mn-lt"/>
+                        <a:ea typeface="+mn-ea"/>
+                        <a:cs typeface="+mn-cs"/>
+                      </a:endParaRPr>
+                    </a:p>
+                  </a:txBody>
+                  <a:tcPr anchor="ctr">
+                    <a:lnL w="12700" cap="flat" cmpd="sng" algn="ctr">
+                      <a:solidFill>
+                        <a:schemeClr val="tx1"/>
+                      </a:solidFill>
+                      <a:prstDash val="solid"/>
+                      <a:round/>
+                      <a:headEnd type="none" w="med" len="med"/>
+                      <a:tailEnd type="none" w="med" len="med"/>
+                    </a:lnL>
+                    <a:lnR w="12700" cap="flat" cmpd="sng" algn="ctr">
+                      <a:solidFill>
+                        <a:schemeClr val="tx1"/>
+                      </a:solidFill>
+                      <a:prstDash val="solid"/>
+                      <a:round/>
+                      <a:headEnd type="none" w="med" len="med"/>
+                      <a:tailEnd type="none" w="med" len="med"/>
+                    </a:lnR>
+                    <a:lnT w="12700" cap="flat" cmpd="sng" algn="ctr">
+                      <a:solidFill>
+                        <a:schemeClr val="tx1"/>
+                      </a:solidFill>
+                      <a:prstDash val="solid"/>
+                      <a:round/>
+                      <a:headEnd type="none" w="med" len="med"/>
+                      <a:tailEnd type="none" w="med" len="med"/>
+                    </a:lnT>
+                    <a:lnB w="12700" cap="flat" cmpd="sng" algn="ctr">
+                      <a:solidFill>
+                        <a:schemeClr val="tx1"/>
+                      </a:solidFill>
+                      <a:prstDash val="solid"/>
+                      <a:round/>
+                      <a:headEnd type="none" w="med" len="med"/>
+                      <a:tailEnd type="none" w="med" len="med"/>
+                    </a:lnB>
+                    <a:noFill/>
+                  </a:tcPr>
+                </a:tc>
+                <a:tc>
+                  <a:txBody>
+                    <a:bodyPr/>
+                    <a:lstStyle/>
+                    <a:p>
+                      <a:pPr algn="ctr" latinLnBrk="1"/>
+                      <a:r>
+                        <a:rPr lang="en-US" altLang="zh-TW" sz="1800" b="0" i="0" kern="1200" dirty="0">
+                          <a:solidFill>
+                            <a:schemeClr val="dk1"/>
+                          </a:solidFill>
+                          <a:effectLst/>
+                          <a:latin typeface="+mn-lt"/>
+                          <a:ea typeface="+mn-ea"/>
+                          <a:cs typeface="+mn-cs"/>
+                        </a:rPr>
+                        <a:t>0.6667018</a:t>
+                      </a:r>
+                    </a:p>
+                  </a:txBody>
+                  <a:tcPr anchor="ctr">
+                    <a:lnL w="12700" cap="flat" cmpd="sng" algn="ctr">
+                      <a:solidFill>
+                        <a:schemeClr val="tx1"/>
+                      </a:solidFill>
+                      <a:prstDash val="solid"/>
+                      <a:round/>
+                      <a:headEnd type="none" w="med" len="med"/>
+                      <a:tailEnd type="none" w="med" len="med"/>
+                    </a:lnL>
+                    <a:lnR w="12700" cap="flat" cmpd="sng" algn="ctr">
+                      <a:solidFill>
+                        <a:schemeClr val="tx1"/>
+                      </a:solidFill>
+                      <a:prstDash val="solid"/>
+                      <a:round/>
+                      <a:headEnd type="none" w="med" len="med"/>
+                      <a:tailEnd type="none" w="med" len="med"/>
+                    </a:lnR>
+                    <a:lnT w="12700" cap="flat" cmpd="sng" algn="ctr">
+                      <a:solidFill>
+                        <a:schemeClr val="tx1"/>
+                      </a:solidFill>
+                      <a:prstDash val="solid"/>
+                      <a:round/>
+                      <a:headEnd type="none" w="med" len="med"/>
+                      <a:tailEnd type="none" w="med" len="med"/>
+                    </a:lnT>
+                    <a:lnB w="12700" cap="flat" cmpd="sng" algn="ctr">
+                      <a:solidFill>
+                        <a:schemeClr val="tx1"/>
+                      </a:solidFill>
+                      <a:prstDash val="solid"/>
+                      <a:round/>
+                      <a:headEnd type="none" w="med" len="med"/>
+                      <a:tailEnd type="none" w="med" len="med"/>
+                    </a:lnB>
+                    <a:noFill/>
+                  </a:tcPr>
+                </a:tc>
+                <a:tc>
+                  <a:txBody>
+                    <a:bodyPr/>
+                    <a:lstStyle/>
+                    <a:p>
+                      <a:pPr algn="ctr" latinLnBrk="1"/>
+                      <a:r>
+                        <a:rPr lang="en-US" altLang="zh-TW" sz="1800" b="0" i="0" kern="1200" dirty="0">
+                          <a:solidFill>
+                            <a:schemeClr val="dk1"/>
+                          </a:solidFill>
+                          <a:effectLst/>
+                          <a:latin typeface="+mn-lt"/>
+                          <a:ea typeface="+mn-ea"/>
+                          <a:cs typeface="+mn-cs"/>
+                        </a:rPr>
+                        <a:t>2.51497e-07</a:t>
+                      </a:r>
+                    </a:p>
+                  </a:txBody>
+                  <a:tcPr anchor="ctr">
+                    <a:lnL w="12700" cap="flat" cmpd="sng" algn="ctr">
+                      <a:solidFill>
+                        <a:schemeClr val="tx1"/>
+                      </a:solidFill>
+                      <a:prstDash val="solid"/>
+                      <a:round/>
+                      <a:headEnd type="none" w="med" len="med"/>
+                      <a:tailEnd type="none" w="med" len="med"/>
+                    </a:lnL>
+                    <a:lnR w="12700" cap="flat" cmpd="sng" algn="ctr">
+                      <a:solidFill>
+                        <a:schemeClr val="tx1"/>
+                      </a:solidFill>
+                      <a:prstDash val="solid"/>
+                      <a:round/>
+                      <a:headEnd type="none" w="med" len="med"/>
+                      <a:tailEnd type="none" w="med" len="med"/>
+                    </a:lnR>
+                    <a:lnT w="12700" cap="flat" cmpd="sng" algn="ctr">
+                      <a:solidFill>
+                        <a:schemeClr val="tx1"/>
+                      </a:solidFill>
+                      <a:prstDash val="solid"/>
+                      <a:round/>
+                      <a:headEnd type="none" w="med" len="med"/>
+                      <a:tailEnd type="none" w="med" len="med"/>
+                    </a:lnT>
+                    <a:lnB w="12700" cap="flat" cmpd="sng" algn="ctr">
+                      <a:solidFill>
+                        <a:schemeClr val="tx1"/>
+                      </a:solidFill>
+                      <a:prstDash val="solid"/>
+                      <a:round/>
+                      <a:headEnd type="none" w="med" len="med"/>
+                      <a:tailEnd type="none" w="med" len="med"/>
+                    </a:lnB>
+                    <a:noFill/>
+                  </a:tcPr>
+                </a:tc>
+                <a:tc>
+                  <a:txBody>
+                    <a:bodyPr/>
+                    <a:lstStyle/>
+                    <a:p>
+                      <a:pPr marL="0" marR="0" lvl="0" indent="0" algn="ctr" defTabSz="914400" rtl="0" eaLnBrk="1" fontAlgn="auto" latinLnBrk="1" hangingPunct="1">
+                        <a:lnSpc>
+                          <a:spcPct val="100000"/>
+                        </a:lnSpc>
+                        <a:spcBef>
+                          <a:spcPts val="0"/>
+                        </a:spcBef>
+                        <a:spcAft>
+                          <a:spcPts val="0"/>
+                        </a:spcAft>
+                        <a:buClrTx/>
+                        <a:buSzTx/>
+                        <a:buFontTx/>
+                        <a:buNone/>
+                        <a:tabLst/>
+                        <a:defRPr/>
+                      </a:pPr>
+                      <a:r>
+                        <a:rPr lang="en-US" altLang="zh-TW" sz="1800" b="0" i="0" kern="1200" dirty="0">
+                          <a:solidFill>
+                            <a:schemeClr val="dk1"/>
+                          </a:solidFill>
+                          <a:effectLst/>
+                          <a:latin typeface="+mn-lt"/>
+                          <a:ea typeface="+mn-ea"/>
+                          <a:cs typeface="+mn-cs"/>
+                        </a:rPr>
+                        <a:t>3.550272e-05</a:t>
+                      </a:r>
+                    </a:p>
+                  </a:txBody>
+                  <a:tcPr anchor="ctr">
+                    <a:lnL w="12700" cap="flat" cmpd="sng" algn="ctr">
+                      <a:solidFill>
+                        <a:schemeClr val="tx1"/>
+                      </a:solidFill>
+                      <a:prstDash val="solid"/>
+                      <a:round/>
+                      <a:headEnd type="none" w="med" len="med"/>
+                      <a:tailEnd type="none" w="med" len="med"/>
+                    </a:lnL>
+                    <a:lnR w="12700" cap="flat" cmpd="sng" algn="ctr">
+                      <a:solidFill>
+                        <a:schemeClr val="tx1"/>
+                      </a:solidFill>
+                      <a:prstDash val="solid"/>
+                      <a:round/>
+                      <a:headEnd type="none" w="med" len="med"/>
+                      <a:tailEnd type="none" w="med" len="med"/>
+                    </a:lnR>
+                    <a:lnT w="12700" cap="flat" cmpd="sng" algn="ctr">
+                      <a:solidFill>
+                        <a:schemeClr val="tx1"/>
+                      </a:solidFill>
+                      <a:prstDash val="solid"/>
+                      <a:round/>
+                      <a:headEnd type="none" w="med" len="med"/>
+                      <a:tailEnd type="none" w="med" len="med"/>
+                    </a:lnT>
+                    <a:lnB w="12700" cap="flat" cmpd="sng" algn="ctr">
+                      <a:solidFill>
+                        <a:schemeClr val="tx1"/>
+                      </a:solidFill>
+                      <a:prstDash val="solid"/>
+                      <a:round/>
+                      <a:headEnd type="none" w="med" len="med"/>
+                      <a:tailEnd type="none" w="med" len="med"/>
+                    </a:lnB>
+                    <a:noFill/>
+                  </a:tcPr>
+                </a:tc>
+                <a:extLst>
+                  <a:ext uri="{0D108BD9-81ED-4DB2-BD59-A6C34878D82A}">
+                    <a16:rowId xmlns:a16="http://schemas.microsoft.com/office/drawing/2014/main" val="3358222618"/>
+                  </a:ext>
+                </a:extLst>
+              </a:tr>
+            </a:tbl>
+          </a:graphicData>
+        </a:graphic>
+      </p:graphicFrame>
     </p:spTree>
     <p:extLst>
       <p:ext uri="{BB962C8B-B14F-4D97-AF65-F5344CB8AC3E}">
-        <p14:creationId xmlns:p14="http://schemas.microsoft.com/office/powerpoint/2010/main" val="972903551"/>
+        <p14:creationId xmlns:p14="http://schemas.microsoft.com/office/powerpoint/2010/main" val="3853679858"/>
       </p:ext>
     </p:extLst>
   </p:cSld>
@@ -3502,7 +4117,7 @@
         <p:cNvPr id="1" name="">
           <a:extLst>
             <a:ext uri="{FF2B5EF4-FFF2-40B4-BE49-F238E27FC236}">
-              <a16:creationId xmlns:a16="http://schemas.microsoft.com/office/drawing/2014/main" id="{F2060864-559F-FB63-3402-895F3171483D}"/>
+              <a16:creationId xmlns:a16="http://schemas.microsoft.com/office/drawing/2014/main" id="{FF80C37E-C445-183E-3B38-D86BA0815E36}"/>
             </a:ext>
           </a:extLst>
         </p:cNvPr>
@@ -3522,7 +4137,7 @@
           <p:cNvPr id="2" name="標題 1">
             <a:extLst>
               <a:ext uri="{FF2B5EF4-FFF2-40B4-BE49-F238E27FC236}">
-                <a16:creationId xmlns:a16="http://schemas.microsoft.com/office/drawing/2014/main" id="{B16E5A5A-CF25-19DC-37E6-AEE0EC121F51}"/>
+                <a16:creationId xmlns:a16="http://schemas.microsoft.com/office/drawing/2014/main" id="{36F94FEA-EE65-A5F9-1DCF-758820CD15F1}"/>
               </a:ext>
             </a:extLst>
           </p:cNvPr>
@@ -3540,17 +4155,52 @@
           <a:p>
             <a:r>
               <a:rPr lang="zh-TW" altLang="en-US" dirty="0"/>
-              <a:t>換門選到跑車的機率估計值分布</a:t>
+              <a:t>換門選到跑車的機率</a:t>
             </a:r>
+            <a:r>
+              <a:rPr lang="en-US" altLang="zh-TW" dirty="0" err="1"/>
+              <a:t>jacknife</a:t>
+            </a:r>
+            <a:endParaRPr lang="zh-TW" altLang="en-US" dirty="0"/>
           </a:p>
         </p:txBody>
       </p:sp>
+      <p:pic>
+        <p:nvPicPr>
+          <p:cNvPr id="4" name="圖片 3">
+            <a:extLst>
+              <a:ext uri="{FF2B5EF4-FFF2-40B4-BE49-F238E27FC236}">
+                <a16:creationId xmlns:a16="http://schemas.microsoft.com/office/drawing/2014/main" id="{27A3A811-8555-30A2-331E-642692DC6673}"/>
+              </a:ext>
+            </a:extLst>
+          </p:cNvPr>
+          <p:cNvPicPr>
+            <a:picLocks noChangeAspect="1"/>
+          </p:cNvPicPr>
+          <p:nvPr/>
+        </p:nvPicPr>
+        <p:blipFill>
+          <a:blip r:embed="rId2"/>
+          <a:stretch>
+            <a:fillRect/>
+          </a:stretch>
+        </p:blipFill>
+        <p:spPr>
+          <a:xfrm>
+            <a:off x="354725" y="1860331"/>
+            <a:ext cx="7615205" cy="3871795"/>
+          </a:xfrm>
+          <a:prstGeom prst="rect">
+            <a:avLst/>
+          </a:prstGeom>
+        </p:spPr>
+      </p:pic>
       <p:graphicFrame>
         <p:nvGraphicFramePr>
-          <p:cNvPr id="3" name="表格 2">
-            <a:extLst>
-              <a:ext uri="{FF2B5EF4-FFF2-40B4-BE49-F238E27FC236}">
-                <a16:creationId xmlns:a16="http://schemas.microsoft.com/office/drawing/2014/main" id="{4286F8BE-0C89-EF83-3D37-4D732B9D84F1}"/>
+          <p:cNvPr id="5" name="表格 4">
+            <a:extLst>
+              <a:ext uri="{FF2B5EF4-FFF2-40B4-BE49-F238E27FC236}">
+                <a16:creationId xmlns:a16="http://schemas.microsoft.com/office/drawing/2014/main" id="{8F7F677F-7A99-589A-149F-1B4CA7C8F617}"/>
               </a:ext>
             </a:extLst>
           </p:cNvPr>
@@ -3560,14 +4210,14 @@
           <p:nvPr>
             <p:extLst>
               <p:ext uri="{D42A27DB-BD31-4B8C-83A1-F6EECF244321}">
-                <p14:modId xmlns:p14="http://schemas.microsoft.com/office/powerpoint/2010/main" val="3060671410"/>
+                <p14:modId xmlns:p14="http://schemas.microsoft.com/office/powerpoint/2010/main" val="3622287789"/>
               </p:ext>
             </p:extLst>
           </p:nvPr>
         </p:nvGraphicFramePr>
         <p:xfrm>
-          <a:off x="1401380" y="1938866"/>
-          <a:ext cx="9487338" cy="2696195"/>
+          <a:off x="5738649" y="3351650"/>
+          <a:ext cx="6348248" cy="1325563"/>
         </p:xfrm>
         <a:graphic>
           <a:graphicData uri="http://schemas.openxmlformats.org/drawingml/2006/table">
@@ -3576,42 +4226,50 @@
                 <a:tableStyleId>{5C22544A-7EE6-4342-B048-85BDC9FD1C3A}</a:tableStyleId>
               </a:tblPr>
               <a:tblGrid>
-                <a:gridCol w="3162446">
+                <a:gridCol w="1587062">
                   <a:extLst>
                     <a:ext uri="{9D8B030D-6E8A-4147-A177-3AD203B41FA5}">
                       <a16:colId xmlns:a16="http://schemas.microsoft.com/office/drawing/2014/main" val="3945390195"/>
                     </a:ext>
                   </a:extLst>
                 </a:gridCol>
-                <a:gridCol w="3162446">
+                <a:gridCol w="1587062">
                   <a:extLst>
                     <a:ext uri="{9D8B030D-6E8A-4147-A177-3AD203B41FA5}">
                       <a16:colId xmlns:a16="http://schemas.microsoft.com/office/drawing/2014/main" val="1634968925"/>
                     </a:ext>
                   </a:extLst>
                 </a:gridCol>
-                <a:gridCol w="3162446">
+                <a:gridCol w="1587062">
                   <a:extLst>
                     <a:ext uri="{9D8B030D-6E8A-4147-A177-3AD203B41FA5}">
                       <a16:colId xmlns:a16="http://schemas.microsoft.com/office/drawing/2014/main" val="2116488310"/>
                     </a:ext>
                   </a:extLst>
                 </a:gridCol>
+                <a:gridCol w="1587062">
+                  <a:extLst>
+                    <a:ext uri="{9D8B030D-6E8A-4147-A177-3AD203B41FA5}">
+                      <a16:colId xmlns:a16="http://schemas.microsoft.com/office/drawing/2014/main" val="1012104654"/>
+                    </a:ext>
+                  </a:extLst>
+                </a:gridCol>
               </a:tblGrid>
-              <a:tr h="570499">
+              <a:tr h="502857">
                 <a:tc>
                   <a:txBody>
                     <a:bodyPr/>
                     <a:lstStyle/>
                     <a:p>
-                      <a:endParaRPr lang="zh-TW" altLang="en-US" sz="2400" dirty="0">
+                      <a:pPr algn="ctr"/>
+                      <a:endParaRPr lang="zh-TW" altLang="en-US" sz="1800" b="0" dirty="0">
                         <a:solidFill>
                           <a:schemeClr val="tx1"/>
                         </a:solidFill>
                       </a:endParaRPr>
                     </a:p>
                   </a:txBody>
-                  <a:tcPr>
+                  <a:tcPr anchor="ctr">
                     <a:lnL w="12700" cap="flat" cmpd="sng" algn="ctr">
                       <a:solidFill>
                         <a:schemeClr val="tx1"/>
@@ -3656,22 +4314,22 @@
                     <a:bodyPr/>
                     <a:lstStyle/>
                     <a:p>
+                      <a:pPr algn="ctr" latinLnBrk="1"/>
                       <a:r>
-                        <a:rPr lang="en-US" altLang="zh-TW" sz="2400" dirty="0">
+                        <a:rPr lang="en-US" altLang="zh-TW" sz="1800" b="0" i="0" kern="1200" dirty="0">
                           <a:solidFill>
                             <a:schemeClr val="tx1"/>
                           </a:solidFill>
+                          <a:effectLst/>
+                          <a:latin typeface="+mn-lt"/>
+                          <a:ea typeface="+mn-ea"/>
+                          <a:cs typeface="+mn-cs"/>
                         </a:rPr>
-                        <a:t>Mean </a:t>
+                        <a:t>original</a:t>
                       </a:r>
-                      <a:endParaRPr lang="zh-TW" altLang="en-US" sz="2400" dirty="0">
-                        <a:solidFill>
-                          <a:schemeClr val="tx1"/>
-                        </a:solidFill>
-                      </a:endParaRPr>
                     </a:p>
                   </a:txBody>
-                  <a:tcPr>
+                  <a:tcPr anchor="ctr">
                     <a:lnL w="12700" cap="flat" cmpd="sng" algn="ctr">
                       <a:solidFill>
                         <a:schemeClr val="tx1"/>
@@ -3716,22 +4374,22 @@
                     <a:bodyPr/>
                     <a:lstStyle/>
                     <a:p>
+                      <a:pPr algn="ctr" latinLnBrk="1"/>
                       <a:r>
-                        <a:rPr lang="en-US" altLang="zh-TW" sz="2400" dirty="0">
+                        <a:rPr lang="en-US" altLang="zh-TW" sz="1800" b="0" i="0" kern="1200" dirty="0">
                           <a:solidFill>
                             <a:schemeClr val="tx1"/>
                           </a:solidFill>
+                          <a:effectLst/>
+                          <a:latin typeface="+mn-lt"/>
+                          <a:ea typeface="+mn-ea"/>
+                          <a:cs typeface="+mn-cs"/>
                         </a:rPr>
-                        <a:t>Var </a:t>
+                        <a:t>bias</a:t>
                       </a:r>
-                      <a:endParaRPr lang="zh-TW" altLang="en-US" sz="2400" dirty="0">
-                        <a:solidFill>
-                          <a:schemeClr val="tx1"/>
-                        </a:solidFill>
-                      </a:endParaRPr>
                     </a:p>
                   </a:txBody>
-                  <a:tcPr>
+                  <a:tcPr anchor="ctr">
                     <a:lnL w="12700" cap="flat" cmpd="sng" algn="ctr">
                       <a:solidFill>
                         <a:schemeClr val="tx1"/>
@@ -3771,19 +4429,12 @@
                     <a:noFill/>
                   </a:tcPr>
                 </a:tc>
-                <a:extLst>
-                  <a:ext uri="{0D108BD9-81ED-4DB2-BD59-A6C34878D82A}">
-                    <a16:rowId xmlns:a16="http://schemas.microsoft.com/office/drawing/2014/main" val="3221030795"/>
-                  </a:ext>
-                </a:extLst>
-              </a:tr>
-              <a:tr h="570499">
                 <a:tc>
                   <a:txBody>
                     <a:bodyPr/>
                     <a:lstStyle/>
                     <a:p>
-                      <a:pPr marL="0" marR="0" lvl="0" indent="0" algn="l" defTabSz="914400" rtl="0" eaLnBrk="1" fontAlgn="auto" latinLnBrk="0" hangingPunct="1">
+                      <a:pPr marL="0" marR="0" lvl="0" indent="0" algn="ctr" defTabSz="914400" rtl="0" eaLnBrk="1" fontAlgn="auto" latinLnBrk="0" hangingPunct="1">
                         <a:lnSpc>
                           <a:spcPct val="100000"/>
                         </a:lnSpc>
@@ -3801,7 +4452,7 @@
                         <a:defRPr/>
                       </a:pPr>
                       <a:r>
-                        <a:rPr lang="en-US" altLang="zh-TW" sz="2400" b="0" i="0" kern="1200" dirty="0">
+                        <a:rPr lang="en-US" altLang="zh-TW" sz="1800" b="0" i="0" kern="1200" dirty="0">
                           <a:solidFill>
                             <a:schemeClr val="tx1"/>
                           </a:solidFill>
@@ -3810,143 +4461,11 @@
                           <a:ea typeface="+mn-ea"/>
                           <a:cs typeface="+mn-cs"/>
                         </a:rPr>
-                        <a:t>R</a:t>
-                      </a:r>
-                      <a:r>
-                        <a:rPr lang="zh-TW" altLang="en-US" sz="2400" b="0" i="0" kern="1200" dirty="0">
-                          <a:solidFill>
-                            <a:schemeClr val="tx1"/>
-                          </a:solidFill>
-                          <a:effectLst/>
-                          <a:latin typeface="+mn-lt"/>
-                          <a:ea typeface="+mn-ea"/>
-                          <a:cs typeface="+mn-cs"/>
-                        </a:rPr>
-                        <a:t>內建的函數</a:t>
+                        <a:t>std. error</a:t>
                       </a:r>
                     </a:p>
                   </a:txBody>
-                  <a:tcPr>
-                    <a:lnL w="12700" cap="flat" cmpd="sng" algn="ctr">
-                      <a:solidFill>
-                        <a:schemeClr val="tx1"/>
-                      </a:solidFill>
-                      <a:prstDash val="solid"/>
-                      <a:round/>
-                      <a:headEnd type="none" w="med" len="med"/>
-                      <a:tailEnd type="none" w="med" len="med"/>
-                    </a:lnL>
-                    <a:lnR w="12700" cap="flat" cmpd="sng" algn="ctr">
-                      <a:solidFill>
-                        <a:schemeClr val="tx1"/>
-                      </a:solidFill>
-                      <a:prstDash val="solid"/>
-                      <a:round/>
-                      <a:headEnd type="none" w="med" len="med"/>
-                      <a:tailEnd type="none" w="med" len="med"/>
-                    </a:lnR>
-                    <a:lnT w="12700" cap="flat" cmpd="sng" algn="ctr">
-                      <a:solidFill>
-                        <a:schemeClr val="tx1"/>
-                      </a:solidFill>
-                      <a:prstDash val="solid"/>
-                      <a:round/>
-                      <a:headEnd type="none" w="med" len="med"/>
-                      <a:tailEnd type="none" w="med" len="med"/>
-                    </a:lnT>
-                    <a:lnB w="12700" cap="flat" cmpd="sng" algn="ctr">
-                      <a:solidFill>
-                        <a:schemeClr val="tx1"/>
-                      </a:solidFill>
-                      <a:prstDash val="solid"/>
-                      <a:round/>
-                      <a:headEnd type="none" w="med" len="med"/>
-                      <a:tailEnd type="none" w="med" len="med"/>
-                    </a:lnB>
-                    <a:noFill/>
-                  </a:tcPr>
-                </a:tc>
-                <a:tc>
-                  <a:txBody>
-                    <a:bodyPr/>
-                    <a:lstStyle/>
-                    <a:p>
-                      <a:pPr latinLnBrk="1"/>
-                      <a:r>
-                        <a:rPr lang="en-US" altLang="zh-TW" sz="2400" b="0" i="0" kern="1200" dirty="0">
-                          <a:solidFill>
-                            <a:schemeClr val="dk1"/>
-                          </a:solidFill>
-                          <a:effectLst/>
-                          <a:latin typeface="+mn-lt"/>
-                          <a:ea typeface="+mn-ea"/>
-                          <a:cs typeface="+mn-cs"/>
-                        </a:rPr>
-                        <a:t>0.666337</a:t>
-                      </a:r>
-                    </a:p>
-                  </a:txBody>
-                  <a:tcPr>
-                    <a:lnL w="12700" cap="flat" cmpd="sng" algn="ctr">
-                      <a:solidFill>
-                        <a:schemeClr val="tx1"/>
-                      </a:solidFill>
-                      <a:prstDash val="solid"/>
-                      <a:round/>
-                      <a:headEnd type="none" w="med" len="med"/>
-                      <a:tailEnd type="none" w="med" len="med"/>
-                    </a:lnL>
-                    <a:lnR w="12700" cap="flat" cmpd="sng" algn="ctr">
-                      <a:solidFill>
-                        <a:schemeClr val="tx1"/>
-                      </a:solidFill>
-                      <a:prstDash val="solid"/>
-                      <a:round/>
-                      <a:headEnd type="none" w="med" len="med"/>
-                      <a:tailEnd type="none" w="med" len="med"/>
-                    </a:lnR>
-                    <a:lnT w="12700" cap="flat" cmpd="sng" algn="ctr">
-                      <a:solidFill>
-                        <a:schemeClr val="tx1"/>
-                      </a:solidFill>
-                      <a:prstDash val="solid"/>
-                      <a:round/>
-                      <a:headEnd type="none" w="med" len="med"/>
-                      <a:tailEnd type="none" w="med" len="med"/>
-                    </a:lnT>
-                    <a:lnB w="12700" cap="flat" cmpd="sng" algn="ctr">
-                      <a:solidFill>
-                        <a:schemeClr val="tx1"/>
-                      </a:solidFill>
-                      <a:prstDash val="solid"/>
-                      <a:round/>
-                      <a:headEnd type="none" w="med" len="med"/>
-                      <a:tailEnd type="none" w="med" len="med"/>
-                    </a:lnB>
-                    <a:noFill/>
-                  </a:tcPr>
-                </a:tc>
-                <a:tc>
-                  <a:txBody>
-                    <a:bodyPr/>
-                    <a:lstStyle/>
-                    <a:p>
-                      <a:pPr latinLnBrk="1"/>
-                      <a:r>
-                        <a:rPr lang="en-US" altLang="zh-TW" sz="2400" b="0" i="0" kern="1200" dirty="0">
-                          <a:solidFill>
-                            <a:schemeClr val="dk1"/>
-                          </a:solidFill>
-                          <a:effectLst/>
-                          <a:latin typeface="+mn-lt"/>
-                          <a:ea typeface="+mn-ea"/>
-                          <a:cs typeface="+mn-cs"/>
-                        </a:rPr>
-                        <a:t>0.0002281916</a:t>
-                      </a:r>
-                    </a:p>
-                  </a:txBody>
-                  <a:tcPr>
+                  <a:tcPr anchor="ctr">
                     <a:lnL w="12700" cap="flat" cmpd="sng" algn="ctr">
                       <a:solidFill>
                         <a:schemeClr val="tx1"/>
@@ -3988,17 +4507,17 @@
                 </a:tc>
                 <a:extLst>
                   <a:ext uri="{0D108BD9-81ED-4DB2-BD59-A6C34878D82A}">
-                    <a16:rowId xmlns:a16="http://schemas.microsoft.com/office/drawing/2014/main" val="3358222618"/>
+                    <a16:rowId xmlns:a16="http://schemas.microsoft.com/office/drawing/2014/main" val="3221030795"/>
                   </a:ext>
                 </a:extLst>
               </a:tr>
-              <a:tr h="570499">
+              <a:tr h="822706">
                 <a:tc>
                   <a:txBody>
                     <a:bodyPr/>
                     <a:lstStyle/>
                     <a:p>
-                      <a:pPr marL="0" marR="0" lvl="0" indent="0" algn="l" defTabSz="914400" rtl="0" eaLnBrk="1" fontAlgn="auto" latinLnBrk="0" hangingPunct="1">
+                      <a:pPr marL="0" marR="0" lvl="0" indent="0" algn="ctr" defTabSz="914400" rtl="0" eaLnBrk="1" fontAlgn="auto" latinLnBrk="0" hangingPunct="1">
                         <a:lnSpc>
                           <a:spcPct val="100000"/>
                         </a:lnSpc>
@@ -4016,7 +4535,7 @@
                         <a:defRPr/>
                       </a:pPr>
                       <a:r>
-                        <a:rPr lang="en-US" altLang="zh-TW" sz="2400" b="0" i="0" kern="1200" dirty="0">
+                        <a:rPr lang="en-US" altLang="zh-TW" sz="1800" b="0" i="0" kern="1200" dirty="0" err="1">
                           <a:solidFill>
                             <a:schemeClr val="tx1"/>
                           </a:solidFill>
@@ -4025,11 +4544,140 @@
                           <a:ea typeface="+mn-ea"/>
                           <a:cs typeface="+mn-cs"/>
                         </a:rPr>
-                        <a:t>Inverse function</a:t>
+                        <a:t>Jacknife</a:t>
+                      </a:r>
+                      <a:endParaRPr lang="zh-TW" altLang="en-US" sz="1800" b="0" i="0" kern="1200" dirty="0">
+                        <a:solidFill>
+                          <a:schemeClr val="tx1"/>
+                        </a:solidFill>
+                        <a:effectLst/>
+                        <a:latin typeface="+mn-lt"/>
+                        <a:ea typeface="+mn-ea"/>
+                        <a:cs typeface="+mn-cs"/>
+                      </a:endParaRPr>
+                    </a:p>
+                  </a:txBody>
+                  <a:tcPr anchor="ctr">
+                    <a:lnL w="12700" cap="flat" cmpd="sng" algn="ctr">
+                      <a:solidFill>
+                        <a:schemeClr val="tx1"/>
+                      </a:solidFill>
+                      <a:prstDash val="solid"/>
+                      <a:round/>
+                      <a:headEnd type="none" w="med" len="med"/>
+                      <a:tailEnd type="none" w="med" len="med"/>
+                    </a:lnL>
+                    <a:lnR w="12700" cap="flat" cmpd="sng" algn="ctr">
+                      <a:solidFill>
+                        <a:schemeClr val="tx1"/>
+                      </a:solidFill>
+                      <a:prstDash val="solid"/>
+                      <a:round/>
+                      <a:headEnd type="none" w="med" len="med"/>
+                      <a:tailEnd type="none" w="med" len="med"/>
+                    </a:lnR>
+                    <a:lnT w="12700" cap="flat" cmpd="sng" algn="ctr">
+                      <a:solidFill>
+                        <a:schemeClr val="tx1"/>
+                      </a:solidFill>
+                      <a:prstDash val="solid"/>
+                      <a:round/>
+                      <a:headEnd type="none" w="med" len="med"/>
+                      <a:tailEnd type="none" w="med" len="med"/>
+                    </a:lnT>
+                    <a:lnB w="12700" cap="flat" cmpd="sng" algn="ctr">
+                      <a:solidFill>
+                        <a:schemeClr val="tx1"/>
+                      </a:solidFill>
+                      <a:prstDash val="solid"/>
+                      <a:round/>
+                      <a:headEnd type="none" w="med" len="med"/>
+                      <a:tailEnd type="none" w="med" len="med"/>
+                    </a:lnB>
+                    <a:noFill/>
+                  </a:tcPr>
+                </a:tc>
+                <a:tc>
+                  <a:txBody>
+                    <a:bodyPr/>
+                    <a:lstStyle/>
+                    <a:p>
+                      <a:pPr algn="ctr" latinLnBrk="1"/>
+                      <a:r>
+                        <a:rPr lang="en-US" altLang="zh-TW" sz="1800" b="0" i="0" kern="1200" dirty="0">
+                          <a:solidFill>
+                            <a:schemeClr val="dk1"/>
+                          </a:solidFill>
+                          <a:effectLst/>
+                          <a:latin typeface="+mn-lt"/>
+                          <a:ea typeface="+mn-ea"/>
+                          <a:cs typeface="+mn-cs"/>
+                        </a:rPr>
+                        <a:t>0.6667</a:t>
                       </a:r>
                     </a:p>
                   </a:txBody>
-                  <a:tcPr>
+                  <a:tcPr anchor="ctr">
+                    <a:lnL w="12700" cap="flat" cmpd="sng" algn="ctr">
+                      <a:solidFill>
+                        <a:schemeClr val="tx1"/>
+                      </a:solidFill>
+                      <a:prstDash val="solid"/>
+                      <a:round/>
+                      <a:headEnd type="none" w="med" len="med"/>
+                      <a:tailEnd type="none" w="med" len="med"/>
+                    </a:lnL>
+                    <a:lnR w="12700" cap="flat" cmpd="sng" algn="ctr">
+                      <a:solidFill>
+                        <a:schemeClr val="tx1"/>
+                      </a:solidFill>
+                      <a:prstDash val="solid"/>
+                      <a:round/>
+                      <a:headEnd type="none" w="med" len="med"/>
+                      <a:tailEnd type="none" w="med" len="med"/>
+                    </a:lnR>
+                    <a:lnT w="12700" cap="flat" cmpd="sng" algn="ctr">
+                      <a:solidFill>
+                        <a:schemeClr val="tx1"/>
+                      </a:solidFill>
+                      <a:prstDash val="solid"/>
+                      <a:round/>
+                      <a:headEnd type="none" w="med" len="med"/>
+                      <a:tailEnd type="none" w="med" len="med"/>
+                    </a:lnT>
+                    <a:lnB w="12700" cap="flat" cmpd="sng" algn="ctr">
+                      <a:solidFill>
+                        <a:schemeClr val="tx1"/>
+                      </a:solidFill>
+                      <a:prstDash val="solid"/>
+                      <a:round/>
+                      <a:headEnd type="none" w="med" len="med"/>
+                      <a:tailEnd type="none" w="med" len="med"/>
+                    </a:lnB>
+                    <a:noFill/>
+                  </a:tcPr>
+                </a:tc>
+                <a:tc>
+                  <a:txBody>
+                    <a:bodyPr/>
+                    <a:lstStyle/>
+                    <a:p>
+                      <a:pPr algn="ctr" latinLnBrk="1"/>
+                      <a:r>
+                        <a:rPr lang="en-US" altLang="zh-TW" sz="1800" b="0" i="0" kern="1200" dirty="0">
+                          <a:solidFill>
+                            <a:schemeClr val="dk1"/>
+                          </a:solidFill>
+                          <a:effectLst/>
+                          <a:latin typeface="+mn-lt"/>
+                          <a:ea typeface="+mn-ea"/>
+                          <a:cs typeface="+mn-cs"/>
+                        </a:rPr>
+                        <a:t>0</a:t>
+                      </a:r>
+                    </a:p>
+                  </a:txBody>
+                  <a:tcPr anchor="ctr">
                     <a:lnL w="12700" cap="flat" cmpd="sng" algn="ctr">
                       <a:solidFill>
                         <a:schemeClr val="tx1"/>
@@ -4076,7 +4724,7 @@
                     <a:p>
                       <a:pPr latinLnBrk="1"/>
                       <a:r>
-                        <a:rPr lang="en-US" altLang="zh-TW" sz="2400" b="0" i="0" kern="1200" dirty="0">
+                        <a:rPr lang="en-US" altLang="zh-TW" sz="1800" b="0" i="0" kern="1200" dirty="0">
                           <a:solidFill>
                             <a:schemeClr val="dk1"/>
                           </a:solidFill>
@@ -4085,11 +4733,229 @@
                           <a:ea typeface="+mn-ea"/>
                           <a:cs typeface="+mn-cs"/>
                         </a:rPr>
-                        <a:t>0.666547</a:t>
+                        <a:t>3.558749e-05</a:t>
                       </a:r>
                     </a:p>
                   </a:txBody>
-                  <a:tcPr>
+                  <a:tcPr anchor="ctr">
+                    <a:lnL w="12700" cap="flat" cmpd="sng" algn="ctr">
+                      <a:solidFill>
+                        <a:schemeClr val="tx1"/>
+                      </a:solidFill>
+                      <a:prstDash val="solid"/>
+                      <a:round/>
+                      <a:headEnd type="none" w="med" len="med"/>
+                      <a:tailEnd type="none" w="med" len="med"/>
+                    </a:lnL>
+                    <a:lnR w="12700" cap="flat" cmpd="sng" algn="ctr">
+                      <a:solidFill>
+                        <a:schemeClr val="tx1"/>
+                      </a:solidFill>
+                      <a:prstDash val="solid"/>
+                      <a:round/>
+                      <a:headEnd type="none" w="med" len="med"/>
+                      <a:tailEnd type="none" w="med" len="med"/>
+                    </a:lnR>
+                    <a:lnT w="12700" cap="flat" cmpd="sng" algn="ctr">
+                      <a:solidFill>
+                        <a:schemeClr val="tx1"/>
+                      </a:solidFill>
+                      <a:prstDash val="solid"/>
+                      <a:round/>
+                      <a:headEnd type="none" w="med" len="med"/>
+                      <a:tailEnd type="none" w="med" len="med"/>
+                    </a:lnT>
+                    <a:lnB w="12700" cap="flat" cmpd="sng" algn="ctr">
+                      <a:solidFill>
+                        <a:schemeClr val="tx1"/>
+                      </a:solidFill>
+                      <a:prstDash val="solid"/>
+                      <a:round/>
+                      <a:headEnd type="none" w="med" len="med"/>
+                      <a:tailEnd type="none" w="med" len="med"/>
+                    </a:lnB>
+                    <a:noFill/>
+                  </a:tcPr>
+                </a:tc>
+                <a:extLst>
+                  <a:ext uri="{0D108BD9-81ED-4DB2-BD59-A6C34878D82A}">
+                    <a16:rowId xmlns:a16="http://schemas.microsoft.com/office/drawing/2014/main" val="3358222618"/>
+                  </a:ext>
+                </a:extLst>
+              </a:tr>
+            </a:tbl>
+          </a:graphicData>
+        </a:graphic>
+      </p:graphicFrame>
+    </p:spTree>
+    <p:extLst>
+      <p:ext uri="{BB962C8B-B14F-4D97-AF65-F5344CB8AC3E}">
+        <p14:creationId xmlns:p14="http://schemas.microsoft.com/office/powerpoint/2010/main" val="2472566043"/>
+      </p:ext>
+    </p:extLst>
+  </p:cSld>
+  <p:clrMapOvr>
+    <a:masterClrMapping/>
+  </p:clrMapOvr>
+</p:sld>
+</file>
+
+<file path=ppt/slides/slide12.xml><?xml version="1.0" encoding="utf-8"?>
+<p:sld xmlns:a="http://schemas.openxmlformats.org/drawingml/2006/main" xmlns:r="http://schemas.openxmlformats.org/officeDocument/2006/relationships" xmlns:p="http://schemas.openxmlformats.org/presentationml/2006/main">
+  <p:cSld>
+    <p:spTree>
+      <p:nvGrpSpPr>
+        <p:cNvPr id="1" name="">
+          <a:extLst>
+            <a:ext uri="{FF2B5EF4-FFF2-40B4-BE49-F238E27FC236}">
+              <a16:creationId xmlns:a16="http://schemas.microsoft.com/office/drawing/2014/main" id="{BC7E470C-942F-50EF-BB2C-301A31C4108F}"/>
+            </a:ext>
+          </a:extLst>
+        </p:cNvPr>
+        <p:cNvGrpSpPr/>
+        <p:nvPr/>
+      </p:nvGrpSpPr>
+      <p:grpSpPr>
+        <a:xfrm>
+          <a:off x="0" y="0"/>
+          <a:ext cx="0" cy="0"/>
+          <a:chOff x="0" y="0"/>
+          <a:chExt cx="0" cy="0"/>
+        </a:xfrm>
+      </p:grpSpPr>
+      <p:sp>
+        <p:nvSpPr>
+          <p:cNvPr id="2" name="標題 1">
+            <a:extLst>
+              <a:ext uri="{FF2B5EF4-FFF2-40B4-BE49-F238E27FC236}">
+                <a16:creationId xmlns:a16="http://schemas.microsoft.com/office/drawing/2014/main" id="{988C53A5-707F-4306-DDCD-A2C176C64B2F}"/>
+              </a:ext>
+            </a:extLst>
+          </p:cNvPr>
+          <p:cNvSpPr>
+            <a:spLocks noGrp="1"/>
+          </p:cNvSpPr>
+          <p:nvPr>
+            <p:ph type="title"/>
+          </p:nvPr>
+        </p:nvSpPr>
+        <p:spPr/>
+        <p:txBody>
+          <a:bodyPr/>
+          <a:lstStyle/>
+          <a:p>
+            <a:r>
+              <a:rPr lang="zh-TW" altLang="en-US" dirty="0"/>
+              <a:t>換門與不換門選到跑車的機率是否有差</a:t>
+            </a:r>
+          </a:p>
+        </p:txBody>
+      </p:sp>
+      <p:pic>
+        <p:nvPicPr>
+          <p:cNvPr id="6" name="圖片 5">
+            <a:extLst>
+              <a:ext uri="{FF2B5EF4-FFF2-40B4-BE49-F238E27FC236}">
+                <a16:creationId xmlns:a16="http://schemas.microsoft.com/office/drawing/2014/main" id="{9B8EA847-9F59-F906-4012-B8F72ACBCE35}"/>
+              </a:ext>
+            </a:extLst>
+          </p:cNvPr>
+          <p:cNvPicPr>
+            <a:picLocks noChangeAspect="1"/>
+          </p:cNvPicPr>
+          <p:nvPr/>
+        </p:nvPicPr>
+        <p:blipFill>
+          <a:blip r:embed="rId2"/>
+          <a:stretch>
+            <a:fillRect/>
+          </a:stretch>
+        </p:blipFill>
+        <p:spPr>
+          <a:xfrm>
+            <a:off x="1576137" y="1877042"/>
+            <a:ext cx="9039726" cy="4507192"/>
+          </a:xfrm>
+          <a:prstGeom prst="rect">
+            <a:avLst/>
+          </a:prstGeom>
+        </p:spPr>
+      </p:pic>
+      <p:graphicFrame>
+        <p:nvGraphicFramePr>
+          <p:cNvPr id="7" name="表格 6">
+            <a:extLst>
+              <a:ext uri="{FF2B5EF4-FFF2-40B4-BE49-F238E27FC236}">
+                <a16:creationId xmlns:a16="http://schemas.microsoft.com/office/drawing/2014/main" id="{3D14FB93-EA99-6085-49E0-7EA2ABC2D6EF}"/>
+              </a:ext>
+            </a:extLst>
+          </p:cNvPr>
+          <p:cNvGraphicFramePr>
+            <a:graphicFrameLocks noGrp="1"/>
+          </p:cNvGraphicFramePr>
+          <p:nvPr>
+            <p:extLst>
+              <p:ext uri="{D42A27DB-BD31-4B8C-83A1-F6EECF244321}">
+                <p14:modId xmlns:p14="http://schemas.microsoft.com/office/powerpoint/2010/main" val="2800634159"/>
+              </p:ext>
+            </p:extLst>
+          </p:nvPr>
+        </p:nvGraphicFramePr>
+        <p:xfrm>
+          <a:off x="3547770" y="3983752"/>
+          <a:ext cx="7197964" cy="1325563"/>
+        </p:xfrm>
+        <a:graphic>
+          <a:graphicData uri="http://schemas.openxmlformats.org/drawingml/2006/table">
+            <a:tbl>
+              <a:tblPr firstRow="1" bandRow="1">
+                <a:tableStyleId>{5C22544A-7EE6-4342-B048-85BDC9FD1C3A}</a:tableStyleId>
+              </a:tblPr>
+              <a:tblGrid>
+                <a:gridCol w="1799491">
+                  <a:extLst>
+                    <a:ext uri="{9D8B030D-6E8A-4147-A177-3AD203B41FA5}">
+                      <a16:colId xmlns:a16="http://schemas.microsoft.com/office/drawing/2014/main" val="3945390195"/>
+                    </a:ext>
+                  </a:extLst>
+                </a:gridCol>
+                <a:gridCol w="1799491">
+                  <a:extLst>
+                    <a:ext uri="{9D8B030D-6E8A-4147-A177-3AD203B41FA5}">
+                      <a16:colId xmlns:a16="http://schemas.microsoft.com/office/drawing/2014/main" val="1634968925"/>
+                    </a:ext>
+                  </a:extLst>
+                </a:gridCol>
+                <a:gridCol w="1799491">
+                  <a:extLst>
+                    <a:ext uri="{9D8B030D-6E8A-4147-A177-3AD203B41FA5}">
+                      <a16:colId xmlns:a16="http://schemas.microsoft.com/office/drawing/2014/main" val="2116488310"/>
+                    </a:ext>
+                  </a:extLst>
+                </a:gridCol>
+                <a:gridCol w="1799491">
+                  <a:extLst>
+                    <a:ext uri="{9D8B030D-6E8A-4147-A177-3AD203B41FA5}">
+                      <a16:colId xmlns:a16="http://schemas.microsoft.com/office/drawing/2014/main" val="1012104654"/>
+                    </a:ext>
+                  </a:extLst>
+                </a:gridCol>
+              </a:tblGrid>
+              <a:tr h="502857">
+                <a:tc>
+                  <a:txBody>
+                    <a:bodyPr/>
+                    <a:lstStyle/>
+                    <a:p>
+                      <a:pPr algn="ctr"/>
+                      <a:endParaRPr lang="zh-TW" altLang="en-US" sz="1800" b="0" dirty="0">
+                        <a:solidFill>
+                          <a:schemeClr val="tx1"/>
+                        </a:solidFill>
+                      </a:endParaRPr>
+                    </a:p>
+                  </a:txBody>
+                  <a:tcPr anchor="ctr">
                     <a:lnL w="12700" cap="flat" cmpd="sng" algn="ctr">
                       <a:solidFill>
                         <a:schemeClr val="tx1"/>
@@ -4134,22 +5000,22 @@
                     <a:bodyPr/>
                     <a:lstStyle/>
                     <a:p>
-                      <a:pPr latinLnBrk="1"/>
+                      <a:pPr algn="ctr" latinLnBrk="1"/>
                       <a:r>
-                        <a:rPr lang="en-US" altLang="zh-TW" sz="2400" b="0" i="0" kern="1200" dirty="0">
+                        <a:rPr lang="en-US" altLang="zh-TW" sz="1800" b="0" i="0" kern="1200" dirty="0">
                           <a:solidFill>
-                            <a:schemeClr val="dk1"/>
+                            <a:schemeClr val="tx1"/>
                           </a:solidFill>
                           <a:effectLst/>
                           <a:latin typeface="+mn-lt"/>
                           <a:ea typeface="+mn-ea"/>
                           <a:cs typeface="+mn-cs"/>
                         </a:rPr>
-                        <a:t>0.0002395794</a:t>
+                        <a:t>Mean </a:t>
                       </a:r>
                     </a:p>
                   </a:txBody>
-                  <a:tcPr>
+                  <a:tcPr anchor="ctr">
                     <a:lnL w="12700" cap="flat" cmpd="sng" algn="ctr">
                       <a:solidFill>
                         <a:schemeClr val="tx1"/>
@@ -4189,19 +5055,84 @@
                     <a:noFill/>
                   </a:tcPr>
                 </a:tc>
-                <a:extLst>
-                  <a:ext uri="{0D108BD9-81ED-4DB2-BD59-A6C34878D82A}">
-                    <a16:rowId xmlns:a16="http://schemas.microsoft.com/office/drawing/2014/main" val="2174095210"/>
-                  </a:ext>
-                </a:extLst>
-              </a:tr>
-              <a:tr h="984698">
                 <a:tc>
                   <a:txBody>
                     <a:bodyPr/>
                     <a:lstStyle/>
                     <a:p>
-                      <a:pPr marL="0" marR="0" lvl="0" indent="0" algn="l" defTabSz="914400" rtl="0" eaLnBrk="1" fontAlgn="auto" latinLnBrk="0" hangingPunct="1">
+                      <a:pPr algn="ctr" latinLnBrk="1"/>
+                      <a:r>
+                        <a:rPr lang="en-US" altLang="zh-TW" sz="1800" b="0" i="0" kern="1200" dirty="0" err="1">
+                          <a:solidFill>
+                            <a:schemeClr val="tx1"/>
+                          </a:solidFill>
+                          <a:effectLst/>
+                          <a:latin typeface="+mn-lt"/>
+                          <a:ea typeface="+mn-ea"/>
+                          <a:cs typeface="+mn-cs"/>
+                        </a:rPr>
+                        <a:t>Obs</a:t>
+                      </a:r>
+                      <a:r>
+                        <a:rPr lang="en-US" altLang="zh-TW" sz="1800" b="0" i="0" kern="1200" dirty="0">
+                          <a:solidFill>
+                            <a:schemeClr val="tx1"/>
+                          </a:solidFill>
+                          <a:effectLst/>
+                          <a:latin typeface="+mn-lt"/>
+                          <a:ea typeface="+mn-ea"/>
+                          <a:cs typeface="+mn-cs"/>
+                        </a:rPr>
+                        <a:t> </a:t>
+                      </a:r>
+                    </a:p>
+                  </a:txBody>
+                  <a:tcPr anchor="ctr">
+                    <a:lnL w="12700" cap="flat" cmpd="sng" algn="ctr">
+                      <a:solidFill>
+                        <a:schemeClr val="tx1"/>
+                      </a:solidFill>
+                      <a:prstDash val="solid"/>
+                      <a:round/>
+                      <a:headEnd type="none" w="med" len="med"/>
+                      <a:tailEnd type="none" w="med" len="med"/>
+                    </a:lnL>
+                    <a:lnR w="12700" cap="flat" cmpd="sng" algn="ctr">
+                      <a:solidFill>
+                        <a:schemeClr val="tx1"/>
+                      </a:solidFill>
+                      <a:prstDash val="solid"/>
+                      <a:round/>
+                      <a:headEnd type="none" w="med" len="med"/>
+                      <a:tailEnd type="none" w="med" len="med"/>
+                    </a:lnR>
+                    <a:lnT w="12700" cap="flat" cmpd="sng" algn="ctr">
+                      <a:solidFill>
+                        <a:schemeClr val="tx1"/>
+                      </a:solidFill>
+                      <a:prstDash val="solid"/>
+                      <a:round/>
+                      <a:headEnd type="none" w="med" len="med"/>
+                      <a:tailEnd type="none" w="med" len="med"/>
+                    </a:lnT>
+                    <a:lnB w="12700" cap="flat" cmpd="sng" algn="ctr">
+                      <a:solidFill>
+                        <a:schemeClr val="tx1"/>
+                      </a:solidFill>
+                      <a:prstDash val="solid"/>
+                      <a:round/>
+                      <a:headEnd type="none" w="med" len="med"/>
+                      <a:tailEnd type="none" w="med" len="med"/>
+                    </a:lnB>
+                    <a:noFill/>
+                  </a:tcPr>
+                </a:tc>
+                <a:tc>
+                  <a:txBody>
+                    <a:bodyPr/>
+                    <a:lstStyle/>
+                    <a:p>
+                      <a:pPr marL="0" marR="0" lvl="0" indent="0" algn="ctr" defTabSz="914400" rtl="0" eaLnBrk="1" fontAlgn="auto" latinLnBrk="0" hangingPunct="1">
                         <a:lnSpc>
                           <a:spcPct val="100000"/>
                         </a:lnSpc>
@@ -4219,7 +5150,7 @@
                         <a:defRPr/>
                       </a:pPr>
                       <a:r>
-                        <a:rPr lang="en-US" altLang="zh-TW" sz="2400" b="0" i="0" kern="1200" dirty="0">
+                        <a:rPr lang="en-US" altLang="zh-TW" sz="1800" b="0" i="0" kern="1200" dirty="0">
                           <a:solidFill>
                             <a:schemeClr val="tx1"/>
                           </a:solidFill>
@@ -4228,11 +5159,103 @@
                           <a:ea typeface="+mn-ea"/>
                           <a:cs typeface="+mn-cs"/>
                         </a:rPr>
-                        <a:t>Inverse function with controlling var</a:t>
+                        <a:t>std. error</a:t>
                       </a:r>
                     </a:p>
                   </a:txBody>
-                  <a:tcPr>
+                  <a:tcPr anchor="ctr">
+                    <a:lnL w="12700" cap="flat" cmpd="sng" algn="ctr">
+                      <a:solidFill>
+                        <a:schemeClr val="tx1"/>
+                      </a:solidFill>
+                      <a:prstDash val="solid"/>
+                      <a:round/>
+                      <a:headEnd type="none" w="med" len="med"/>
+                      <a:tailEnd type="none" w="med" len="med"/>
+                    </a:lnL>
+                    <a:lnR w="12700" cap="flat" cmpd="sng" algn="ctr">
+                      <a:solidFill>
+                        <a:schemeClr val="tx1"/>
+                      </a:solidFill>
+                      <a:prstDash val="solid"/>
+                      <a:round/>
+                      <a:headEnd type="none" w="med" len="med"/>
+                      <a:tailEnd type="none" w="med" len="med"/>
+                    </a:lnR>
+                    <a:lnT w="12700" cap="flat" cmpd="sng" algn="ctr">
+                      <a:solidFill>
+                        <a:schemeClr val="tx1"/>
+                      </a:solidFill>
+                      <a:prstDash val="solid"/>
+                      <a:round/>
+                      <a:headEnd type="none" w="med" len="med"/>
+                      <a:tailEnd type="none" w="med" len="med"/>
+                    </a:lnT>
+                    <a:lnB w="12700" cap="flat" cmpd="sng" algn="ctr">
+                      <a:solidFill>
+                        <a:schemeClr val="tx1"/>
+                      </a:solidFill>
+                      <a:prstDash val="solid"/>
+                      <a:round/>
+                      <a:headEnd type="none" w="med" len="med"/>
+                      <a:tailEnd type="none" w="med" len="med"/>
+                    </a:lnB>
+                    <a:noFill/>
+                  </a:tcPr>
+                </a:tc>
+                <a:extLst>
+                  <a:ext uri="{0D108BD9-81ED-4DB2-BD59-A6C34878D82A}">
+                    <a16:rowId xmlns:a16="http://schemas.microsoft.com/office/drawing/2014/main" val="3221030795"/>
+                  </a:ext>
+                </a:extLst>
+              </a:tr>
+              <a:tr h="822706">
+                <a:tc>
+                  <a:txBody>
+                    <a:bodyPr/>
+                    <a:lstStyle/>
+                    <a:p>
+                      <a:pPr marL="0" marR="0" lvl="0" indent="0" algn="ctr" defTabSz="914400" rtl="0" eaLnBrk="1" fontAlgn="auto" latinLnBrk="0" hangingPunct="1">
+                        <a:lnSpc>
+                          <a:spcPct val="100000"/>
+                        </a:lnSpc>
+                        <a:spcBef>
+                          <a:spcPts val="0"/>
+                        </a:spcBef>
+                        <a:spcAft>
+                          <a:spcPts val="0"/>
+                        </a:spcAft>
+                        <a:buClrTx/>
+                        <a:buSzTx/>
+                        <a:buFontTx/>
+                        <a:buNone/>
+                        <a:tabLst/>
+                        <a:defRPr/>
+                      </a:pPr>
+                      <a:r>
+                        <a:rPr lang="en-US" altLang="zh-TW" sz="1800" b="0" i="0" kern="1200" dirty="0" err="1">
+                          <a:solidFill>
+                            <a:schemeClr val="tx1"/>
+                          </a:solidFill>
+                          <a:effectLst/>
+                          <a:latin typeface="+mn-lt"/>
+                          <a:ea typeface="+mn-ea"/>
+                          <a:cs typeface="+mn-cs"/>
+                        </a:rPr>
+                        <a:t>Jacknife</a:t>
+                      </a:r>
+                      <a:endParaRPr lang="zh-TW" altLang="en-US" sz="1800" b="0" i="0" kern="1200" dirty="0">
+                        <a:solidFill>
+                          <a:schemeClr val="tx1"/>
+                        </a:solidFill>
+                        <a:effectLst/>
+                        <a:latin typeface="+mn-lt"/>
+                        <a:ea typeface="+mn-ea"/>
+                        <a:cs typeface="+mn-cs"/>
+                      </a:endParaRPr>
+                    </a:p>
+                  </a:txBody>
+                  <a:tcPr anchor="ctr">
                     <a:lnL w="12700" cap="flat" cmpd="sng" algn="ctr">
                       <a:solidFill>
                         <a:schemeClr val="tx1"/>
@@ -4277,9 +5300,9 @@
                     <a:bodyPr/>
                     <a:lstStyle/>
                     <a:p>
-                      <a:pPr latinLnBrk="1"/>
+                      <a:pPr algn="ctr" latinLnBrk="1"/>
                       <a:r>
-                        <a:rPr lang="en-US" altLang="zh-TW" sz="2400" b="0" i="0" kern="1200" dirty="0">
+                        <a:rPr lang="en-US" altLang="zh-TW" sz="1800" b="0" i="0" kern="1200" dirty="0">
                           <a:solidFill>
                             <a:schemeClr val="dk1"/>
                           </a:solidFill>
@@ -4288,18 +5311,11 @@
                           <a:ea typeface="+mn-ea"/>
                           <a:cs typeface="+mn-cs"/>
                         </a:rPr>
-                        <a:t>0.667157</a:t>
+                        <a:t>0.0001991734</a:t>
                       </a:r>
                     </a:p>
-                    <a:p>
-                      <a:endParaRPr lang="zh-TW" altLang="en-US" sz="2400" dirty="0">
-                        <a:solidFill>
-                          <a:schemeClr val="tx1"/>
-                        </a:solidFill>
-                      </a:endParaRPr>
-                    </a:p>
                   </a:txBody>
-                  <a:tcPr>
+                  <a:tcPr anchor="ctr">
                     <a:lnL w="12700" cap="flat" cmpd="sng" algn="ctr">
                       <a:solidFill>
                         <a:schemeClr val="tx1"/>
@@ -4344,9 +5360,9 @@
                     <a:bodyPr/>
                     <a:lstStyle/>
                     <a:p>
-                      <a:pPr latinLnBrk="1"/>
+                      <a:pPr algn="ctr" latinLnBrk="1"/>
                       <a:r>
-                        <a:rPr lang="en-US" altLang="zh-TW" sz="2400" b="0" i="0" kern="1200" dirty="0">
+                        <a:rPr lang="en-US" altLang="zh-TW" sz="1800" b="0" i="0" kern="1200" dirty="0">
                           <a:solidFill>
                             <a:schemeClr val="dk1"/>
                           </a:solidFill>
@@ -4355,18 +5371,71 @@
                           <a:ea typeface="+mn-ea"/>
                           <a:cs typeface="+mn-cs"/>
                         </a:rPr>
-                        <a:t>0.0001117501</a:t>
+                        <a:t>0.333292</a:t>
                       </a:r>
                     </a:p>
+                  </a:txBody>
+                  <a:tcPr anchor="ctr">
+                    <a:lnL w="12700" cap="flat" cmpd="sng" algn="ctr">
+                      <a:solidFill>
+                        <a:schemeClr val="tx1"/>
+                      </a:solidFill>
+                      <a:prstDash val="solid"/>
+                      <a:round/>
+                      <a:headEnd type="none" w="med" len="med"/>
+                      <a:tailEnd type="none" w="med" len="med"/>
+                    </a:lnL>
+                    <a:lnR w="12700" cap="flat" cmpd="sng" algn="ctr">
+                      <a:solidFill>
+                        <a:schemeClr val="tx1"/>
+                      </a:solidFill>
+                      <a:prstDash val="solid"/>
+                      <a:round/>
+                      <a:headEnd type="none" w="med" len="med"/>
+                      <a:tailEnd type="none" w="med" len="med"/>
+                    </a:lnR>
+                    <a:lnT w="12700" cap="flat" cmpd="sng" algn="ctr">
+                      <a:solidFill>
+                        <a:schemeClr val="tx1"/>
+                      </a:solidFill>
+                      <a:prstDash val="solid"/>
+                      <a:round/>
+                      <a:headEnd type="none" w="med" len="med"/>
+                      <a:tailEnd type="none" w="med" len="med"/>
+                    </a:lnT>
+                    <a:lnB w="12700" cap="flat" cmpd="sng" algn="ctr">
+                      <a:solidFill>
+                        <a:schemeClr val="tx1"/>
+                      </a:solidFill>
+                      <a:prstDash val="solid"/>
+                      <a:round/>
+                      <a:headEnd type="none" w="med" len="med"/>
+                      <a:tailEnd type="none" w="med" len="med"/>
+                    </a:lnB>
+                    <a:noFill/>
+                  </a:tcPr>
+                </a:tc>
+                <a:tc>
+                  <a:txBody>
+                    <a:bodyPr/>
+                    <a:lstStyle/>
                     <a:p>
-                      <a:endParaRPr lang="zh-TW" altLang="en-US" sz="2400" dirty="0">
-                        <a:solidFill>
-                          <a:schemeClr val="tx1"/>
-                        </a:solidFill>
-                      </a:endParaRPr>
+                      <a:pPr algn="ctr" latinLnBrk="1"/>
+                      <a:r>
+                        <a:rPr lang="en-US" altLang="zh-TW" sz="1800" b="0" i="0" kern="1200" dirty="0">
+                          <a:solidFill>
+                            <a:schemeClr val="dk1"/>
+                          </a:solidFill>
+                          <a:effectLst/>
+                          <a:latin typeface="+mn-lt"/>
+                          <a:ea typeface="+mn-ea"/>
+                          <a:cs typeface="+mn-cs"/>
+                        </a:rPr>
+                        <a:t>0.007416886</a:t>
+                      </a:r>
                     </a:p>
                   </a:txBody>
-                  <a:tcPr>
+                  <a:tcPr anchor="ctr">
                     <a:lnL w="12700" cap="flat" cmpd="sng" algn="ctr">
                       <a:solidFill>
                         <a:schemeClr val="tx1"/>
@@ -4408,7 +5477,7 @@
                 </a:tc>
                 <a:extLst>
                   <a:ext uri="{0D108BD9-81ED-4DB2-BD59-A6C34878D82A}">
-                    <a16:rowId xmlns:a16="http://schemas.microsoft.com/office/drawing/2014/main" val="3067584152"/>
+                    <a16:rowId xmlns:a16="http://schemas.microsoft.com/office/drawing/2014/main" val="3358222618"/>
                   </a:ext>
                 </a:extLst>
               </a:tr>
@@ -4416,49 +5485,759 @@
           </a:graphicData>
         </a:graphic>
       </p:graphicFrame>
+    </p:spTree>
+    <p:extLst>
+      <p:ext uri="{BB962C8B-B14F-4D97-AF65-F5344CB8AC3E}">
+        <p14:creationId xmlns:p14="http://schemas.microsoft.com/office/powerpoint/2010/main" val="2390225251"/>
+      </p:ext>
+    </p:extLst>
+  </p:cSld>
+  <p:clrMapOvr>
+    <a:masterClrMapping/>
+  </p:clrMapOvr>
+</p:sld>
+</file>
+
+<file path=ppt/slides/slide13.xml><?xml version="1.0" encoding="utf-8"?>
+<p:sld xmlns:a="http://schemas.openxmlformats.org/drawingml/2006/main" xmlns:r="http://schemas.openxmlformats.org/officeDocument/2006/relationships" xmlns:p="http://schemas.openxmlformats.org/presentationml/2006/main">
+  <p:cSld>
+    <p:spTree>
+      <p:nvGrpSpPr>
+        <p:cNvPr id="1" name="">
+          <a:extLst>
+            <a:ext uri="{FF2B5EF4-FFF2-40B4-BE49-F238E27FC236}">
+              <a16:creationId xmlns:a16="http://schemas.microsoft.com/office/drawing/2014/main" id="{F6F28756-F771-CD75-6EE2-059E33FDD347}"/>
+            </a:ext>
+          </a:extLst>
+        </p:cNvPr>
+        <p:cNvGrpSpPr/>
+        <p:nvPr/>
+      </p:nvGrpSpPr>
+      <p:grpSpPr>
+        <a:xfrm>
+          <a:off x="0" y="0"/>
+          <a:ext cx="0" cy="0"/>
+          <a:chOff x="0" y="0"/>
+          <a:chExt cx="0" cy="0"/>
+        </a:xfrm>
+      </p:grpSpPr>
       <p:sp>
         <p:nvSpPr>
-          <p:cNvPr id="4" name="文字方塊 3">
-            <a:extLst>
-              <a:ext uri="{FF2B5EF4-FFF2-40B4-BE49-F238E27FC236}">
-                <a16:creationId xmlns:a16="http://schemas.microsoft.com/office/drawing/2014/main" id="{FF48D6A4-D8A0-C217-FB0B-02B961C124A6}"/>
-              </a:ext>
-            </a:extLst>
-          </p:cNvPr>
-          <p:cNvSpPr txBox="1"/>
+          <p:cNvPr id="2" name="標題 1">
+            <a:extLst>
+              <a:ext uri="{FF2B5EF4-FFF2-40B4-BE49-F238E27FC236}">
+                <a16:creationId xmlns:a16="http://schemas.microsoft.com/office/drawing/2014/main" id="{21A078E2-DFBD-521C-F7B6-59B366924D14}"/>
+              </a:ext>
+            </a:extLst>
+          </p:cNvPr>
+          <p:cNvSpPr>
+            <a:spLocks noGrp="1"/>
+          </p:cNvSpPr>
+          <p:nvPr>
+            <p:ph type="title"/>
+          </p:nvPr>
+        </p:nvSpPr>
+        <p:spPr/>
+        <p:txBody>
+          <a:bodyPr/>
+          <a:lstStyle/>
+          <a:p>
+            <a:r>
+              <a:rPr lang="zh-TW" altLang="en-US" dirty="0"/>
+              <a:t>使用</a:t>
+            </a:r>
+            <a:r>
+              <a:rPr lang="en-US" altLang="zh-TW" dirty="0"/>
+              <a:t>MCMC</a:t>
+            </a:r>
+            <a:r>
+              <a:rPr lang="zh-TW" altLang="en-US" dirty="0"/>
+              <a:t>估計換門的勝率</a:t>
+            </a:r>
+          </a:p>
+        </p:txBody>
+      </p:sp>
+      <p:pic>
+        <p:nvPicPr>
+          <p:cNvPr id="4" name="圖片 3">
+            <a:extLst>
+              <a:ext uri="{FF2B5EF4-FFF2-40B4-BE49-F238E27FC236}">
+                <a16:creationId xmlns:a16="http://schemas.microsoft.com/office/drawing/2014/main" id="{0F0CB0EF-6BB0-7696-FAB6-C8B5DB836E17}"/>
+              </a:ext>
+            </a:extLst>
+          </p:cNvPr>
+          <p:cNvPicPr>
+            <a:picLocks noChangeAspect="1"/>
+          </p:cNvPicPr>
           <p:nvPr/>
-        </p:nvSpPr>
+        </p:nvPicPr>
+        <p:blipFill>
+          <a:blip r:embed="rId2"/>
+          <a:stretch>
+            <a:fillRect/>
+          </a:stretch>
+        </p:blipFill>
         <p:spPr>
           <a:xfrm>
-            <a:off x="3531475" y="4988342"/>
-            <a:ext cx="5549463" cy="707886"/>
+            <a:off x="259748" y="1407794"/>
+            <a:ext cx="8150497" cy="4042411"/>
           </a:xfrm>
           <a:prstGeom prst="rect">
             <a:avLst/>
           </a:prstGeom>
-          <a:noFill/>
         </p:spPr>
-        <p:txBody>
-          <a:bodyPr wrap="square" rtlCol="0">
-            <a:spAutoFit/>
-          </a:bodyPr>
-          <a:lstStyle/>
-          <a:p>
-            <a:r>
-              <a:rPr lang="en-US" altLang="zh-TW" sz="4000" dirty="0" err="1"/>
-              <a:t>Var_Red</a:t>
-            </a:r>
-            <a:r>
-              <a:rPr lang="en-US" altLang="zh-TW" sz="4000" dirty="0"/>
-              <a:t> = 53.35571%</a:t>
-            </a:r>
-          </a:p>
-        </p:txBody>
-      </p:sp>
+      </p:pic>
+      <p:graphicFrame>
+        <p:nvGraphicFramePr>
+          <p:cNvPr id="5" name="表格 4">
+            <a:extLst>
+              <a:ext uri="{FF2B5EF4-FFF2-40B4-BE49-F238E27FC236}">
+                <a16:creationId xmlns:a16="http://schemas.microsoft.com/office/drawing/2014/main" id="{E4934B2A-18C0-CA38-B66F-0C20CDEE6355}"/>
+              </a:ext>
+            </a:extLst>
+          </p:cNvPr>
+          <p:cNvGraphicFramePr>
+            <a:graphicFrameLocks noGrp="1"/>
+          </p:cNvGraphicFramePr>
+          <p:nvPr>
+            <p:extLst>
+              <p:ext uri="{D42A27DB-BD31-4B8C-83A1-F6EECF244321}">
+                <p14:modId xmlns:p14="http://schemas.microsoft.com/office/powerpoint/2010/main" val="1532637344"/>
+              </p:ext>
+            </p:extLst>
+          </p:nvPr>
+        </p:nvGraphicFramePr>
+        <p:xfrm>
+          <a:off x="8481213" y="4761143"/>
+          <a:ext cx="3573420" cy="1240249"/>
+        </p:xfrm>
+        <a:graphic>
+          <a:graphicData uri="http://schemas.openxmlformats.org/drawingml/2006/table">
+            <a:tbl>
+              <a:tblPr firstRow="1" bandRow="1">
+                <a:tableStyleId>{5C22544A-7EE6-4342-B048-85BDC9FD1C3A}</a:tableStyleId>
+              </a:tblPr>
+              <a:tblGrid>
+                <a:gridCol w="893355">
+                  <a:extLst>
+                    <a:ext uri="{9D8B030D-6E8A-4147-A177-3AD203B41FA5}">
+                      <a16:colId xmlns:a16="http://schemas.microsoft.com/office/drawing/2014/main" val="3945390195"/>
+                    </a:ext>
+                  </a:extLst>
+                </a:gridCol>
+                <a:gridCol w="893355">
+                  <a:extLst>
+                    <a:ext uri="{9D8B030D-6E8A-4147-A177-3AD203B41FA5}">
+                      <a16:colId xmlns:a16="http://schemas.microsoft.com/office/drawing/2014/main" val="1634968925"/>
+                    </a:ext>
+                  </a:extLst>
+                </a:gridCol>
+                <a:gridCol w="893355">
+                  <a:extLst>
+                    <a:ext uri="{9D8B030D-6E8A-4147-A177-3AD203B41FA5}">
+                      <a16:colId xmlns:a16="http://schemas.microsoft.com/office/drawing/2014/main" val="2116488310"/>
+                    </a:ext>
+                  </a:extLst>
+                </a:gridCol>
+                <a:gridCol w="893355">
+                  <a:extLst>
+                    <a:ext uri="{9D8B030D-6E8A-4147-A177-3AD203B41FA5}">
+                      <a16:colId xmlns:a16="http://schemas.microsoft.com/office/drawing/2014/main" val="1012104654"/>
+                    </a:ext>
+                  </a:extLst>
+                </a:gridCol>
+              </a:tblGrid>
+              <a:tr h="542703">
+                <a:tc>
+                  <a:txBody>
+                    <a:bodyPr/>
+                    <a:lstStyle/>
+                    <a:p>
+                      <a:pPr algn="ctr"/>
+                      <a:endParaRPr lang="zh-TW" altLang="en-US" sz="1200" b="0" dirty="0">
+                        <a:solidFill>
+                          <a:schemeClr val="tx1"/>
+                        </a:solidFill>
+                      </a:endParaRPr>
+                    </a:p>
+                  </a:txBody>
+                  <a:tcPr anchor="ctr">
+                    <a:lnL w="12700" cap="flat" cmpd="sng" algn="ctr">
+                      <a:solidFill>
+                        <a:schemeClr val="tx1"/>
+                      </a:solidFill>
+                      <a:prstDash val="solid"/>
+                      <a:round/>
+                      <a:headEnd type="none" w="med" len="med"/>
+                      <a:tailEnd type="none" w="med" len="med"/>
+                    </a:lnL>
+                    <a:lnR w="12700" cap="flat" cmpd="sng" algn="ctr">
+                      <a:solidFill>
+                        <a:schemeClr val="tx1"/>
+                      </a:solidFill>
+                      <a:prstDash val="solid"/>
+                      <a:round/>
+                      <a:headEnd type="none" w="med" len="med"/>
+                      <a:tailEnd type="none" w="med" len="med"/>
+                    </a:lnR>
+                    <a:lnT w="12700" cap="flat" cmpd="sng" algn="ctr">
+                      <a:solidFill>
+                        <a:schemeClr val="tx1"/>
+                      </a:solidFill>
+                      <a:prstDash val="solid"/>
+                      <a:round/>
+                      <a:headEnd type="none" w="med" len="med"/>
+                      <a:tailEnd type="none" w="med" len="med"/>
+                    </a:lnT>
+                    <a:lnB w="12700" cap="flat" cmpd="sng" algn="ctr">
+                      <a:solidFill>
+                        <a:schemeClr val="tx1"/>
+                      </a:solidFill>
+                      <a:prstDash val="solid"/>
+                      <a:round/>
+                      <a:headEnd type="none" w="med" len="med"/>
+                      <a:tailEnd type="none" w="med" len="med"/>
+                    </a:lnB>
+                    <a:noFill/>
+                  </a:tcPr>
+                </a:tc>
+                <a:tc>
+                  <a:txBody>
+                    <a:bodyPr/>
+                    <a:lstStyle/>
+                    <a:p>
+                      <a:pPr algn="ctr" latinLnBrk="1"/>
+                      <a:r>
+                        <a:rPr lang="en-US" altLang="zh-TW" sz="1200" b="1" i="0" kern="1200" dirty="0" err="1">
+                          <a:solidFill>
+                            <a:schemeClr val="tx1"/>
+                          </a:solidFill>
+                          <a:effectLst/>
+                          <a:latin typeface="+mn-lt"/>
+                          <a:ea typeface="+mn-ea"/>
+                          <a:cs typeface="+mn-cs"/>
+                        </a:rPr>
+                        <a:t>N_iter</a:t>
+                      </a:r>
+                      <a:endParaRPr lang="en-US" altLang="zh-TW" sz="1200" b="1" i="0" kern="1200" dirty="0">
+                        <a:solidFill>
+                          <a:schemeClr val="tx1"/>
+                        </a:solidFill>
+                        <a:effectLst/>
+                        <a:latin typeface="+mn-lt"/>
+                        <a:ea typeface="+mn-ea"/>
+                        <a:cs typeface="+mn-cs"/>
+                      </a:endParaRPr>
+                    </a:p>
+                  </a:txBody>
+                  <a:tcPr anchor="ctr">
+                    <a:lnL w="12700" cap="flat" cmpd="sng" algn="ctr">
+                      <a:solidFill>
+                        <a:schemeClr val="tx1"/>
+                      </a:solidFill>
+                      <a:prstDash val="solid"/>
+                      <a:round/>
+                      <a:headEnd type="none" w="med" len="med"/>
+                      <a:tailEnd type="none" w="med" len="med"/>
+                    </a:lnL>
+                    <a:lnR w="12700" cap="flat" cmpd="sng" algn="ctr">
+                      <a:solidFill>
+                        <a:schemeClr val="tx1"/>
+                      </a:solidFill>
+                      <a:prstDash val="solid"/>
+                      <a:round/>
+                      <a:headEnd type="none" w="med" len="med"/>
+                      <a:tailEnd type="none" w="med" len="med"/>
+                    </a:lnR>
+                    <a:lnT w="12700" cap="flat" cmpd="sng" algn="ctr">
+                      <a:solidFill>
+                        <a:schemeClr val="tx1"/>
+                      </a:solidFill>
+                      <a:prstDash val="solid"/>
+                      <a:round/>
+                      <a:headEnd type="none" w="med" len="med"/>
+                      <a:tailEnd type="none" w="med" len="med"/>
+                    </a:lnT>
+                    <a:lnB w="12700" cap="flat" cmpd="sng" algn="ctr">
+                      <a:solidFill>
+                        <a:schemeClr val="tx1"/>
+                      </a:solidFill>
+                      <a:prstDash val="solid"/>
+                      <a:round/>
+                      <a:headEnd type="none" w="med" len="med"/>
+                      <a:tailEnd type="none" w="med" len="med"/>
+                    </a:lnB>
+                    <a:noFill/>
+                  </a:tcPr>
+                </a:tc>
+                <a:tc>
+                  <a:txBody>
+                    <a:bodyPr/>
+                    <a:lstStyle/>
+                    <a:p>
+                      <a:pPr algn="ctr" latinLnBrk="1"/>
+                      <a:r>
+                        <a:rPr lang="en-US" altLang="zh-TW" sz="1200" b="1" i="0" kern="1200" dirty="0" err="1">
+                          <a:solidFill>
+                            <a:schemeClr val="tx1"/>
+                          </a:solidFill>
+                          <a:effectLst/>
+                          <a:latin typeface="+mn-lt"/>
+                          <a:ea typeface="+mn-ea"/>
+                          <a:cs typeface="+mn-cs"/>
+                        </a:rPr>
+                        <a:t>Porb</a:t>
+                      </a:r>
+                      <a:r>
+                        <a:rPr lang="en-US" altLang="zh-TW" sz="1200" b="1" i="0" kern="1200" dirty="0">
+                          <a:solidFill>
+                            <a:schemeClr val="tx1"/>
+                          </a:solidFill>
+                          <a:effectLst/>
+                          <a:latin typeface="+mn-lt"/>
+                          <a:ea typeface="+mn-ea"/>
+                          <a:cs typeface="+mn-cs"/>
+                        </a:rPr>
+                        <a:t> _Start</a:t>
+                      </a:r>
+                    </a:p>
+                  </a:txBody>
+                  <a:tcPr anchor="ctr">
+                    <a:lnL w="12700" cap="flat" cmpd="sng" algn="ctr">
+                      <a:solidFill>
+                        <a:schemeClr val="tx1"/>
+                      </a:solidFill>
+                      <a:prstDash val="solid"/>
+                      <a:round/>
+                      <a:headEnd type="none" w="med" len="med"/>
+                      <a:tailEnd type="none" w="med" len="med"/>
+                    </a:lnL>
+                    <a:lnR w="12700" cap="flat" cmpd="sng" algn="ctr">
+                      <a:solidFill>
+                        <a:schemeClr val="tx1"/>
+                      </a:solidFill>
+                      <a:prstDash val="solid"/>
+                      <a:round/>
+                      <a:headEnd type="none" w="med" len="med"/>
+                      <a:tailEnd type="none" w="med" len="med"/>
+                    </a:lnR>
+                    <a:lnT w="12700" cap="flat" cmpd="sng" algn="ctr">
+                      <a:solidFill>
+                        <a:schemeClr val="tx1"/>
+                      </a:solidFill>
+                      <a:prstDash val="solid"/>
+                      <a:round/>
+                      <a:headEnd type="none" w="med" len="med"/>
+                      <a:tailEnd type="none" w="med" len="med"/>
+                    </a:lnT>
+                    <a:lnB w="12700" cap="flat" cmpd="sng" algn="ctr">
+                      <a:solidFill>
+                        <a:schemeClr val="tx1"/>
+                      </a:solidFill>
+                      <a:prstDash val="solid"/>
+                      <a:round/>
+                      <a:headEnd type="none" w="med" len="med"/>
+                      <a:tailEnd type="none" w="med" len="med"/>
+                    </a:lnB>
+                    <a:noFill/>
+                  </a:tcPr>
+                </a:tc>
+                <a:tc>
+                  <a:txBody>
+                    <a:bodyPr/>
+                    <a:lstStyle/>
+                    <a:p>
+                      <a:pPr marL="0" marR="0" lvl="0" indent="0" algn="ctr" defTabSz="914400" rtl="0" eaLnBrk="1" fontAlgn="auto" latinLnBrk="0" hangingPunct="1">
+                        <a:lnSpc>
+                          <a:spcPct val="100000"/>
+                        </a:lnSpc>
+                        <a:spcBef>
+                          <a:spcPts val="0"/>
+                        </a:spcBef>
+                        <a:spcAft>
+                          <a:spcPts val="0"/>
+                        </a:spcAft>
+                        <a:buClrTx/>
+                        <a:buSzTx/>
+                        <a:buFontTx/>
+                        <a:buNone/>
+                        <a:tabLst/>
+                        <a:defRPr/>
+                      </a:pPr>
+                      <a:r>
+                        <a:rPr lang="en-US" altLang="zh-TW" sz="1200" dirty="0">
+                          <a:solidFill>
+                            <a:schemeClr val="tx1"/>
+                          </a:solidFill>
+                        </a:rPr>
+                        <a:t>proposal </a:t>
+                      </a:r>
+                      <a:r>
+                        <a:rPr lang="en-US" altLang="zh-TW" sz="1200" dirty="0" err="1">
+                          <a:solidFill>
+                            <a:schemeClr val="tx1"/>
+                          </a:solidFill>
+                        </a:rPr>
+                        <a:t>sd</a:t>
+                      </a:r>
+                      <a:endParaRPr lang="en-US" altLang="zh-TW" sz="1200" b="0" i="0" kern="1200" dirty="0">
+                        <a:solidFill>
+                          <a:schemeClr val="tx1"/>
+                        </a:solidFill>
+                        <a:effectLst/>
+                        <a:latin typeface="+mn-lt"/>
+                        <a:ea typeface="+mn-ea"/>
+                        <a:cs typeface="+mn-cs"/>
+                      </a:endParaRPr>
+                    </a:p>
+                  </a:txBody>
+                  <a:tcPr anchor="ctr">
+                    <a:lnL w="12700" cap="flat" cmpd="sng" algn="ctr">
+                      <a:solidFill>
+                        <a:schemeClr val="tx1"/>
+                      </a:solidFill>
+                      <a:prstDash val="solid"/>
+                      <a:round/>
+                      <a:headEnd type="none" w="med" len="med"/>
+                      <a:tailEnd type="none" w="med" len="med"/>
+                    </a:lnL>
+                    <a:lnR w="12700" cap="flat" cmpd="sng" algn="ctr">
+                      <a:solidFill>
+                        <a:schemeClr val="tx1"/>
+                      </a:solidFill>
+                      <a:prstDash val="solid"/>
+                      <a:round/>
+                      <a:headEnd type="none" w="med" len="med"/>
+                      <a:tailEnd type="none" w="med" len="med"/>
+                    </a:lnR>
+                    <a:lnT w="12700" cap="flat" cmpd="sng" algn="ctr">
+                      <a:solidFill>
+                        <a:schemeClr val="tx1"/>
+                      </a:solidFill>
+                      <a:prstDash val="solid"/>
+                      <a:round/>
+                      <a:headEnd type="none" w="med" len="med"/>
+                      <a:tailEnd type="none" w="med" len="med"/>
+                    </a:lnT>
+                    <a:lnB w="12700" cap="flat" cmpd="sng" algn="ctr">
+                      <a:solidFill>
+                        <a:schemeClr val="tx1"/>
+                      </a:solidFill>
+                      <a:prstDash val="solid"/>
+                      <a:round/>
+                      <a:headEnd type="none" w="med" len="med"/>
+                      <a:tailEnd type="none" w="med" len="med"/>
+                    </a:lnB>
+                    <a:noFill/>
+                  </a:tcPr>
+                </a:tc>
+                <a:extLst>
+                  <a:ext uri="{0D108BD9-81ED-4DB2-BD59-A6C34878D82A}">
+                    <a16:rowId xmlns:a16="http://schemas.microsoft.com/office/drawing/2014/main" val="3221030795"/>
+                  </a:ext>
+                </a:extLst>
+              </a:tr>
+              <a:tr h="697546">
+                <a:tc>
+                  <a:txBody>
+                    <a:bodyPr/>
+                    <a:lstStyle/>
+                    <a:p>
+                      <a:pPr marL="0" marR="0" lvl="0" indent="0" algn="ctr" defTabSz="914400" rtl="0" eaLnBrk="1" fontAlgn="auto" latinLnBrk="0" hangingPunct="1">
+                        <a:lnSpc>
+                          <a:spcPct val="100000"/>
+                        </a:lnSpc>
+                        <a:spcBef>
+                          <a:spcPts val="0"/>
+                        </a:spcBef>
+                        <a:spcAft>
+                          <a:spcPts val="0"/>
+                        </a:spcAft>
+                        <a:buClrTx/>
+                        <a:buSzTx/>
+                        <a:buFontTx/>
+                        <a:buNone/>
+                        <a:tabLst/>
+                        <a:defRPr/>
+                      </a:pPr>
+                      <a:r>
+                        <a:rPr lang="en-US" altLang="zh-TW" sz="1200" b="0" i="0" kern="1200" dirty="0">
+                          <a:solidFill>
+                            <a:schemeClr val="tx1"/>
+                          </a:solidFill>
+                          <a:effectLst/>
+                          <a:latin typeface="+mn-lt"/>
+                          <a:ea typeface="+mn-ea"/>
+                          <a:cs typeface="+mn-cs"/>
+                        </a:rPr>
+                        <a:t>Value </a:t>
+                      </a:r>
+                      <a:endParaRPr lang="zh-TW" altLang="en-US" sz="1200" b="0" i="0" kern="1200" dirty="0">
+                        <a:solidFill>
+                          <a:schemeClr val="tx1"/>
+                        </a:solidFill>
+                        <a:effectLst/>
+                        <a:latin typeface="+mn-lt"/>
+                        <a:ea typeface="+mn-ea"/>
+                        <a:cs typeface="+mn-cs"/>
+                      </a:endParaRPr>
+                    </a:p>
+                  </a:txBody>
+                  <a:tcPr anchor="ctr">
+                    <a:lnL w="12700" cap="flat" cmpd="sng" algn="ctr">
+                      <a:solidFill>
+                        <a:schemeClr val="tx1"/>
+                      </a:solidFill>
+                      <a:prstDash val="solid"/>
+                      <a:round/>
+                      <a:headEnd type="none" w="med" len="med"/>
+                      <a:tailEnd type="none" w="med" len="med"/>
+                    </a:lnL>
+                    <a:lnR w="12700" cap="flat" cmpd="sng" algn="ctr">
+                      <a:solidFill>
+                        <a:schemeClr val="tx1"/>
+                      </a:solidFill>
+                      <a:prstDash val="solid"/>
+                      <a:round/>
+                      <a:headEnd type="none" w="med" len="med"/>
+                      <a:tailEnd type="none" w="med" len="med"/>
+                    </a:lnR>
+                    <a:lnT w="12700" cap="flat" cmpd="sng" algn="ctr">
+                      <a:solidFill>
+                        <a:schemeClr val="tx1"/>
+                      </a:solidFill>
+                      <a:prstDash val="solid"/>
+                      <a:round/>
+                      <a:headEnd type="none" w="med" len="med"/>
+                      <a:tailEnd type="none" w="med" len="med"/>
+                    </a:lnT>
+                    <a:lnB w="12700" cap="flat" cmpd="sng" algn="ctr">
+                      <a:solidFill>
+                        <a:schemeClr val="tx1"/>
+                      </a:solidFill>
+                      <a:prstDash val="solid"/>
+                      <a:round/>
+                      <a:headEnd type="none" w="med" len="med"/>
+                      <a:tailEnd type="none" w="med" len="med"/>
+                    </a:lnB>
+                    <a:noFill/>
+                  </a:tcPr>
+                </a:tc>
+                <a:tc>
+                  <a:txBody>
+                    <a:bodyPr/>
+                    <a:lstStyle/>
+                    <a:p>
+                      <a:pPr algn="ctr" latinLnBrk="1"/>
+                      <a:r>
+                        <a:rPr lang="en-US" altLang="zh-TW" sz="1200" dirty="0">
+                          <a:solidFill>
+                            <a:schemeClr val="tx1"/>
+                          </a:solidFill>
+                        </a:rPr>
+                        <a:t>10000</a:t>
+                      </a:r>
+                      <a:endParaRPr lang="en-US" altLang="zh-TW" sz="1200" b="0" i="0" kern="1200" dirty="0">
+                        <a:solidFill>
+                          <a:schemeClr val="tx1"/>
+                        </a:solidFill>
+                        <a:effectLst/>
+                        <a:latin typeface="+mn-lt"/>
+                        <a:ea typeface="+mn-ea"/>
+                        <a:cs typeface="+mn-cs"/>
+                      </a:endParaRPr>
+                    </a:p>
+                  </a:txBody>
+                  <a:tcPr anchor="ctr">
+                    <a:lnL w="12700" cap="flat" cmpd="sng" algn="ctr">
+                      <a:solidFill>
+                        <a:schemeClr val="tx1"/>
+                      </a:solidFill>
+                      <a:prstDash val="solid"/>
+                      <a:round/>
+                      <a:headEnd type="none" w="med" len="med"/>
+                      <a:tailEnd type="none" w="med" len="med"/>
+                    </a:lnL>
+                    <a:lnR w="12700" cap="flat" cmpd="sng" algn="ctr">
+                      <a:solidFill>
+                        <a:schemeClr val="tx1"/>
+                      </a:solidFill>
+                      <a:prstDash val="solid"/>
+                      <a:round/>
+                      <a:headEnd type="none" w="med" len="med"/>
+                      <a:tailEnd type="none" w="med" len="med"/>
+                    </a:lnR>
+                    <a:lnT w="12700" cap="flat" cmpd="sng" algn="ctr">
+                      <a:solidFill>
+                        <a:schemeClr val="tx1"/>
+                      </a:solidFill>
+                      <a:prstDash val="solid"/>
+                      <a:round/>
+                      <a:headEnd type="none" w="med" len="med"/>
+                      <a:tailEnd type="none" w="med" len="med"/>
+                    </a:lnT>
+                    <a:lnB w="12700" cap="flat" cmpd="sng" algn="ctr">
+                      <a:solidFill>
+                        <a:schemeClr val="tx1"/>
+                      </a:solidFill>
+                      <a:prstDash val="solid"/>
+                      <a:round/>
+                      <a:headEnd type="none" w="med" len="med"/>
+                      <a:tailEnd type="none" w="med" len="med"/>
+                    </a:lnB>
+                    <a:noFill/>
+                  </a:tcPr>
+                </a:tc>
+                <a:tc>
+                  <a:txBody>
+                    <a:bodyPr/>
+                    <a:lstStyle/>
+                    <a:p>
+                      <a:pPr algn="ctr" latinLnBrk="1"/>
+                      <a:r>
+                        <a:rPr lang="en-US" altLang="zh-TW" sz="1200" b="0" i="0" kern="1200" dirty="0">
+                          <a:solidFill>
+                            <a:schemeClr val="tx1"/>
+                          </a:solidFill>
+                          <a:effectLst/>
+                          <a:latin typeface="+mn-lt"/>
+                          <a:ea typeface="+mn-ea"/>
+                          <a:cs typeface="+mn-cs"/>
+                        </a:rPr>
+                        <a:t>0.5</a:t>
+                      </a:r>
+                    </a:p>
+                  </a:txBody>
+                  <a:tcPr anchor="ctr">
+                    <a:lnL w="12700" cap="flat" cmpd="sng" algn="ctr">
+                      <a:solidFill>
+                        <a:schemeClr val="tx1"/>
+                      </a:solidFill>
+                      <a:prstDash val="solid"/>
+                      <a:round/>
+                      <a:headEnd type="none" w="med" len="med"/>
+                      <a:tailEnd type="none" w="med" len="med"/>
+                    </a:lnL>
+                    <a:lnR w="12700" cap="flat" cmpd="sng" algn="ctr">
+                      <a:solidFill>
+                        <a:schemeClr val="tx1"/>
+                      </a:solidFill>
+                      <a:prstDash val="solid"/>
+                      <a:round/>
+                      <a:headEnd type="none" w="med" len="med"/>
+                      <a:tailEnd type="none" w="med" len="med"/>
+                    </a:lnR>
+                    <a:lnT w="12700" cap="flat" cmpd="sng" algn="ctr">
+                      <a:solidFill>
+                        <a:schemeClr val="tx1"/>
+                      </a:solidFill>
+                      <a:prstDash val="solid"/>
+                      <a:round/>
+                      <a:headEnd type="none" w="med" len="med"/>
+                      <a:tailEnd type="none" w="med" len="med"/>
+                    </a:lnT>
+                    <a:lnB w="12700" cap="flat" cmpd="sng" algn="ctr">
+                      <a:solidFill>
+                        <a:schemeClr val="tx1"/>
+                      </a:solidFill>
+                      <a:prstDash val="solid"/>
+                      <a:round/>
+                      <a:headEnd type="none" w="med" len="med"/>
+                      <a:tailEnd type="none" w="med" len="med"/>
+                    </a:lnB>
+                    <a:noFill/>
+                  </a:tcPr>
+                </a:tc>
+                <a:tc>
+                  <a:txBody>
+                    <a:bodyPr/>
+                    <a:lstStyle/>
+                    <a:p>
+                      <a:pPr marL="0" marR="0" lvl="0" indent="0" algn="ctr" defTabSz="914400" rtl="0" eaLnBrk="1" fontAlgn="auto" latinLnBrk="1" hangingPunct="1">
+                        <a:lnSpc>
+                          <a:spcPct val="100000"/>
+                        </a:lnSpc>
+                        <a:spcBef>
+                          <a:spcPts val="0"/>
+                        </a:spcBef>
+                        <a:spcAft>
+                          <a:spcPts val="0"/>
+                        </a:spcAft>
+                        <a:buClrTx/>
+                        <a:buSzTx/>
+                        <a:buFontTx/>
+                        <a:buNone/>
+                        <a:tabLst/>
+                        <a:defRPr/>
+                      </a:pPr>
+                      <a:r>
+                        <a:rPr lang="en-US" altLang="zh-TW" sz="1200" b="0" i="0" kern="1200" dirty="0">
+                          <a:solidFill>
+                            <a:schemeClr val="tx1"/>
+                          </a:solidFill>
+                          <a:effectLst/>
+                          <a:latin typeface="+mn-lt"/>
+                          <a:ea typeface="+mn-ea"/>
+                          <a:cs typeface="+mn-cs"/>
+                        </a:rPr>
+                        <a:t>0.05</a:t>
+                      </a:r>
+                    </a:p>
+                  </a:txBody>
+                  <a:tcPr anchor="ctr">
+                    <a:lnL w="12700" cap="flat" cmpd="sng" algn="ctr">
+                      <a:solidFill>
+                        <a:schemeClr val="tx1"/>
+                      </a:solidFill>
+                      <a:prstDash val="solid"/>
+                      <a:round/>
+                      <a:headEnd type="none" w="med" len="med"/>
+                      <a:tailEnd type="none" w="med" len="med"/>
+                    </a:lnL>
+                    <a:lnR w="12700" cap="flat" cmpd="sng" algn="ctr">
+                      <a:solidFill>
+                        <a:schemeClr val="tx1"/>
+                      </a:solidFill>
+                      <a:prstDash val="solid"/>
+                      <a:round/>
+                      <a:headEnd type="none" w="med" len="med"/>
+                      <a:tailEnd type="none" w="med" len="med"/>
+                    </a:lnR>
+                    <a:lnT w="12700" cap="flat" cmpd="sng" algn="ctr">
+                      <a:solidFill>
+                        <a:schemeClr val="tx1"/>
+                      </a:solidFill>
+                      <a:prstDash val="solid"/>
+                      <a:round/>
+                      <a:headEnd type="none" w="med" len="med"/>
+                      <a:tailEnd type="none" w="med" len="med"/>
+                    </a:lnT>
+                    <a:lnB w="12700" cap="flat" cmpd="sng" algn="ctr">
+                      <a:solidFill>
+                        <a:schemeClr val="tx1"/>
+                      </a:solidFill>
+                      <a:prstDash val="solid"/>
+                      <a:round/>
+                      <a:headEnd type="none" w="med" len="med"/>
+                      <a:tailEnd type="none" w="med" len="med"/>
+                    </a:lnB>
+                    <a:noFill/>
+                  </a:tcPr>
+                </a:tc>
+                <a:extLst>
+                  <a:ext uri="{0D108BD9-81ED-4DB2-BD59-A6C34878D82A}">
+                    <a16:rowId xmlns:a16="http://schemas.microsoft.com/office/drawing/2014/main" val="3358222618"/>
+                  </a:ext>
+                </a:extLst>
+              </a:tr>
+            </a:tbl>
+          </a:graphicData>
+        </a:graphic>
+      </p:graphicFrame>
     </p:spTree>
     <p:extLst>
       <p:ext uri="{BB962C8B-B14F-4D97-AF65-F5344CB8AC3E}">
-        <p14:creationId xmlns:p14="http://schemas.microsoft.com/office/powerpoint/2010/main" val="559336334"/>
+        <p14:creationId xmlns:p14="http://schemas.microsoft.com/office/powerpoint/2010/main" val="2297189252"/>
       </p:ext>
     </p:extLst>
   </p:cSld>
@@ -4629,8 +6408,8 @@
         </p:blipFill>
         <p:spPr>
           <a:xfrm>
-            <a:off x="2701160" y="1974467"/>
-            <a:ext cx="6077680" cy="4399958"/>
+            <a:off x="2509364" y="1840832"/>
+            <a:ext cx="6425886" cy="4652043"/>
           </a:xfrm>
           <a:prstGeom prst="rect">
             <a:avLst/>
@@ -4817,84 +6596,20 @@
         </p:blipFill>
         <p:spPr>
           <a:xfrm>
-            <a:off x="2425035" y="1585585"/>
-            <a:ext cx="7177022" cy="4802187"/>
+            <a:off x="555902" y="1690688"/>
+            <a:ext cx="6149747" cy="4114831"/>
           </a:xfrm>
           <a:prstGeom prst="rect">
             <a:avLst/>
           </a:prstGeom>
         </p:spPr>
       </p:pic>
-    </p:spTree>
-    <p:extLst>
-      <p:ext uri="{BB962C8B-B14F-4D97-AF65-F5344CB8AC3E}">
-        <p14:creationId xmlns:p14="http://schemas.microsoft.com/office/powerpoint/2010/main" val="1717658573"/>
-      </p:ext>
-    </p:extLst>
-  </p:cSld>
-  <p:clrMapOvr>
-    <a:masterClrMapping/>
-  </p:clrMapOvr>
-</p:sld>
-</file>
-
-<file path=ppt/slides/slide6.xml><?xml version="1.0" encoding="utf-8"?>
-<p:sld xmlns:a="http://schemas.openxmlformats.org/drawingml/2006/main" xmlns:r="http://schemas.openxmlformats.org/officeDocument/2006/relationships" xmlns:p="http://schemas.openxmlformats.org/presentationml/2006/main">
-  <p:cSld>
-    <p:spTree>
-      <p:nvGrpSpPr>
-        <p:cNvPr id="1" name="">
-          <a:extLst>
-            <a:ext uri="{FF2B5EF4-FFF2-40B4-BE49-F238E27FC236}">
-              <a16:creationId xmlns:a16="http://schemas.microsoft.com/office/drawing/2014/main" id="{1DBE62DC-E7F9-22BE-0747-2E2356DCBA66}"/>
-            </a:ext>
-          </a:extLst>
-        </p:cNvPr>
-        <p:cNvGrpSpPr/>
-        <p:nvPr/>
-      </p:nvGrpSpPr>
-      <p:grpSpPr>
-        <a:xfrm>
-          <a:off x="0" y="0"/>
-          <a:ext cx="0" cy="0"/>
-          <a:chOff x="0" y="0"/>
-          <a:chExt cx="0" cy="0"/>
-        </a:xfrm>
-      </p:grpSpPr>
-      <p:sp>
-        <p:nvSpPr>
-          <p:cNvPr id="2" name="標題 1">
-            <a:extLst>
-              <a:ext uri="{FF2B5EF4-FFF2-40B4-BE49-F238E27FC236}">
-                <a16:creationId xmlns:a16="http://schemas.microsoft.com/office/drawing/2014/main" id="{FAA9B180-C8BE-4055-F1C9-3EA8EC91C3D8}"/>
-              </a:ext>
-            </a:extLst>
-          </p:cNvPr>
-          <p:cNvSpPr>
-            <a:spLocks noGrp="1"/>
-          </p:cNvSpPr>
-          <p:nvPr>
-            <p:ph type="title"/>
-          </p:nvPr>
-        </p:nvSpPr>
-        <p:spPr/>
-        <p:txBody>
-          <a:bodyPr/>
-          <a:lstStyle/>
-          <a:p>
-            <a:r>
-              <a:rPr lang="zh-TW" altLang="en-US" dirty="0"/>
-              <a:t>第一次選到跑車的機率估計值分布</a:t>
-            </a:r>
-          </a:p>
-        </p:txBody>
-      </p:sp>
       <p:graphicFrame>
         <p:nvGraphicFramePr>
-          <p:cNvPr id="3" name="表格 2">
-            <a:extLst>
-              <a:ext uri="{FF2B5EF4-FFF2-40B4-BE49-F238E27FC236}">
-                <a16:creationId xmlns:a16="http://schemas.microsoft.com/office/drawing/2014/main" id="{0ECE7A87-D940-6B0D-06FB-C4B952623934}"/>
+          <p:cNvPr id="6" name="表格 5">
+            <a:extLst>
+              <a:ext uri="{FF2B5EF4-FFF2-40B4-BE49-F238E27FC236}">
+                <a16:creationId xmlns:a16="http://schemas.microsoft.com/office/drawing/2014/main" id="{8E916A37-E6B8-0FB0-9301-C678D1876FAC}"/>
               </a:ext>
             </a:extLst>
           </p:cNvPr>
@@ -4904,14 +6619,14 @@
           <p:nvPr>
             <p:extLst>
               <p:ext uri="{D42A27DB-BD31-4B8C-83A1-F6EECF244321}">
-                <p14:modId xmlns:p14="http://schemas.microsoft.com/office/powerpoint/2010/main" val="3977034278"/>
+                <p14:modId xmlns:p14="http://schemas.microsoft.com/office/powerpoint/2010/main" val="4219780231"/>
               </p:ext>
             </p:extLst>
           </p:nvPr>
         </p:nvGraphicFramePr>
         <p:xfrm>
-          <a:off x="1401380" y="1938866"/>
-          <a:ext cx="9487338" cy="2696195"/>
+          <a:off x="6631958" y="2508008"/>
+          <a:ext cx="5133015" cy="2286000"/>
         </p:xfrm>
         <a:graphic>
           <a:graphicData uri="http://schemas.openxmlformats.org/drawingml/2006/table">
@@ -4920,21 +6635,21 @@
                 <a:tableStyleId>{5C22544A-7EE6-4342-B048-85BDC9FD1C3A}</a:tableStyleId>
               </a:tblPr>
               <a:tblGrid>
-                <a:gridCol w="3162446">
+                <a:gridCol w="1711005">
                   <a:extLst>
                     <a:ext uri="{9D8B030D-6E8A-4147-A177-3AD203B41FA5}">
                       <a16:colId xmlns:a16="http://schemas.microsoft.com/office/drawing/2014/main" val="3945390195"/>
                     </a:ext>
                   </a:extLst>
                 </a:gridCol>
-                <a:gridCol w="3162446">
+                <a:gridCol w="1711005">
                   <a:extLst>
                     <a:ext uri="{9D8B030D-6E8A-4147-A177-3AD203B41FA5}">
                       <a16:colId xmlns:a16="http://schemas.microsoft.com/office/drawing/2014/main" val="1634968925"/>
                     </a:ext>
                   </a:extLst>
                 </a:gridCol>
-                <a:gridCol w="3162446">
+                <a:gridCol w="1711005">
                   <a:extLst>
                     <a:ext uri="{9D8B030D-6E8A-4147-A177-3AD203B41FA5}">
                       <a16:colId xmlns:a16="http://schemas.microsoft.com/office/drawing/2014/main" val="2116488310"/>
@@ -4942,13 +6657,13 @@
                   </a:extLst>
                 </a:gridCol>
               </a:tblGrid>
-              <a:tr h="570499">
+              <a:tr h="317201">
                 <a:tc>
                   <a:txBody>
                     <a:bodyPr/>
                     <a:lstStyle/>
                     <a:p>
-                      <a:endParaRPr lang="zh-TW" altLang="en-US" sz="2400" dirty="0">
+                      <a:endParaRPr lang="zh-TW" altLang="en-US" sz="1800" dirty="0">
                         <a:solidFill>
                           <a:schemeClr val="tx1"/>
                         </a:solidFill>
@@ -5001,14 +6716,14 @@
                     <a:lstStyle/>
                     <a:p>
                       <a:r>
-                        <a:rPr lang="en-US" altLang="zh-TW" sz="2400" dirty="0">
+                        <a:rPr lang="en-US" altLang="zh-TW" sz="1800" dirty="0">
                           <a:solidFill>
                             <a:schemeClr val="tx1"/>
                           </a:solidFill>
                         </a:rPr>
                         <a:t>Mean </a:t>
                       </a:r>
-                      <a:endParaRPr lang="zh-TW" altLang="en-US" sz="2400" dirty="0">
+                      <a:endParaRPr lang="zh-TW" altLang="en-US" sz="1800" dirty="0">
                         <a:solidFill>
                           <a:schemeClr val="tx1"/>
                         </a:solidFill>
@@ -5061,14 +6776,14 @@
                     <a:lstStyle/>
                     <a:p>
                       <a:r>
-                        <a:rPr lang="en-US" altLang="zh-TW" sz="2400" dirty="0">
+                        <a:rPr lang="en-US" altLang="zh-TW" sz="1800" dirty="0">
                           <a:solidFill>
                             <a:schemeClr val="tx1"/>
                           </a:solidFill>
                         </a:rPr>
                         <a:t>Var </a:t>
                       </a:r>
-                      <a:endParaRPr lang="zh-TW" altLang="en-US" sz="2400" dirty="0">
+                      <a:endParaRPr lang="zh-TW" altLang="en-US" sz="1800" dirty="0">
                         <a:solidFill>
                           <a:schemeClr val="tx1"/>
                         </a:solidFill>
@@ -5121,7 +6836,7 @@
                   </a:ext>
                 </a:extLst>
               </a:tr>
-              <a:tr h="570499">
+              <a:tr h="317201">
                 <a:tc>
                   <a:txBody>
                     <a:bodyPr/>
@@ -5145,7 +6860,7 @@
                         <a:defRPr/>
                       </a:pPr>
                       <a:r>
-                        <a:rPr lang="en-US" altLang="zh-TW" sz="2400" b="0" i="0" kern="1200" dirty="0">
+                        <a:rPr lang="en-US" altLang="zh-TW" sz="1800" b="0" i="0" kern="1200" dirty="0">
                           <a:solidFill>
                             <a:schemeClr val="tx1"/>
                           </a:solidFill>
@@ -5157,7 +6872,7 @@
                         <a:t>R</a:t>
                       </a:r>
                       <a:r>
-                        <a:rPr lang="zh-TW" altLang="en-US" sz="2400" b="0" i="0" kern="1200" dirty="0">
+                        <a:rPr lang="zh-TW" altLang="en-US" sz="1800" b="0" i="0" kern="1200" dirty="0">
                           <a:solidFill>
                             <a:schemeClr val="tx1"/>
                           </a:solidFill>
@@ -5233,7 +6948,7 @@
                         <a:defRPr/>
                       </a:pPr>
                       <a:r>
-                        <a:rPr lang="en-US" altLang="zh-TW" sz="2400" b="0" i="0" kern="1200" dirty="0">
+                        <a:rPr lang="en-US" altLang="zh-TW" sz="1800" b="0" i="0" kern="1200" dirty="0">
                           <a:solidFill>
                             <a:schemeClr val="dk1"/>
                           </a:solidFill>
@@ -5309,7 +7024,7 @@
                         <a:defRPr/>
                       </a:pPr>
                       <a:r>
-                        <a:rPr lang="en-US" altLang="zh-TW" sz="2400" b="0" i="0" kern="1200" dirty="0">
+                        <a:rPr lang="en-US" altLang="zh-TW" sz="1800" b="0" i="0" kern="1200" dirty="0">
                           <a:solidFill>
                             <a:schemeClr val="dk1"/>
                           </a:solidFill>
@@ -5368,7 +7083,7 @@
                   </a:ext>
                 </a:extLst>
               </a:tr>
-              <a:tr h="570499">
+              <a:tr h="317201">
                 <a:tc>
                   <a:txBody>
                     <a:bodyPr/>
@@ -5392,7 +7107,7 @@
                         <a:defRPr/>
                       </a:pPr>
                       <a:r>
-                        <a:rPr lang="en-US" altLang="zh-TW" sz="2400" b="0" i="0" kern="1200" dirty="0">
+                        <a:rPr lang="en-US" altLang="zh-TW" sz="1800" b="0" i="0" kern="1200" dirty="0">
                           <a:solidFill>
                             <a:schemeClr val="tx1"/>
                           </a:solidFill>
@@ -5468,7 +7183,7 @@
                         <a:defRPr/>
                       </a:pPr>
                       <a:r>
-                        <a:rPr lang="en-US" altLang="zh-TW" sz="2400" b="0" i="0" kern="1200" dirty="0">
+                        <a:rPr lang="en-US" altLang="zh-TW" sz="1800" b="0" i="0" kern="1200" dirty="0">
                           <a:solidFill>
                             <a:schemeClr val="dk1"/>
                           </a:solidFill>
@@ -5544,7 +7259,7 @@
                         <a:defRPr/>
                       </a:pPr>
                       <a:r>
-                        <a:rPr lang="en-US" altLang="zh-TW" sz="2400" b="0" i="0" kern="1200" dirty="0">
+                        <a:rPr lang="en-US" altLang="zh-TW" sz="1800" b="0" i="0" kern="1200" dirty="0">
                           <a:solidFill>
                             <a:schemeClr val="dk1"/>
                           </a:solidFill>
@@ -5603,7 +7318,7 @@
                   </a:ext>
                 </a:extLst>
               </a:tr>
-              <a:tr h="984698">
+              <a:tr h="547497">
                 <a:tc>
                   <a:txBody>
                     <a:bodyPr/>
@@ -5627,7 +7342,7 @@
                         <a:defRPr/>
                       </a:pPr>
                       <a:r>
-                        <a:rPr lang="en-US" altLang="zh-TW" sz="2400" b="0" i="0" kern="1200" dirty="0">
+                        <a:rPr lang="en-US" altLang="zh-TW" sz="1800" b="0" i="0" kern="1200" dirty="0">
                           <a:solidFill>
                             <a:schemeClr val="tx1"/>
                           </a:solidFill>
@@ -5703,7 +7418,7 @@
                         <a:defRPr/>
                       </a:pPr>
                       <a:r>
-                        <a:rPr lang="en-US" altLang="zh-TW" sz="2400" b="0" i="0" kern="1200" dirty="0">
+                        <a:rPr lang="en-US" altLang="zh-TW" sz="1800" b="0" i="0" kern="1200" dirty="0">
                           <a:solidFill>
                             <a:schemeClr val="dk1"/>
                           </a:solidFill>
@@ -5716,7 +7431,7 @@
                       </a:r>
                     </a:p>
                     <a:p>
-                      <a:endParaRPr lang="zh-TW" altLang="en-US" sz="2400" dirty="0">
+                      <a:endParaRPr lang="zh-TW" altLang="en-US" sz="1800" dirty="0">
                         <a:solidFill>
                           <a:schemeClr val="tx1"/>
                         </a:solidFill>
@@ -5786,7 +7501,7 @@
                         <a:defRPr/>
                       </a:pPr>
                       <a:r>
-                        <a:rPr lang="en-US" altLang="zh-TW" sz="2400" b="0" i="0" kern="1200" dirty="0">
+                        <a:rPr lang="en-US" altLang="zh-TW" sz="1800" b="0" i="0" kern="1200" dirty="0">
                           <a:solidFill>
                             <a:schemeClr val="dk1"/>
                           </a:solidFill>
@@ -5799,7 +7514,7 @@
                       </a:r>
                     </a:p>
                     <a:p>
-                      <a:endParaRPr lang="zh-TW" altLang="en-US" sz="2400" dirty="0">
+                      <a:endParaRPr lang="zh-TW" altLang="en-US" sz="1800" dirty="0">
                         <a:solidFill>
                           <a:schemeClr val="tx1"/>
                         </a:solidFill>
@@ -5858,10 +7573,10 @@
       </p:graphicFrame>
       <p:sp>
         <p:nvSpPr>
-          <p:cNvPr id="5" name="文字方塊 4">
-            <a:extLst>
-              <a:ext uri="{FF2B5EF4-FFF2-40B4-BE49-F238E27FC236}">
-                <a16:creationId xmlns:a16="http://schemas.microsoft.com/office/drawing/2014/main" id="{9369B184-D58C-9BC0-CD95-BFBCE93DA9D2}"/>
+          <p:cNvPr id="7" name="文字方塊 6">
+            <a:extLst>
+              <a:ext uri="{FF2B5EF4-FFF2-40B4-BE49-F238E27FC236}">
+                <a16:creationId xmlns:a16="http://schemas.microsoft.com/office/drawing/2014/main" id="{B0893D44-E615-E39B-2469-B5A8A6982E59}"/>
               </a:ext>
             </a:extLst>
           </p:cNvPr>
@@ -5870,8 +7585,8 @@
         </p:nvSpPr>
         <p:spPr>
           <a:xfrm>
-            <a:off x="3531475" y="4988342"/>
-            <a:ext cx="5549463" cy="707886"/>
+            <a:off x="6556973" y="5006753"/>
+            <a:ext cx="5549463" cy="461665"/>
           </a:xfrm>
           <a:prstGeom prst="rect">
             <a:avLst/>
@@ -5885,19 +7600,15 @@
           <a:lstStyle/>
           <a:p>
             <a:r>
-              <a:rPr lang="en-US" altLang="zh-TW" sz="4000" dirty="0" err="1"/>
-              <a:t>Var_Red</a:t>
+              <a:rPr lang="en-US" altLang="zh-TW" sz="2400" dirty="0"/>
+              <a:t>Variance reduction = 47.68226</a:t>
             </a:r>
             <a:r>
-              <a:rPr lang="en-US" altLang="zh-TW" sz="4000" dirty="0"/>
-              <a:t> = 47.68226</a:t>
-            </a:r>
-            <a:r>
-              <a:rPr lang="zh-TW" altLang="en-US" sz="4000" dirty="0"/>
+              <a:rPr lang="zh-TW" altLang="en-US" sz="2400" dirty="0"/>
               <a:t> </a:t>
             </a:r>
             <a:r>
-              <a:rPr lang="en-US" altLang="zh-TW" sz="4000" dirty="0"/>
+              <a:rPr lang="en-US" altLang="zh-TW" sz="2400" dirty="0"/>
               <a:t>%</a:t>
             </a:r>
           </a:p>
@@ -5906,7 +7617,7 @@
     </p:spTree>
     <p:extLst>
       <p:ext uri="{BB962C8B-B14F-4D97-AF65-F5344CB8AC3E}">
-        <p14:creationId xmlns:p14="http://schemas.microsoft.com/office/powerpoint/2010/main" val="1427480801"/>
+        <p14:creationId xmlns:p14="http://schemas.microsoft.com/office/powerpoint/2010/main" val="1717658573"/>
       </p:ext>
     </p:extLst>
   </p:cSld>
@@ -5916,7 +7627,7 @@
 </p:sld>
 </file>
 
-<file path=ppt/slides/slide7.xml><?xml version="1.0" encoding="utf-8"?>
+<file path=ppt/slides/slide6.xml><?xml version="1.0" encoding="utf-8"?>
 <p:sld xmlns:a="http://schemas.openxmlformats.org/drawingml/2006/main" xmlns:r="http://schemas.openxmlformats.org/officeDocument/2006/relationships" xmlns:p="http://schemas.openxmlformats.org/presentationml/2006/main">
   <p:cSld>
     <p:spTree>
@@ -6010,7 +7721,7 @@
 </p:sld>
 </file>
 
-<file path=ppt/slides/slide8.xml><?xml version="1.0" encoding="utf-8"?>
+<file path=ppt/slides/slide7.xml><?xml version="1.0" encoding="utf-8"?>
 <p:sld xmlns:a="http://schemas.openxmlformats.org/drawingml/2006/main" xmlns:r="http://schemas.openxmlformats.org/officeDocument/2006/relationships" xmlns:p="http://schemas.openxmlformats.org/presentationml/2006/main">
   <p:cSld>
     <p:spTree>
@@ -6104,7 +7815,7 @@
 </p:sld>
 </file>
 
-<file path=ppt/slides/slide9.xml><?xml version="1.0" encoding="utf-8"?>
+<file path=ppt/slides/slide8.xml><?xml version="1.0" encoding="utf-8"?>
 <p:sld xmlns:a="http://schemas.openxmlformats.org/drawingml/2006/main" xmlns:r="http://schemas.openxmlformats.org/officeDocument/2006/relationships" xmlns:p="http://schemas.openxmlformats.org/presentationml/2006/main">
   <p:cSld>
     <p:spTree>
@@ -6189,6 +7900,1006 @@
     <p:extLst>
       <p:ext uri="{BB962C8B-B14F-4D97-AF65-F5344CB8AC3E}">
         <p14:creationId xmlns:p14="http://schemas.microsoft.com/office/powerpoint/2010/main" val="1093076495"/>
+      </p:ext>
+    </p:extLst>
+  </p:cSld>
+  <p:clrMapOvr>
+    <a:masterClrMapping/>
+  </p:clrMapOvr>
+</p:sld>
+</file>
+
+<file path=ppt/slides/slide9.xml><?xml version="1.0" encoding="utf-8"?>
+<p:sld xmlns:a="http://schemas.openxmlformats.org/drawingml/2006/main" xmlns:r="http://schemas.openxmlformats.org/officeDocument/2006/relationships" xmlns:p="http://schemas.openxmlformats.org/presentationml/2006/main">
+  <p:cSld>
+    <p:spTree>
+      <p:nvGrpSpPr>
+        <p:cNvPr id="1" name="">
+          <a:extLst>
+            <a:ext uri="{FF2B5EF4-FFF2-40B4-BE49-F238E27FC236}">
+              <a16:creationId xmlns:a16="http://schemas.microsoft.com/office/drawing/2014/main" id="{155FE065-1083-E3AA-89D2-48DFFEBB22FB}"/>
+            </a:ext>
+          </a:extLst>
+        </p:cNvPr>
+        <p:cNvGrpSpPr/>
+        <p:nvPr/>
+      </p:nvGrpSpPr>
+      <p:grpSpPr>
+        <a:xfrm>
+          <a:off x="0" y="0"/>
+          <a:ext cx="0" cy="0"/>
+          <a:chOff x="0" y="0"/>
+          <a:chExt cx="0" cy="0"/>
+        </a:xfrm>
+      </p:grpSpPr>
+      <p:sp>
+        <p:nvSpPr>
+          <p:cNvPr id="2" name="標題 1">
+            <a:extLst>
+              <a:ext uri="{FF2B5EF4-FFF2-40B4-BE49-F238E27FC236}">
+                <a16:creationId xmlns:a16="http://schemas.microsoft.com/office/drawing/2014/main" id="{8E87F900-06DA-417E-F0A2-6F535EBD17BB}"/>
+              </a:ext>
+            </a:extLst>
+          </p:cNvPr>
+          <p:cNvSpPr>
+            <a:spLocks noGrp="1"/>
+          </p:cNvSpPr>
+          <p:nvPr>
+            <p:ph type="title"/>
+          </p:nvPr>
+        </p:nvSpPr>
+        <p:spPr/>
+        <p:txBody>
+          <a:bodyPr/>
+          <a:lstStyle/>
+          <a:p>
+            <a:r>
+              <a:rPr lang="zh-TW" altLang="en-US" dirty="0"/>
+              <a:t>換門選到跑車的機率估計值分布</a:t>
+            </a:r>
+          </a:p>
+        </p:txBody>
+      </p:sp>
+      <p:pic>
+        <p:nvPicPr>
+          <p:cNvPr id="7" name="圖片 6">
+            <a:extLst>
+              <a:ext uri="{FF2B5EF4-FFF2-40B4-BE49-F238E27FC236}">
+                <a16:creationId xmlns:a16="http://schemas.microsoft.com/office/drawing/2014/main" id="{05BCFDE0-6EDE-8F8F-A93B-A94BFABFAF45}"/>
+              </a:ext>
+            </a:extLst>
+          </p:cNvPr>
+          <p:cNvPicPr>
+            <a:picLocks noChangeAspect="1"/>
+          </p:cNvPicPr>
+          <p:nvPr/>
+        </p:nvPicPr>
+        <p:blipFill>
+          <a:blip r:embed="rId2"/>
+          <a:stretch>
+            <a:fillRect/>
+          </a:stretch>
+        </p:blipFill>
+        <p:spPr>
+          <a:xfrm>
+            <a:off x="399079" y="1948027"/>
+            <a:ext cx="7106608" cy="3470867"/>
+          </a:xfrm>
+          <a:prstGeom prst="rect">
+            <a:avLst/>
+          </a:prstGeom>
+        </p:spPr>
+      </p:pic>
+      <p:graphicFrame>
+        <p:nvGraphicFramePr>
+          <p:cNvPr id="8" name="表格 7">
+            <a:extLst>
+              <a:ext uri="{FF2B5EF4-FFF2-40B4-BE49-F238E27FC236}">
+                <a16:creationId xmlns:a16="http://schemas.microsoft.com/office/drawing/2014/main" id="{485A1E40-B754-2C2C-3A0F-8B998A52A66A}"/>
+              </a:ext>
+            </a:extLst>
+          </p:cNvPr>
+          <p:cNvGraphicFramePr>
+            <a:graphicFrameLocks noGrp="1"/>
+          </p:cNvGraphicFramePr>
+          <p:nvPr>
+            <p:extLst>
+              <p:ext uri="{D42A27DB-BD31-4B8C-83A1-F6EECF244321}">
+                <p14:modId xmlns:p14="http://schemas.microsoft.com/office/powerpoint/2010/main" val="924220196"/>
+              </p:ext>
+            </p:extLst>
+          </p:nvPr>
+        </p:nvGraphicFramePr>
+        <p:xfrm>
+          <a:off x="7456349" y="1814536"/>
+          <a:ext cx="4469508" cy="2834640"/>
+        </p:xfrm>
+        <a:graphic>
+          <a:graphicData uri="http://schemas.openxmlformats.org/drawingml/2006/table">
+            <a:tbl>
+              <a:tblPr firstRow="1" bandRow="1">
+                <a:tableStyleId>{5C22544A-7EE6-4342-B048-85BDC9FD1C3A}</a:tableStyleId>
+              </a:tblPr>
+              <a:tblGrid>
+                <a:gridCol w="1489836">
+                  <a:extLst>
+                    <a:ext uri="{9D8B030D-6E8A-4147-A177-3AD203B41FA5}">
+                      <a16:colId xmlns:a16="http://schemas.microsoft.com/office/drawing/2014/main" val="3945390195"/>
+                    </a:ext>
+                  </a:extLst>
+                </a:gridCol>
+                <a:gridCol w="1489836">
+                  <a:extLst>
+                    <a:ext uri="{9D8B030D-6E8A-4147-A177-3AD203B41FA5}">
+                      <a16:colId xmlns:a16="http://schemas.microsoft.com/office/drawing/2014/main" val="1634968925"/>
+                    </a:ext>
+                  </a:extLst>
+                </a:gridCol>
+                <a:gridCol w="1489836">
+                  <a:extLst>
+                    <a:ext uri="{9D8B030D-6E8A-4147-A177-3AD203B41FA5}">
+                      <a16:colId xmlns:a16="http://schemas.microsoft.com/office/drawing/2014/main" val="2116488310"/>
+                    </a:ext>
+                  </a:extLst>
+                </a:gridCol>
+              </a:tblGrid>
+              <a:tr h="323693">
+                <a:tc>
+                  <a:txBody>
+                    <a:bodyPr/>
+                    <a:lstStyle/>
+                    <a:p>
+                      <a:endParaRPr lang="zh-TW" altLang="en-US" sz="1800" dirty="0">
+                        <a:solidFill>
+                          <a:schemeClr val="tx1"/>
+                        </a:solidFill>
+                      </a:endParaRPr>
+                    </a:p>
+                  </a:txBody>
+                  <a:tcPr>
+                    <a:lnL w="12700" cap="flat" cmpd="sng" algn="ctr">
+                      <a:solidFill>
+                        <a:schemeClr val="tx1"/>
+                      </a:solidFill>
+                      <a:prstDash val="solid"/>
+                      <a:round/>
+                      <a:headEnd type="none" w="med" len="med"/>
+                      <a:tailEnd type="none" w="med" len="med"/>
+                    </a:lnL>
+                    <a:lnR w="12700" cap="flat" cmpd="sng" algn="ctr">
+                      <a:solidFill>
+                        <a:schemeClr val="tx1"/>
+                      </a:solidFill>
+                      <a:prstDash val="solid"/>
+                      <a:round/>
+                      <a:headEnd type="none" w="med" len="med"/>
+                      <a:tailEnd type="none" w="med" len="med"/>
+                    </a:lnR>
+                    <a:lnT w="12700" cap="flat" cmpd="sng" algn="ctr">
+                      <a:solidFill>
+                        <a:schemeClr val="tx1"/>
+                      </a:solidFill>
+                      <a:prstDash val="solid"/>
+                      <a:round/>
+                      <a:headEnd type="none" w="med" len="med"/>
+                      <a:tailEnd type="none" w="med" len="med"/>
+                    </a:lnT>
+                    <a:lnB w="12700" cap="flat" cmpd="sng" algn="ctr">
+                      <a:solidFill>
+                        <a:schemeClr val="tx1"/>
+                      </a:solidFill>
+                      <a:prstDash val="solid"/>
+                      <a:round/>
+                      <a:headEnd type="none" w="med" len="med"/>
+                      <a:tailEnd type="none" w="med" len="med"/>
+                    </a:lnB>
+                    <a:noFill/>
+                  </a:tcPr>
+                </a:tc>
+                <a:tc>
+                  <a:txBody>
+                    <a:bodyPr/>
+                    <a:lstStyle/>
+                    <a:p>
+                      <a:r>
+                        <a:rPr lang="en-US" altLang="zh-TW" sz="1800" dirty="0">
+                          <a:solidFill>
+                            <a:schemeClr val="tx1"/>
+                          </a:solidFill>
+                        </a:rPr>
+                        <a:t>Mean </a:t>
+                      </a:r>
+                      <a:endParaRPr lang="zh-TW" altLang="en-US" sz="1800" dirty="0">
+                        <a:solidFill>
+                          <a:schemeClr val="tx1"/>
+                        </a:solidFill>
+                      </a:endParaRPr>
+                    </a:p>
+                  </a:txBody>
+                  <a:tcPr>
+                    <a:lnL w="12700" cap="flat" cmpd="sng" algn="ctr">
+                      <a:solidFill>
+                        <a:schemeClr val="tx1"/>
+                      </a:solidFill>
+                      <a:prstDash val="solid"/>
+                      <a:round/>
+                      <a:headEnd type="none" w="med" len="med"/>
+                      <a:tailEnd type="none" w="med" len="med"/>
+                    </a:lnL>
+                    <a:lnR w="12700" cap="flat" cmpd="sng" algn="ctr">
+                      <a:solidFill>
+                        <a:schemeClr val="tx1"/>
+                      </a:solidFill>
+                      <a:prstDash val="solid"/>
+                      <a:round/>
+                      <a:headEnd type="none" w="med" len="med"/>
+                      <a:tailEnd type="none" w="med" len="med"/>
+                    </a:lnR>
+                    <a:lnT w="12700" cap="flat" cmpd="sng" algn="ctr">
+                      <a:solidFill>
+                        <a:schemeClr val="tx1"/>
+                      </a:solidFill>
+                      <a:prstDash val="solid"/>
+                      <a:round/>
+                      <a:headEnd type="none" w="med" len="med"/>
+                      <a:tailEnd type="none" w="med" len="med"/>
+                    </a:lnT>
+                    <a:lnB w="12700" cap="flat" cmpd="sng" algn="ctr">
+                      <a:solidFill>
+                        <a:schemeClr val="tx1"/>
+                      </a:solidFill>
+                      <a:prstDash val="solid"/>
+                      <a:round/>
+                      <a:headEnd type="none" w="med" len="med"/>
+                      <a:tailEnd type="none" w="med" len="med"/>
+                    </a:lnB>
+                    <a:noFill/>
+                  </a:tcPr>
+                </a:tc>
+                <a:tc>
+                  <a:txBody>
+                    <a:bodyPr/>
+                    <a:lstStyle/>
+                    <a:p>
+                      <a:r>
+                        <a:rPr lang="en-US" altLang="zh-TW" sz="1800" dirty="0">
+                          <a:solidFill>
+                            <a:schemeClr val="tx1"/>
+                          </a:solidFill>
+                        </a:rPr>
+                        <a:t>Var </a:t>
+                      </a:r>
+                      <a:endParaRPr lang="zh-TW" altLang="en-US" sz="1800" dirty="0">
+                        <a:solidFill>
+                          <a:schemeClr val="tx1"/>
+                        </a:solidFill>
+                      </a:endParaRPr>
+                    </a:p>
+                  </a:txBody>
+                  <a:tcPr>
+                    <a:lnL w="12700" cap="flat" cmpd="sng" algn="ctr">
+                      <a:solidFill>
+                        <a:schemeClr val="tx1"/>
+                      </a:solidFill>
+                      <a:prstDash val="solid"/>
+                      <a:round/>
+                      <a:headEnd type="none" w="med" len="med"/>
+                      <a:tailEnd type="none" w="med" len="med"/>
+                    </a:lnL>
+                    <a:lnR w="12700" cap="flat" cmpd="sng" algn="ctr">
+                      <a:solidFill>
+                        <a:schemeClr val="tx1"/>
+                      </a:solidFill>
+                      <a:prstDash val="solid"/>
+                      <a:round/>
+                      <a:headEnd type="none" w="med" len="med"/>
+                      <a:tailEnd type="none" w="med" len="med"/>
+                    </a:lnR>
+                    <a:lnT w="12700" cap="flat" cmpd="sng" algn="ctr">
+                      <a:solidFill>
+                        <a:schemeClr val="tx1"/>
+                      </a:solidFill>
+                      <a:prstDash val="solid"/>
+                      <a:round/>
+                      <a:headEnd type="none" w="med" len="med"/>
+                      <a:tailEnd type="none" w="med" len="med"/>
+                    </a:lnT>
+                    <a:lnB w="12700" cap="flat" cmpd="sng" algn="ctr">
+                      <a:solidFill>
+                        <a:schemeClr val="tx1"/>
+                      </a:solidFill>
+                      <a:prstDash val="solid"/>
+                      <a:round/>
+                      <a:headEnd type="none" w="med" len="med"/>
+                      <a:tailEnd type="none" w="med" len="med"/>
+                    </a:lnB>
+                    <a:noFill/>
+                  </a:tcPr>
+                </a:tc>
+                <a:extLst>
+                  <a:ext uri="{0D108BD9-81ED-4DB2-BD59-A6C34878D82A}">
+                    <a16:rowId xmlns:a16="http://schemas.microsoft.com/office/drawing/2014/main" val="3221030795"/>
+                  </a:ext>
+                </a:extLst>
+              </a:tr>
+              <a:tr h="323693">
+                <a:tc>
+                  <a:txBody>
+                    <a:bodyPr/>
+                    <a:lstStyle/>
+                    <a:p>
+                      <a:pPr marL="0" marR="0" lvl="0" indent="0" algn="l" defTabSz="914400" rtl="0" eaLnBrk="1" fontAlgn="auto" latinLnBrk="0" hangingPunct="1">
+                        <a:lnSpc>
+                          <a:spcPct val="100000"/>
+                        </a:lnSpc>
+                        <a:spcBef>
+                          <a:spcPts val="0"/>
+                        </a:spcBef>
+                        <a:spcAft>
+                          <a:spcPts val="0"/>
+                        </a:spcAft>
+                        <a:buClrTx/>
+                        <a:buSzTx/>
+                        <a:buFontTx/>
+                        <a:buNone/>
+                        <a:tabLst/>
+                        <a:defRPr/>
+                      </a:pPr>
+                      <a:r>
+                        <a:rPr lang="en-US" altLang="zh-TW" sz="1800" b="0" i="0" kern="1200" dirty="0">
+                          <a:solidFill>
+                            <a:schemeClr val="tx1"/>
+                          </a:solidFill>
+                          <a:effectLst/>
+                          <a:latin typeface="+mn-lt"/>
+                          <a:ea typeface="+mn-ea"/>
+                          <a:cs typeface="+mn-cs"/>
+                        </a:rPr>
+                        <a:t>R</a:t>
+                      </a:r>
+                      <a:r>
+                        <a:rPr lang="zh-TW" altLang="en-US" sz="1800" b="0" i="0" kern="1200" dirty="0">
+                          <a:solidFill>
+                            <a:schemeClr val="tx1"/>
+                          </a:solidFill>
+                          <a:effectLst/>
+                          <a:latin typeface="+mn-lt"/>
+                          <a:ea typeface="+mn-ea"/>
+                          <a:cs typeface="+mn-cs"/>
+                        </a:rPr>
+                        <a:t>內建的函數</a:t>
+                      </a:r>
+                    </a:p>
+                  </a:txBody>
+                  <a:tcPr>
+                    <a:lnL w="12700" cap="flat" cmpd="sng" algn="ctr">
+                      <a:solidFill>
+                        <a:schemeClr val="tx1"/>
+                      </a:solidFill>
+                      <a:prstDash val="solid"/>
+                      <a:round/>
+                      <a:headEnd type="none" w="med" len="med"/>
+                      <a:tailEnd type="none" w="med" len="med"/>
+                    </a:lnL>
+                    <a:lnR w="12700" cap="flat" cmpd="sng" algn="ctr">
+                      <a:solidFill>
+                        <a:schemeClr val="tx1"/>
+                      </a:solidFill>
+                      <a:prstDash val="solid"/>
+                      <a:round/>
+                      <a:headEnd type="none" w="med" len="med"/>
+                      <a:tailEnd type="none" w="med" len="med"/>
+                    </a:lnR>
+                    <a:lnT w="12700" cap="flat" cmpd="sng" algn="ctr">
+                      <a:solidFill>
+                        <a:schemeClr val="tx1"/>
+                      </a:solidFill>
+                      <a:prstDash val="solid"/>
+                      <a:round/>
+                      <a:headEnd type="none" w="med" len="med"/>
+                      <a:tailEnd type="none" w="med" len="med"/>
+                    </a:lnT>
+                    <a:lnB w="12700" cap="flat" cmpd="sng" algn="ctr">
+                      <a:solidFill>
+                        <a:schemeClr val="tx1"/>
+                      </a:solidFill>
+                      <a:prstDash val="solid"/>
+                      <a:round/>
+                      <a:headEnd type="none" w="med" len="med"/>
+                      <a:tailEnd type="none" w="med" len="med"/>
+                    </a:lnB>
+                    <a:noFill/>
+                  </a:tcPr>
+                </a:tc>
+                <a:tc>
+                  <a:txBody>
+                    <a:bodyPr/>
+                    <a:lstStyle/>
+                    <a:p>
+                      <a:pPr latinLnBrk="1"/>
+                      <a:r>
+                        <a:rPr lang="en-US" altLang="zh-TW" sz="1800" b="0" i="0" kern="1200" dirty="0">
+                          <a:solidFill>
+                            <a:schemeClr val="dk1"/>
+                          </a:solidFill>
+                          <a:effectLst/>
+                          <a:latin typeface="+mn-lt"/>
+                          <a:ea typeface="+mn-ea"/>
+                          <a:cs typeface="+mn-cs"/>
+                        </a:rPr>
+                        <a:t>0.666337</a:t>
+                      </a:r>
+                    </a:p>
+                  </a:txBody>
+                  <a:tcPr>
+                    <a:lnL w="12700" cap="flat" cmpd="sng" algn="ctr">
+                      <a:solidFill>
+                        <a:schemeClr val="tx1"/>
+                      </a:solidFill>
+                      <a:prstDash val="solid"/>
+                      <a:round/>
+                      <a:headEnd type="none" w="med" len="med"/>
+                      <a:tailEnd type="none" w="med" len="med"/>
+                    </a:lnL>
+                    <a:lnR w="12700" cap="flat" cmpd="sng" algn="ctr">
+                      <a:solidFill>
+                        <a:schemeClr val="tx1"/>
+                      </a:solidFill>
+                      <a:prstDash val="solid"/>
+                      <a:round/>
+                      <a:headEnd type="none" w="med" len="med"/>
+                      <a:tailEnd type="none" w="med" len="med"/>
+                    </a:lnR>
+                    <a:lnT w="12700" cap="flat" cmpd="sng" algn="ctr">
+                      <a:solidFill>
+                        <a:schemeClr val="tx1"/>
+                      </a:solidFill>
+                      <a:prstDash val="solid"/>
+                      <a:round/>
+                      <a:headEnd type="none" w="med" len="med"/>
+                      <a:tailEnd type="none" w="med" len="med"/>
+                    </a:lnT>
+                    <a:lnB w="12700" cap="flat" cmpd="sng" algn="ctr">
+                      <a:solidFill>
+                        <a:schemeClr val="tx1"/>
+                      </a:solidFill>
+                      <a:prstDash val="solid"/>
+                      <a:round/>
+                      <a:headEnd type="none" w="med" len="med"/>
+                      <a:tailEnd type="none" w="med" len="med"/>
+                    </a:lnB>
+                    <a:noFill/>
+                  </a:tcPr>
+                </a:tc>
+                <a:tc>
+                  <a:txBody>
+                    <a:bodyPr/>
+                    <a:lstStyle/>
+                    <a:p>
+                      <a:pPr latinLnBrk="1"/>
+                      <a:r>
+                        <a:rPr lang="en-US" altLang="zh-TW" sz="1800" b="0" i="0" kern="1200" dirty="0">
+                          <a:solidFill>
+                            <a:schemeClr val="dk1"/>
+                          </a:solidFill>
+                          <a:effectLst/>
+                          <a:latin typeface="+mn-lt"/>
+                          <a:ea typeface="+mn-ea"/>
+                          <a:cs typeface="+mn-cs"/>
+                        </a:rPr>
+                        <a:t>0.0002281916</a:t>
+                      </a:r>
+                    </a:p>
+                  </a:txBody>
+                  <a:tcPr>
+                    <a:lnL w="12700" cap="flat" cmpd="sng" algn="ctr">
+                      <a:solidFill>
+                        <a:schemeClr val="tx1"/>
+                      </a:solidFill>
+                      <a:prstDash val="solid"/>
+                      <a:round/>
+                      <a:headEnd type="none" w="med" len="med"/>
+                      <a:tailEnd type="none" w="med" len="med"/>
+                    </a:lnL>
+                    <a:lnR w="12700" cap="flat" cmpd="sng" algn="ctr">
+                      <a:solidFill>
+                        <a:schemeClr val="tx1"/>
+                      </a:solidFill>
+                      <a:prstDash val="solid"/>
+                      <a:round/>
+                      <a:headEnd type="none" w="med" len="med"/>
+                      <a:tailEnd type="none" w="med" len="med"/>
+                    </a:lnR>
+                    <a:lnT w="12700" cap="flat" cmpd="sng" algn="ctr">
+                      <a:solidFill>
+                        <a:schemeClr val="tx1"/>
+                      </a:solidFill>
+                      <a:prstDash val="solid"/>
+                      <a:round/>
+                      <a:headEnd type="none" w="med" len="med"/>
+                      <a:tailEnd type="none" w="med" len="med"/>
+                    </a:lnT>
+                    <a:lnB w="12700" cap="flat" cmpd="sng" algn="ctr">
+                      <a:solidFill>
+                        <a:schemeClr val="tx1"/>
+                      </a:solidFill>
+                      <a:prstDash val="solid"/>
+                      <a:round/>
+                      <a:headEnd type="none" w="med" len="med"/>
+                      <a:tailEnd type="none" w="med" len="med"/>
+                    </a:lnB>
+                    <a:noFill/>
+                  </a:tcPr>
+                </a:tc>
+                <a:extLst>
+                  <a:ext uri="{0D108BD9-81ED-4DB2-BD59-A6C34878D82A}">
+                    <a16:rowId xmlns:a16="http://schemas.microsoft.com/office/drawing/2014/main" val="3358222618"/>
+                  </a:ext>
+                </a:extLst>
+              </a:tr>
+              <a:tr h="323693">
+                <a:tc>
+                  <a:txBody>
+                    <a:bodyPr/>
+                    <a:lstStyle/>
+                    <a:p>
+                      <a:pPr marL="0" marR="0" lvl="0" indent="0" algn="l" defTabSz="914400" rtl="0" eaLnBrk="1" fontAlgn="auto" latinLnBrk="0" hangingPunct="1">
+                        <a:lnSpc>
+                          <a:spcPct val="100000"/>
+                        </a:lnSpc>
+                        <a:spcBef>
+                          <a:spcPts val="0"/>
+                        </a:spcBef>
+                        <a:spcAft>
+                          <a:spcPts val="0"/>
+                        </a:spcAft>
+                        <a:buClrTx/>
+                        <a:buSzTx/>
+                        <a:buFontTx/>
+                        <a:buNone/>
+                        <a:tabLst/>
+                        <a:defRPr/>
+                      </a:pPr>
+                      <a:r>
+                        <a:rPr lang="en-US" altLang="zh-TW" sz="1800" b="0" i="0" kern="1200" dirty="0">
+                          <a:solidFill>
+                            <a:schemeClr val="tx1"/>
+                          </a:solidFill>
+                          <a:effectLst/>
+                          <a:latin typeface="+mn-lt"/>
+                          <a:ea typeface="+mn-ea"/>
+                          <a:cs typeface="+mn-cs"/>
+                        </a:rPr>
+                        <a:t>Inverse function</a:t>
+                      </a:r>
+                    </a:p>
+                  </a:txBody>
+                  <a:tcPr>
+                    <a:lnL w="12700" cap="flat" cmpd="sng" algn="ctr">
+                      <a:solidFill>
+                        <a:schemeClr val="tx1"/>
+                      </a:solidFill>
+                      <a:prstDash val="solid"/>
+                      <a:round/>
+                      <a:headEnd type="none" w="med" len="med"/>
+                      <a:tailEnd type="none" w="med" len="med"/>
+                    </a:lnL>
+                    <a:lnR w="12700" cap="flat" cmpd="sng" algn="ctr">
+                      <a:solidFill>
+                        <a:schemeClr val="tx1"/>
+                      </a:solidFill>
+                      <a:prstDash val="solid"/>
+                      <a:round/>
+                      <a:headEnd type="none" w="med" len="med"/>
+                      <a:tailEnd type="none" w="med" len="med"/>
+                    </a:lnR>
+                    <a:lnT w="12700" cap="flat" cmpd="sng" algn="ctr">
+                      <a:solidFill>
+                        <a:schemeClr val="tx1"/>
+                      </a:solidFill>
+                      <a:prstDash val="solid"/>
+                      <a:round/>
+                      <a:headEnd type="none" w="med" len="med"/>
+                      <a:tailEnd type="none" w="med" len="med"/>
+                    </a:lnT>
+                    <a:lnB w="12700" cap="flat" cmpd="sng" algn="ctr">
+                      <a:solidFill>
+                        <a:schemeClr val="tx1"/>
+                      </a:solidFill>
+                      <a:prstDash val="solid"/>
+                      <a:round/>
+                      <a:headEnd type="none" w="med" len="med"/>
+                      <a:tailEnd type="none" w="med" len="med"/>
+                    </a:lnB>
+                    <a:noFill/>
+                  </a:tcPr>
+                </a:tc>
+                <a:tc>
+                  <a:txBody>
+                    <a:bodyPr/>
+                    <a:lstStyle/>
+                    <a:p>
+                      <a:pPr latinLnBrk="1"/>
+                      <a:r>
+                        <a:rPr lang="en-US" altLang="zh-TW" sz="1800" b="0" i="0" kern="1200" dirty="0">
+                          <a:solidFill>
+                            <a:schemeClr val="dk1"/>
+                          </a:solidFill>
+                          <a:effectLst/>
+                          <a:latin typeface="+mn-lt"/>
+                          <a:ea typeface="+mn-ea"/>
+                          <a:cs typeface="+mn-cs"/>
+                        </a:rPr>
+                        <a:t>0.666547</a:t>
+                      </a:r>
+                    </a:p>
+                  </a:txBody>
+                  <a:tcPr>
+                    <a:lnL w="12700" cap="flat" cmpd="sng" algn="ctr">
+                      <a:solidFill>
+                        <a:schemeClr val="tx1"/>
+                      </a:solidFill>
+                      <a:prstDash val="solid"/>
+                      <a:round/>
+                      <a:headEnd type="none" w="med" len="med"/>
+                      <a:tailEnd type="none" w="med" len="med"/>
+                    </a:lnL>
+                    <a:lnR w="12700" cap="flat" cmpd="sng" algn="ctr">
+                      <a:solidFill>
+                        <a:schemeClr val="tx1"/>
+                      </a:solidFill>
+                      <a:prstDash val="solid"/>
+                      <a:round/>
+                      <a:headEnd type="none" w="med" len="med"/>
+                      <a:tailEnd type="none" w="med" len="med"/>
+                    </a:lnR>
+                    <a:lnT w="12700" cap="flat" cmpd="sng" algn="ctr">
+                      <a:solidFill>
+                        <a:schemeClr val="tx1"/>
+                      </a:solidFill>
+                      <a:prstDash val="solid"/>
+                      <a:round/>
+                      <a:headEnd type="none" w="med" len="med"/>
+                      <a:tailEnd type="none" w="med" len="med"/>
+                    </a:lnT>
+                    <a:lnB w="12700" cap="flat" cmpd="sng" algn="ctr">
+                      <a:solidFill>
+                        <a:schemeClr val="tx1"/>
+                      </a:solidFill>
+                      <a:prstDash val="solid"/>
+                      <a:round/>
+                      <a:headEnd type="none" w="med" len="med"/>
+                      <a:tailEnd type="none" w="med" len="med"/>
+                    </a:lnB>
+                    <a:noFill/>
+                  </a:tcPr>
+                </a:tc>
+                <a:tc>
+                  <a:txBody>
+                    <a:bodyPr/>
+                    <a:lstStyle/>
+                    <a:p>
+                      <a:pPr latinLnBrk="1"/>
+                      <a:r>
+                        <a:rPr lang="en-US" altLang="zh-TW" sz="1800" b="0" i="0" kern="1200" dirty="0">
+                          <a:solidFill>
+                            <a:schemeClr val="dk1"/>
+                          </a:solidFill>
+                          <a:effectLst/>
+                          <a:latin typeface="+mn-lt"/>
+                          <a:ea typeface="+mn-ea"/>
+                          <a:cs typeface="+mn-cs"/>
+                        </a:rPr>
+                        <a:t>0.0002395794</a:t>
+                      </a:r>
+                    </a:p>
+                  </a:txBody>
+                  <a:tcPr>
+                    <a:lnL w="12700" cap="flat" cmpd="sng" algn="ctr">
+                      <a:solidFill>
+                        <a:schemeClr val="tx1"/>
+                      </a:solidFill>
+                      <a:prstDash val="solid"/>
+                      <a:round/>
+                      <a:headEnd type="none" w="med" len="med"/>
+                      <a:tailEnd type="none" w="med" len="med"/>
+                    </a:lnL>
+                    <a:lnR w="12700" cap="flat" cmpd="sng" algn="ctr">
+                      <a:solidFill>
+                        <a:schemeClr val="tx1"/>
+                      </a:solidFill>
+                      <a:prstDash val="solid"/>
+                      <a:round/>
+                      <a:headEnd type="none" w="med" len="med"/>
+                      <a:tailEnd type="none" w="med" len="med"/>
+                    </a:lnR>
+                    <a:lnT w="12700" cap="flat" cmpd="sng" algn="ctr">
+                      <a:solidFill>
+                        <a:schemeClr val="tx1"/>
+                      </a:solidFill>
+                      <a:prstDash val="solid"/>
+                      <a:round/>
+                      <a:headEnd type="none" w="med" len="med"/>
+                      <a:tailEnd type="none" w="med" len="med"/>
+                    </a:lnT>
+                    <a:lnB w="12700" cap="flat" cmpd="sng" algn="ctr">
+                      <a:solidFill>
+                        <a:schemeClr val="tx1"/>
+                      </a:solidFill>
+                      <a:prstDash val="solid"/>
+                      <a:round/>
+                      <a:headEnd type="none" w="med" len="med"/>
+                      <a:tailEnd type="none" w="med" len="med"/>
+                    </a:lnB>
+                    <a:noFill/>
+                  </a:tcPr>
+                </a:tc>
+                <a:extLst>
+                  <a:ext uri="{0D108BD9-81ED-4DB2-BD59-A6C34878D82A}">
+                    <a16:rowId xmlns:a16="http://schemas.microsoft.com/office/drawing/2014/main" val="2174095210"/>
+                  </a:ext>
+                </a:extLst>
+              </a:tr>
+              <a:tr h="558704">
+                <a:tc>
+                  <a:txBody>
+                    <a:bodyPr/>
+                    <a:lstStyle/>
+                    <a:p>
+                      <a:pPr marL="0" marR="0" lvl="0" indent="0" algn="l" defTabSz="914400" rtl="0" eaLnBrk="1" fontAlgn="auto" latinLnBrk="0" hangingPunct="1">
+                        <a:lnSpc>
+                          <a:spcPct val="100000"/>
+                        </a:lnSpc>
+                        <a:spcBef>
+                          <a:spcPts val="0"/>
+                        </a:spcBef>
+                        <a:spcAft>
+                          <a:spcPts val="0"/>
+                        </a:spcAft>
+                        <a:buClrTx/>
+                        <a:buSzTx/>
+                        <a:buFontTx/>
+                        <a:buNone/>
+                        <a:tabLst/>
+                        <a:defRPr/>
+                      </a:pPr>
+                      <a:r>
+                        <a:rPr lang="en-US" altLang="zh-TW" sz="1800" b="0" i="0" kern="1200" dirty="0">
+                          <a:solidFill>
+                            <a:schemeClr val="tx1"/>
+                          </a:solidFill>
+                          <a:effectLst/>
+                          <a:latin typeface="+mn-lt"/>
+                          <a:ea typeface="+mn-ea"/>
+                          <a:cs typeface="+mn-cs"/>
+                        </a:rPr>
+                        <a:t>Inverse function with controlling var</a:t>
+                      </a:r>
+                    </a:p>
+                  </a:txBody>
+                  <a:tcPr>
+                    <a:lnL w="12700" cap="flat" cmpd="sng" algn="ctr">
+                      <a:solidFill>
+                        <a:schemeClr val="tx1"/>
+                      </a:solidFill>
+                      <a:prstDash val="solid"/>
+                      <a:round/>
+                      <a:headEnd type="none" w="med" len="med"/>
+                      <a:tailEnd type="none" w="med" len="med"/>
+                    </a:lnL>
+                    <a:lnR w="12700" cap="flat" cmpd="sng" algn="ctr">
+                      <a:solidFill>
+                        <a:schemeClr val="tx1"/>
+                      </a:solidFill>
+                      <a:prstDash val="solid"/>
+                      <a:round/>
+                      <a:headEnd type="none" w="med" len="med"/>
+                      <a:tailEnd type="none" w="med" len="med"/>
+                    </a:lnR>
+                    <a:lnT w="12700" cap="flat" cmpd="sng" algn="ctr">
+                      <a:solidFill>
+                        <a:schemeClr val="tx1"/>
+                      </a:solidFill>
+                      <a:prstDash val="solid"/>
+                      <a:round/>
+                      <a:headEnd type="none" w="med" len="med"/>
+                      <a:tailEnd type="none" w="med" len="med"/>
+                    </a:lnT>
+                    <a:lnB w="12700" cap="flat" cmpd="sng" algn="ctr">
+                      <a:solidFill>
+                        <a:schemeClr val="tx1"/>
+                      </a:solidFill>
+                      <a:prstDash val="solid"/>
+                      <a:round/>
+                      <a:headEnd type="none" w="med" len="med"/>
+                      <a:tailEnd type="none" w="med" len="med"/>
+                    </a:lnB>
+                    <a:noFill/>
+                  </a:tcPr>
+                </a:tc>
+                <a:tc>
+                  <a:txBody>
+                    <a:bodyPr/>
+                    <a:lstStyle/>
+                    <a:p>
+                      <a:pPr latinLnBrk="1"/>
+                      <a:r>
+                        <a:rPr lang="en-US" altLang="zh-TW" sz="1800" b="0" i="0" kern="1200" dirty="0">
+                          <a:solidFill>
+                            <a:schemeClr val="dk1"/>
+                          </a:solidFill>
+                          <a:effectLst/>
+                          <a:latin typeface="+mn-lt"/>
+                          <a:ea typeface="+mn-ea"/>
+                          <a:cs typeface="+mn-cs"/>
+                        </a:rPr>
+                        <a:t>0.667157</a:t>
+                      </a:r>
+                    </a:p>
+                    <a:p>
+                      <a:endParaRPr lang="zh-TW" altLang="en-US" sz="1800" dirty="0">
+                        <a:solidFill>
+                          <a:schemeClr val="tx1"/>
+                        </a:solidFill>
+                      </a:endParaRPr>
+                    </a:p>
+                  </a:txBody>
+                  <a:tcPr>
+                    <a:lnL w="12700" cap="flat" cmpd="sng" algn="ctr">
+                      <a:solidFill>
+                        <a:schemeClr val="tx1"/>
+                      </a:solidFill>
+                      <a:prstDash val="solid"/>
+                      <a:round/>
+                      <a:headEnd type="none" w="med" len="med"/>
+                      <a:tailEnd type="none" w="med" len="med"/>
+                    </a:lnL>
+                    <a:lnR w="12700" cap="flat" cmpd="sng" algn="ctr">
+                      <a:solidFill>
+                        <a:schemeClr val="tx1"/>
+                      </a:solidFill>
+                      <a:prstDash val="solid"/>
+                      <a:round/>
+                      <a:headEnd type="none" w="med" len="med"/>
+                      <a:tailEnd type="none" w="med" len="med"/>
+                    </a:lnR>
+                    <a:lnT w="12700" cap="flat" cmpd="sng" algn="ctr">
+                      <a:solidFill>
+                        <a:schemeClr val="tx1"/>
+                      </a:solidFill>
+                      <a:prstDash val="solid"/>
+                      <a:round/>
+                      <a:headEnd type="none" w="med" len="med"/>
+                      <a:tailEnd type="none" w="med" len="med"/>
+                    </a:lnT>
+                    <a:lnB w="12700" cap="flat" cmpd="sng" algn="ctr">
+                      <a:solidFill>
+                        <a:schemeClr val="tx1"/>
+                      </a:solidFill>
+                      <a:prstDash val="solid"/>
+                      <a:round/>
+                      <a:headEnd type="none" w="med" len="med"/>
+                      <a:tailEnd type="none" w="med" len="med"/>
+                    </a:lnB>
+                    <a:noFill/>
+                  </a:tcPr>
+                </a:tc>
+                <a:tc>
+                  <a:txBody>
+                    <a:bodyPr/>
+                    <a:lstStyle/>
+                    <a:p>
+                      <a:pPr latinLnBrk="1"/>
+                      <a:r>
+                        <a:rPr lang="en-US" altLang="zh-TW" sz="1800" b="0" i="0" kern="1200" dirty="0">
+                          <a:solidFill>
+                            <a:schemeClr val="dk1"/>
+                          </a:solidFill>
+                          <a:effectLst/>
+                          <a:latin typeface="+mn-lt"/>
+                          <a:ea typeface="+mn-ea"/>
+                          <a:cs typeface="+mn-cs"/>
+                        </a:rPr>
+                        <a:t>0.0001117501</a:t>
+                      </a:r>
+                    </a:p>
+                    <a:p>
+                      <a:endParaRPr lang="zh-TW" altLang="en-US" sz="1800" dirty="0">
+                        <a:solidFill>
+                          <a:schemeClr val="tx1"/>
+                        </a:solidFill>
+                      </a:endParaRPr>
+                    </a:p>
+                  </a:txBody>
+                  <a:tcPr>
+                    <a:lnL w="12700" cap="flat" cmpd="sng" algn="ctr">
+                      <a:solidFill>
+                        <a:schemeClr val="tx1"/>
+                      </a:solidFill>
+                      <a:prstDash val="solid"/>
+                      <a:round/>
+                      <a:headEnd type="none" w="med" len="med"/>
+                      <a:tailEnd type="none" w="med" len="med"/>
+                    </a:lnL>
+                    <a:lnR w="12700" cap="flat" cmpd="sng" algn="ctr">
+                      <a:solidFill>
+                        <a:schemeClr val="tx1"/>
+                      </a:solidFill>
+                      <a:prstDash val="solid"/>
+                      <a:round/>
+                      <a:headEnd type="none" w="med" len="med"/>
+                      <a:tailEnd type="none" w="med" len="med"/>
+                    </a:lnR>
+                    <a:lnT w="12700" cap="flat" cmpd="sng" algn="ctr">
+                      <a:solidFill>
+                        <a:schemeClr val="tx1"/>
+                      </a:solidFill>
+                      <a:prstDash val="solid"/>
+                      <a:round/>
+                      <a:headEnd type="none" w="med" len="med"/>
+                      <a:tailEnd type="none" w="med" len="med"/>
+                    </a:lnT>
+                    <a:lnB w="12700" cap="flat" cmpd="sng" algn="ctr">
+                      <a:solidFill>
+                        <a:schemeClr val="tx1"/>
+                      </a:solidFill>
+                      <a:prstDash val="solid"/>
+                      <a:round/>
+                      <a:headEnd type="none" w="med" len="med"/>
+                      <a:tailEnd type="none" w="med" len="med"/>
+                    </a:lnB>
+                    <a:noFill/>
+                  </a:tcPr>
+                </a:tc>
+                <a:extLst>
+                  <a:ext uri="{0D108BD9-81ED-4DB2-BD59-A6C34878D82A}">
+                    <a16:rowId xmlns:a16="http://schemas.microsoft.com/office/drawing/2014/main" val="3067584152"/>
+                  </a:ext>
+                </a:extLst>
+              </a:tr>
+            </a:tbl>
+          </a:graphicData>
+        </a:graphic>
+      </p:graphicFrame>
+      <p:sp>
+        <p:nvSpPr>
+          <p:cNvPr id="9" name="文字方塊 8">
+            <a:extLst>
+              <a:ext uri="{FF2B5EF4-FFF2-40B4-BE49-F238E27FC236}">
+                <a16:creationId xmlns:a16="http://schemas.microsoft.com/office/drawing/2014/main" id="{9F62C18D-4D45-A946-7FC7-EEC004040125}"/>
+              </a:ext>
+            </a:extLst>
+          </p:cNvPr>
+          <p:cNvSpPr txBox="1"/>
+          <p:nvPr/>
+        </p:nvSpPr>
+        <p:spPr>
+          <a:xfrm>
+            <a:off x="7456349" y="4957229"/>
+            <a:ext cx="4538564" cy="461665"/>
+          </a:xfrm>
+          <a:prstGeom prst="rect">
+            <a:avLst/>
+          </a:prstGeom>
+          <a:noFill/>
+        </p:spPr>
+        <p:txBody>
+          <a:bodyPr wrap="square" rtlCol="0">
+            <a:spAutoFit/>
+          </a:bodyPr>
+          <a:lstStyle/>
+          <a:p>
+            <a:r>
+              <a:rPr lang="en-US" altLang="zh-TW" sz="2400" dirty="0"/>
+              <a:t>Variance reduction = 47.47977%</a:t>
+            </a:r>
+          </a:p>
+        </p:txBody>
+      </p:sp>
+    </p:spTree>
+    <p:extLst>
+      <p:ext uri="{BB962C8B-B14F-4D97-AF65-F5344CB8AC3E}">
+        <p14:creationId xmlns:p14="http://schemas.microsoft.com/office/powerpoint/2010/main" val="972903551"/>
       </p:ext>
     </p:extLst>
   </p:cSld>

--- a/R/presentation/統計計算.pptx
+++ b/R/presentation/統計計算.pptx
@@ -18,6 +18,8 @@
     <p:sldId id="269" r:id="rId12"/>
     <p:sldId id="270" r:id="rId13"/>
     <p:sldId id="271" r:id="rId14"/>
+    <p:sldId id="272" r:id="rId15"/>
+    <p:sldId id="273" r:id="rId16"/>
   </p:sldIdLst>
   <p:sldSz cx="12192000" cy="6858000"/>
   <p:notesSz cx="6858000" cy="9144000"/>
@@ -116,6 +118,11 @@
       </a:defRPr>
     </a:lvl9pPr>
   </p:defaultTextStyle>
+  <p:extLst>
+    <p:ext uri="{EFAFB233-063F-42B5-8137-9DF3F51BA10A}">
+      <p15:sldGuideLst xmlns:p15="http://schemas.microsoft.com/office/powerpoint/2012/main"/>
+    </p:ext>
+  </p:extLst>
 </p:presentation>
 </file>
 
@@ -266,7 +273,7 @@
           <a:p>
             <a:fld id="{11AEC7CD-0132-46A9-805B-E798C8C14E80}" type="datetimeFigureOut">
               <a:rPr lang="zh-TW" altLang="en-US" smtClean="0"/>
-              <a:t>2026/5/11</a:t>
+              <a:t>2026/5/12</a:t>
             </a:fld>
             <a:endParaRPr lang="zh-TW" altLang="en-US"/>
           </a:p>
@@ -464,7 +471,7 @@
           <a:p>
             <a:fld id="{11AEC7CD-0132-46A9-805B-E798C8C14E80}" type="datetimeFigureOut">
               <a:rPr lang="zh-TW" altLang="en-US" smtClean="0"/>
-              <a:t>2026/5/11</a:t>
+              <a:t>2026/5/12</a:t>
             </a:fld>
             <a:endParaRPr lang="zh-TW" altLang="en-US"/>
           </a:p>
@@ -672,7 +679,7 @@
           <a:p>
             <a:fld id="{11AEC7CD-0132-46A9-805B-E798C8C14E80}" type="datetimeFigureOut">
               <a:rPr lang="zh-TW" altLang="en-US" smtClean="0"/>
-              <a:t>2026/5/11</a:t>
+              <a:t>2026/5/12</a:t>
             </a:fld>
             <a:endParaRPr lang="zh-TW" altLang="en-US"/>
           </a:p>
@@ -870,7 +877,7 @@
           <a:p>
             <a:fld id="{11AEC7CD-0132-46A9-805B-E798C8C14E80}" type="datetimeFigureOut">
               <a:rPr lang="zh-TW" altLang="en-US" smtClean="0"/>
-              <a:t>2026/5/11</a:t>
+              <a:t>2026/5/12</a:t>
             </a:fld>
             <a:endParaRPr lang="zh-TW" altLang="en-US"/>
           </a:p>
@@ -1145,7 +1152,7 @@
           <a:p>
             <a:fld id="{11AEC7CD-0132-46A9-805B-E798C8C14E80}" type="datetimeFigureOut">
               <a:rPr lang="zh-TW" altLang="en-US" smtClean="0"/>
-              <a:t>2026/5/11</a:t>
+              <a:t>2026/5/12</a:t>
             </a:fld>
             <a:endParaRPr lang="zh-TW" altLang="en-US"/>
           </a:p>
@@ -1410,7 +1417,7 @@
           <a:p>
             <a:fld id="{11AEC7CD-0132-46A9-805B-E798C8C14E80}" type="datetimeFigureOut">
               <a:rPr lang="zh-TW" altLang="en-US" smtClean="0"/>
-              <a:t>2026/5/11</a:t>
+              <a:t>2026/5/12</a:t>
             </a:fld>
             <a:endParaRPr lang="zh-TW" altLang="en-US"/>
           </a:p>
@@ -1822,7 +1829,7 @@
           <a:p>
             <a:fld id="{11AEC7CD-0132-46A9-805B-E798C8C14E80}" type="datetimeFigureOut">
               <a:rPr lang="zh-TW" altLang="en-US" smtClean="0"/>
-              <a:t>2026/5/11</a:t>
+              <a:t>2026/5/12</a:t>
             </a:fld>
             <a:endParaRPr lang="zh-TW" altLang="en-US"/>
           </a:p>
@@ -1963,7 +1970,7 @@
           <a:p>
             <a:fld id="{11AEC7CD-0132-46A9-805B-E798C8C14E80}" type="datetimeFigureOut">
               <a:rPr lang="zh-TW" altLang="en-US" smtClean="0"/>
-              <a:t>2026/5/11</a:t>
+              <a:t>2026/5/12</a:t>
             </a:fld>
             <a:endParaRPr lang="zh-TW" altLang="en-US"/>
           </a:p>
@@ -2076,7 +2083,7 @@
           <a:p>
             <a:fld id="{11AEC7CD-0132-46A9-805B-E798C8C14E80}" type="datetimeFigureOut">
               <a:rPr lang="zh-TW" altLang="en-US" smtClean="0"/>
-              <a:t>2026/5/11</a:t>
+              <a:t>2026/5/12</a:t>
             </a:fld>
             <a:endParaRPr lang="zh-TW" altLang="en-US"/>
           </a:p>
@@ -2387,7 +2394,7 @@
           <a:p>
             <a:fld id="{11AEC7CD-0132-46A9-805B-E798C8C14E80}" type="datetimeFigureOut">
               <a:rPr lang="zh-TW" altLang="en-US" smtClean="0"/>
-              <a:t>2026/5/11</a:t>
+              <a:t>2026/5/12</a:t>
             </a:fld>
             <a:endParaRPr lang="zh-TW" altLang="en-US"/>
           </a:p>
@@ -2675,7 +2682,7 @@
           <a:p>
             <a:fld id="{11AEC7CD-0132-46A9-805B-E798C8C14E80}" type="datetimeFigureOut">
               <a:rPr lang="zh-TW" altLang="en-US" smtClean="0"/>
-              <a:t>2026/5/11</a:t>
+              <a:t>2026/5/12</a:t>
             </a:fld>
             <a:endParaRPr lang="zh-TW" altLang="en-US"/>
           </a:p>
@@ -2916,7 +2923,7 @@
           <a:p>
             <a:fld id="{11AEC7CD-0132-46A9-805B-E798C8C14E80}" type="datetimeFigureOut">
               <a:rPr lang="zh-TW" altLang="en-US" smtClean="0"/>
-              <a:t>2026/5/11</a:t>
+              <a:t>2026/5/12</a:t>
             </a:fld>
             <a:endParaRPr lang="zh-TW" altLang="en-US"/>
           </a:p>
@@ -6238,6 +6245,842 @@
     <p:extLst>
       <p:ext uri="{BB962C8B-B14F-4D97-AF65-F5344CB8AC3E}">
         <p14:creationId xmlns:p14="http://schemas.microsoft.com/office/powerpoint/2010/main" val="2297189252"/>
+      </p:ext>
+    </p:extLst>
+  </p:cSld>
+  <p:clrMapOvr>
+    <a:masterClrMapping/>
+  </p:clrMapOvr>
+</p:sld>
+</file>
+
+<file path=ppt/slides/slide14.xml><?xml version="1.0" encoding="utf-8"?>
+<p:sld xmlns:a="http://schemas.openxmlformats.org/drawingml/2006/main" xmlns:r="http://schemas.openxmlformats.org/officeDocument/2006/relationships" xmlns:p="http://schemas.openxmlformats.org/presentationml/2006/main">
+  <p:cSld>
+    <p:spTree>
+      <p:nvGrpSpPr>
+        <p:cNvPr id="1" name=""/>
+        <p:cNvGrpSpPr/>
+        <p:nvPr/>
+      </p:nvGrpSpPr>
+      <p:grpSpPr>
+        <a:xfrm>
+          <a:off x="0" y="0"/>
+          <a:ext cx="0" cy="0"/>
+          <a:chOff x="0" y="0"/>
+          <a:chExt cx="0" cy="0"/>
+        </a:xfrm>
+      </p:grpSpPr>
+      <p:sp>
+        <p:nvSpPr>
+          <p:cNvPr id="2" name="標題 1">
+            <a:extLst>
+              <a:ext uri="{FF2B5EF4-FFF2-40B4-BE49-F238E27FC236}">
+                <a16:creationId xmlns:a16="http://schemas.microsoft.com/office/drawing/2014/main" id="{56A0DD20-2ADD-EC2A-0692-B35AB134D434}"/>
+              </a:ext>
+            </a:extLst>
+          </p:cNvPr>
+          <p:cNvSpPr>
+            <a:spLocks noGrp="1"/>
+          </p:cNvSpPr>
+          <p:nvPr>
+            <p:ph type="title"/>
+          </p:nvPr>
+        </p:nvSpPr>
+        <p:spPr/>
+        <p:txBody>
+          <a:bodyPr/>
+          <a:lstStyle/>
+          <a:p>
+            <a:r>
+              <a:rPr lang="zh-TW" altLang="en-US" dirty="0"/>
+              <a:t>樹狀圖</a:t>
+            </a:r>
+          </a:p>
+        </p:txBody>
+      </p:sp>
+      <p:sp>
+        <p:nvSpPr>
+          <p:cNvPr id="4" name="箭號: 向右 3">
+            <a:extLst>
+              <a:ext uri="{FF2B5EF4-FFF2-40B4-BE49-F238E27FC236}">
+                <a16:creationId xmlns:a16="http://schemas.microsoft.com/office/drawing/2014/main" id="{6939BA04-CB6D-245C-8234-644B782576C0}"/>
+              </a:ext>
+            </a:extLst>
+          </p:cNvPr>
+          <p:cNvSpPr/>
+          <p:nvPr/>
+        </p:nvSpPr>
+        <p:spPr>
+          <a:xfrm rot="19599261">
+            <a:off x="4057998" y="2503038"/>
+            <a:ext cx="1173949" cy="236712"/>
+          </a:xfrm>
+          <a:prstGeom prst="rightArrow">
+            <a:avLst/>
+          </a:prstGeom>
+          <a:ln>
+            <a:noFill/>
+          </a:ln>
+        </p:spPr>
+        <p:style>
+          <a:lnRef idx="2">
+            <a:schemeClr val="accent1">
+              <a:shade val="15000"/>
+            </a:schemeClr>
+          </a:lnRef>
+          <a:fillRef idx="1">
+            <a:schemeClr val="accent1"/>
+          </a:fillRef>
+          <a:effectRef idx="0">
+            <a:schemeClr val="accent1"/>
+          </a:effectRef>
+          <a:fontRef idx="minor">
+            <a:schemeClr val="lt1"/>
+          </a:fontRef>
+        </p:style>
+        <p:txBody>
+          <a:bodyPr rtlCol="0" anchor="ctr"/>
+          <a:lstStyle/>
+          <a:p>
+            <a:pPr algn="ctr"/>
+            <a:endParaRPr lang="zh-TW" altLang="en-US"/>
+          </a:p>
+        </p:txBody>
+      </p:sp>
+      <p:sp>
+        <p:nvSpPr>
+          <p:cNvPr id="5" name="箭號: 向右 4">
+            <a:extLst>
+              <a:ext uri="{FF2B5EF4-FFF2-40B4-BE49-F238E27FC236}">
+                <a16:creationId xmlns:a16="http://schemas.microsoft.com/office/drawing/2014/main" id="{84ED3043-9630-1085-C82E-F02E58A71C39}"/>
+              </a:ext>
+            </a:extLst>
+          </p:cNvPr>
+          <p:cNvSpPr/>
+          <p:nvPr/>
+        </p:nvSpPr>
+        <p:spPr>
+          <a:xfrm rot="1450683">
+            <a:off x="4025061" y="4423800"/>
+            <a:ext cx="1173949" cy="258094"/>
+          </a:xfrm>
+          <a:prstGeom prst="rightArrow">
+            <a:avLst/>
+          </a:prstGeom>
+          <a:ln>
+            <a:noFill/>
+          </a:ln>
+        </p:spPr>
+        <p:style>
+          <a:lnRef idx="2">
+            <a:schemeClr val="accent1">
+              <a:shade val="15000"/>
+            </a:schemeClr>
+          </a:lnRef>
+          <a:fillRef idx="1">
+            <a:schemeClr val="accent1"/>
+          </a:fillRef>
+          <a:effectRef idx="0">
+            <a:schemeClr val="accent1"/>
+          </a:effectRef>
+          <a:fontRef idx="minor">
+            <a:schemeClr val="lt1"/>
+          </a:fontRef>
+        </p:style>
+        <p:txBody>
+          <a:bodyPr rtlCol="0" anchor="ctr"/>
+          <a:lstStyle/>
+          <a:p>
+            <a:pPr algn="ctr"/>
+            <a:endParaRPr lang="zh-TW" altLang="en-US"/>
+          </a:p>
+        </p:txBody>
+      </p:sp>
+      <p:sp>
+        <p:nvSpPr>
+          <p:cNvPr id="6" name="箭號: 向右 5">
+            <a:extLst>
+              <a:ext uri="{FF2B5EF4-FFF2-40B4-BE49-F238E27FC236}">
+                <a16:creationId xmlns:a16="http://schemas.microsoft.com/office/drawing/2014/main" id="{C40B2B22-740C-827B-93AE-5AF759499A08}"/>
+              </a:ext>
+            </a:extLst>
+          </p:cNvPr>
+          <p:cNvSpPr/>
+          <p:nvPr/>
+        </p:nvSpPr>
+        <p:spPr>
+          <a:xfrm rot="19599551">
+            <a:off x="6380068" y="1171894"/>
+            <a:ext cx="1173949" cy="205251"/>
+          </a:xfrm>
+          <a:prstGeom prst="rightArrow">
+            <a:avLst/>
+          </a:prstGeom>
+          <a:ln>
+            <a:noFill/>
+          </a:ln>
+        </p:spPr>
+        <p:style>
+          <a:lnRef idx="2">
+            <a:schemeClr val="accent1">
+              <a:shade val="15000"/>
+            </a:schemeClr>
+          </a:lnRef>
+          <a:fillRef idx="1">
+            <a:schemeClr val="accent1"/>
+          </a:fillRef>
+          <a:effectRef idx="0">
+            <a:schemeClr val="accent1"/>
+          </a:effectRef>
+          <a:fontRef idx="minor">
+            <a:schemeClr val="lt1"/>
+          </a:fontRef>
+        </p:style>
+        <p:txBody>
+          <a:bodyPr rtlCol="0" anchor="ctr"/>
+          <a:lstStyle/>
+          <a:p>
+            <a:pPr algn="ctr"/>
+            <a:endParaRPr lang="zh-TW" altLang="en-US"/>
+          </a:p>
+        </p:txBody>
+      </p:sp>
+      <p:sp>
+        <p:nvSpPr>
+          <p:cNvPr id="7" name="箭號: 向右 6">
+            <a:extLst>
+              <a:ext uri="{FF2B5EF4-FFF2-40B4-BE49-F238E27FC236}">
+                <a16:creationId xmlns:a16="http://schemas.microsoft.com/office/drawing/2014/main" id="{0E7B9993-EEEC-026D-CC0F-C3A2F0CA1EA1}"/>
+              </a:ext>
+            </a:extLst>
+          </p:cNvPr>
+          <p:cNvSpPr/>
+          <p:nvPr/>
+        </p:nvSpPr>
+        <p:spPr>
+          <a:xfrm rot="1448578">
+            <a:off x="6411991" y="2742778"/>
+            <a:ext cx="1173949" cy="210584"/>
+          </a:xfrm>
+          <a:prstGeom prst="rightArrow">
+            <a:avLst/>
+          </a:prstGeom>
+          <a:ln>
+            <a:noFill/>
+          </a:ln>
+        </p:spPr>
+        <p:style>
+          <a:lnRef idx="2">
+            <a:schemeClr val="accent1">
+              <a:shade val="15000"/>
+            </a:schemeClr>
+          </a:lnRef>
+          <a:fillRef idx="1">
+            <a:schemeClr val="accent1"/>
+          </a:fillRef>
+          <a:effectRef idx="0">
+            <a:schemeClr val="accent1"/>
+          </a:effectRef>
+          <a:fontRef idx="minor">
+            <a:schemeClr val="lt1"/>
+          </a:fontRef>
+        </p:style>
+        <p:txBody>
+          <a:bodyPr rtlCol="0" anchor="ctr"/>
+          <a:lstStyle/>
+          <a:p>
+            <a:pPr algn="ctr"/>
+            <a:endParaRPr lang="zh-TW" altLang="en-US"/>
+          </a:p>
+        </p:txBody>
+      </p:sp>
+      <p:sp>
+        <p:nvSpPr>
+          <p:cNvPr id="12" name="文字方塊 11">
+            <a:extLst>
+              <a:ext uri="{FF2B5EF4-FFF2-40B4-BE49-F238E27FC236}">
+                <a16:creationId xmlns:a16="http://schemas.microsoft.com/office/drawing/2014/main" id="{702BC395-95C1-DAD6-859E-7F4F46197EA8}"/>
+              </a:ext>
+            </a:extLst>
+          </p:cNvPr>
+          <p:cNvSpPr txBox="1"/>
+          <p:nvPr/>
+        </p:nvSpPr>
+        <p:spPr>
+          <a:xfrm>
+            <a:off x="5408666" y="1964188"/>
+            <a:ext cx="687334" cy="369332"/>
+          </a:xfrm>
+          <a:prstGeom prst="rect">
+            <a:avLst/>
+          </a:prstGeom>
+          <a:noFill/>
+        </p:spPr>
+        <p:txBody>
+          <a:bodyPr wrap="square" rtlCol="0">
+            <a:spAutoFit/>
+          </a:bodyPr>
+          <a:lstStyle/>
+          <a:p>
+            <a:r>
+              <a:rPr lang="en-US" altLang="zh-TW" dirty="0"/>
+              <a:t>Goat </a:t>
+            </a:r>
+            <a:endParaRPr lang="zh-TW" altLang="en-US" dirty="0"/>
+          </a:p>
+        </p:txBody>
+      </p:sp>
+      <p:sp>
+        <p:nvSpPr>
+          <p:cNvPr id="13" name="文字方塊 12">
+            <a:extLst>
+              <a:ext uri="{FF2B5EF4-FFF2-40B4-BE49-F238E27FC236}">
+                <a16:creationId xmlns:a16="http://schemas.microsoft.com/office/drawing/2014/main" id="{C964E82C-BE5A-C7B6-E797-949A14E60671}"/>
+              </a:ext>
+            </a:extLst>
+          </p:cNvPr>
+          <p:cNvSpPr txBox="1"/>
+          <p:nvPr/>
+        </p:nvSpPr>
+        <p:spPr>
+          <a:xfrm>
+            <a:off x="5569213" y="4862447"/>
+            <a:ext cx="687334" cy="369332"/>
+          </a:xfrm>
+          <a:prstGeom prst="rect">
+            <a:avLst/>
+          </a:prstGeom>
+          <a:noFill/>
+        </p:spPr>
+        <p:txBody>
+          <a:bodyPr wrap="square" rtlCol="0">
+            <a:spAutoFit/>
+          </a:bodyPr>
+          <a:lstStyle/>
+          <a:p>
+            <a:r>
+              <a:rPr lang="en-US" altLang="zh-TW" dirty="0"/>
+              <a:t>Car  </a:t>
+            </a:r>
+            <a:endParaRPr lang="zh-TW" altLang="en-US" dirty="0"/>
+          </a:p>
+        </p:txBody>
+      </p:sp>
+      <p:sp>
+        <p:nvSpPr>
+          <p:cNvPr id="16" name="箭號: 向右 15">
+            <a:extLst>
+              <a:ext uri="{FF2B5EF4-FFF2-40B4-BE49-F238E27FC236}">
+                <a16:creationId xmlns:a16="http://schemas.microsoft.com/office/drawing/2014/main" id="{E325F4A2-70E9-7248-C026-B7C959EDC59B}"/>
+              </a:ext>
+            </a:extLst>
+          </p:cNvPr>
+          <p:cNvSpPr/>
+          <p:nvPr/>
+        </p:nvSpPr>
+        <p:spPr>
+          <a:xfrm rot="19599551">
+            <a:off x="6404654" y="4311173"/>
+            <a:ext cx="1173949" cy="205251"/>
+          </a:xfrm>
+          <a:prstGeom prst="rightArrow">
+            <a:avLst/>
+          </a:prstGeom>
+          <a:ln>
+            <a:noFill/>
+          </a:ln>
+        </p:spPr>
+        <p:style>
+          <a:lnRef idx="2">
+            <a:schemeClr val="accent1">
+              <a:shade val="15000"/>
+            </a:schemeClr>
+          </a:lnRef>
+          <a:fillRef idx="1">
+            <a:schemeClr val="accent1"/>
+          </a:fillRef>
+          <a:effectRef idx="0">
+            <a:schemeClr val="accent1"/>
+          </a:effectRef>
+          <a:fontRef idx="minor">
+            <a:schemeClr val="lt1"/>
+          </a:fontRef>
+        </p:style>
+        <p:txBody>
+          <a:bodyPr rtlCol="0" anchor="ctr"/>
+          <a:lstStyle/>
+          <a:p>
+            <a:pPr algn="ctr"/>
+            <a:endParaRPr lang="zh-TW" altLang="en-US"/>
+          </a:p>
+        </p:txBody>
+      </p:sp>
+      <p:sp>
+        <p:nvSpPr>
+          <p:cNvPr id="17" name="箭號: 向右 16">
+            <a:extLst>
+              <a:ext uri="{FF2B5EF4-FFF2-40B4-BE49-F238E27FC236}">
+                <a16:creationId xmlns:a16="http://schemas.microsoft.com/office/drawing/2014/main" id="{3F650353-574C-BA18-034B-BFFF41ED1083}"/>
+              </a:ext>
+            </a:extLst>
+          </p:cNvPr>
+          <p:cNvSpPr/>
+          <p:nvPr/>
+        </p:nvSpPr>
+        <p:spPr>
+          <a:xfrm rot="1448578">
+            <a:off x="6411991" y="5648854"/>
+            <a:ext cx="1173949" cy="210584"/>
+          </a:xfrm>
+          <a:prstGeom prst="rightArrow">
+            <a:avLst/>
+          </a:prstGeom>
+          <a:ln>
+            <a:noFill/>
+          </a:ln>
+        </p:spPr>
+        <p:style>
+          <a:lnRef idx="2">
+            <a:schemeClr val="accent1">
+              <a:shade val="15000"/>
+            </a:schemeClr>
+          </a:lnRef>
+          <a:fillRef idx="1">
+            <a:schemeClr val="accent1"/>
+          </a:fillRef>
+          <a:effectRef idx="0">
+            <a:schemeClr val="accent1"/>
+          </a:effectRef>
+          <a:fontRef idx="minor">
+            <a:schemeClr val="lt1"/>
+          </a:fontRef>
+        </p:style>
+        <p:txBody>
+          <a:bodyPr rtlCol="0" anchor="ctr"/>
+          <a:lstStyle/>
+          <a:p>
+            <a:pPr algn="ctr"/>
+            <a:endParaRPr lang="zh-TW" altLang="en-US"/>
+          </a:p>
+        </p:txBody>
+      </p:sp>
+      <p:sp>
+        <p:nvSpPr>
+          <p:cNvPr id="20" name="文字方塊 19">
+            <a:extLst>
+              <a:ext uri="{FF2B5EF4-FFF2-40B4-BE49-F238E27FC236}">
+                <a16:creationId xmlns:a16="http://schemas.microsoft.com/office/drawing/2014/main" id="{DBDD7CBF-3130-1960-9836-2793362E864B}"/>
+              </a:ext>
+            </a:extLst>
+          </p:cNvPr>
+          <p:cNvSpPr txBox="1"/>
+          <p:nvPr/>
+        </p:nvSpPr>
+        <p:spPr>
+          <a:xfrm>
+            <a:off x="2965150" y="3369669"/>
+            <a:ext cx="974747" cy="369332"/>
+          </a:xfrm>
+          <a:prstGeom prst="rect">
+            <a:avLst/>
+          </a:prstGeom>
+          <a:noFill/>
+        </p:spPr>
+        <p:txBody>
+          <a:bodyPr wrap="square" rtlCol="0">
+            <a:spAutoFit/>
+          </a:bodyPr>
+          <a:lstStyle/>
+          <a:p>
+            <a:r>
+              <a:rPr lang="en-US" altLang="zh-TW" dirty="0"/>
+              <a:t>Choice </a:t>
+            </a:r>
+            <a:endParaRPr lang="zh-TW" altLang="en-US" dirty="0"/>
+          </a:p>
+        </p:txBody>
+      </p:sp>
+      <p:sp>
+        <p:nvSpPr>
+          <p:cNvPr id="21" name="文字方塊 20">
+            <a:extLst>
+              <a:ext uri="{FF2B5EF4-FFF2-40B4-BE49-F238E27FC236}">
+                <a16:creationId xmlns:a16="http://schemas.microsoft.com/office/drawing/2014/main" id="{55B9A18E-D40D-6DFF-2309-D75DB43D8244}"/>
+              </a:ext>
+            </a:extLst>
+          </p:cNvPr>
+          <p:cNvSpPr txBox="1"/>
+          <p:nvPr/>
+        </p:nvSpPr>
+        <p:spPr>
+          <a:xfrm>
+            <a:off x="7917640" y="681506"/>
+            <a:ext cx="687334" cy="369332"/>
+          </a:xfrm>
+          <a:prstGeom prst="rect">
+            <a:avLst/>
+          </a:prstGeom>
+          <a:noFill/>
+        </p:spPr>
+        <p:txBody>
+          <a:bodyPr wrap="square" rtlCol="0">
+            <a:spAutoFit/>
+          </a:bodyPr>
+          <a:lstStyle/>
+          <a:p>
+            <a:r>
+              <a:rPr lang="en-US" altLang="zh-TW" dirty="0"/>
+              <a:t>Car  </a:t>
+            </a:r>
+            <a:endParaRPr lang="zh-TW" altLang="en-US" dirty="0"/>
+          </a:p>
+        </p:txBody>
+      </p:sp>
+      <p:sp>
+        <p:nvSpPr>
+          <p:cNvPr id="22" name="文字方塊 21">
+            <a:extLst>
+              <a:ext uri="{FF2B5EF4-FFF2-40B4-BE49-F238E27FC236}">
+                <a16:creationId xmlns:a16="http://schemas.microsoft.com/office/drawing/2014/main" id="{EC55DC75-4396-B20A-1A5E-393707DB341B}"/>
+              </a:ext>
+            </a:extLst>
+          </p:cNvPr>
+          <p:cNvSpPr txBox="1"/>
+          <p:nvPr/>
+        </p:nvSpPr>
+        <p:spPr>
+          <a:xfrm>
+            <a:off x="7924799" y="2885759"/>
+            <a:ext cx="687334" cy="369332"/>
+          </a:xfrm>
+          <a:prstGeom prst="rect">
+            <a:avLst/>
+          </a:prstGeom>
+          <a:noFill/>
+        </p:spPr>
+        <p:txBody>
+          <a:bodyPr wrap="square" rtlCol="0">
+            <a:spAutoFit/>
+          </a:bodyPr>
+          <a:lstStyle/>
+          <a:p>
+            <a:r>
+              <a:rPr lang="en-US" altLang="zh-TW" dirty="0"/>
+              <a:t>Goat  </a:t>
+            </a:r>
+            <a:endParaRPr lang="zh-TW" altLang="en-US" dirty="0"/>
+          </a:p>
+        </p:txBody>
+      </p:sp>
+      <p:sp>
+        <p:nvSpPr>
+          <p:cNvPr id="23" name="文字方塊 22">
+            <a:extLst>
+              <a:ext uri="{FF2B5EF4-FFF2-40B4-BE49-F238E27FC236}">
+                <a16:creationId xmlns:a16="http://schemas.microsoft.com/office/drawing/2014/main" id="{51D5EEAC-8B1F-669F-6286-08E124DD6DED}"/>
+              </a:ext>
+            </a:extLst>
+          </p:cNvPr>
+          <p:cNvSpPr txBox="1"/>
+          <p:nvPr/>
+        </p:nvSpPr>
+        <p:spPr>
+          <a:xfrm>
+            <a:off x="7924799" y="5905644"/>
+            <a:ext cx="687334" cy="369332"/>
+          </a:xfrm>
+          <a:prstGeom prst="rect">
+            <a:avLst/>
+          </a:prstGeom>
+          <a:noFill/>
+        </p:spPr>
+        <p:txBody>
+          <a:bodyPr wrap="square" rtlCol="0">
+            <a:spAutoFit/>
+          </a:bodyPr>
+          <a:lstStyle/>
+          <a:p>
+            <a:r>
+              <a:rPr lang="en-US" altLang="zh-TW" dirty="0"/>
+              <a:t>Car  </a:t>
+            </a:r>
+            <a:endParaRPr lang="zh-TW" altLang="en-US" dirty="0"/>
+          </a:p>
+        </p:txBody>
+      </p:sp>
+      <p:sp>
+        <p:nvSpPr>
+          <p:cNvPr id="24" name="文字方塊 23">
+            <a:extLst>
+              <a:ext uri="{FF2B5EF4-FFF2-40B4-BE49-F238E27FC236}">
+                <a16:creationId xmlns:a16="http://schemas.microsoft.com/office/drawing/2014/main" id="{B3067A1E-7294-B37F-7C69-E35311B0789B}"/>
+              </a:ext>
+            </a:extLst>
+          </p:cNvPr>
+          <p:cNvSpPr txBox="1"/>
+          <p:nvPr/>
+        </p:nvSpPr>
+        <p:spPr>
+          <a:xfrm>
+            <a:off x="7924799" y="3876697"/>
+            <a:ext cx="687334" cy="369332"/>
+          </a:xfrm>
+          <a:prstGeom prst="rect">
+            <a:avLst/>
+          </a:prstGeom>
+          <a:noFill/>
+        </p:spPr>
+        <p:txBody>
+          <a:bodyPr wrap="square" rtlCol="0">
+            <a:spAutoFit/>
+          </a:bodyPr>
+          <a:lstStyle/>
+          <a:p>
+            <a:r>
+              <a:rPr lang="en-US" altLang="zh-TW" dirty="0"/>
+              <a:t>Goat  </a:t>
+            </a:r>
+            <a:endParaRPr lang="zh-TW" altLang="en-US" dirty="0"/>
+          </a:p>
+        </p:txBody>
+      </p:sp>
+      <p:sp>
+        <p:nvSpPr>
+          <p:cNvPr id="25" name="文字方塊 24">
+            <a:extLst>
+              <a:ext uri="{FF2B5EF4-FFF2-40B4-BE49-F238E27FC236}">
+                <a16:creationId xmlns:a16="http://schemas.microsoft.com/office/drawing/2014/main" id="{55F0CDA0-2206-F279-E911-C0573F5B9332}"/>
+              </a:ext>
+            </a:extLst>
+          </p:cNvPr>
+          <p:cNvSpPr txBox="1"/>
+          <p:nvPr/>
+        </p:nvSpPr>
+        <p:spPr>
+          <a:xfrm>
+            <a:off x="4301305" y="1964188"/>
+            <a:ext cx="687334" cy="369332"/>
+          </a:xfrm>
+          <a:prstGeom prst="rect">
+            <a:avLst/>
+          </a:prstGeom>
+          <a:noFill/>
+        </p:spPr>
+        <p:txBody>
+          <a:bodyPr wrap="square" rtlCol="0">
+            <a:spAutoFit/>
+          </a:bodyPr>
+          <a:lstStyle/>
+          <a:p>
+            <a:r>
+              <a:rPr lang="en-US" altLang="zh-TW" dirty="0"/>
+              <a:t>2/3  </a:t>
+            </a:r>
+            <a:endParaRPr lang="zh-TW" altLang="en-US" dirty="0"/>
+          </a:p>
+        </p:txBody>
+      </p:sp>
+      <p:sp>
+        <p:nvSpPr>
+          <p:cNvPr id="26" name="文字方塊 25">
+            <a:extLst>
+              <a:ext uri="{FF2B5EF4-FFF2-40B4-BE49-F238E27FC236}">
+                <a16:creationId xmlns:a16="http://schemas.microsoft.com/office/drawing/2014/main" id="{1CE7E9BC-6F0B-F9F6-9188-DBB5CBBD8C56}"/>
+              </a:ext>
+            </a:extLst>
+          </p:cNvPr>
+          <p:cNvSpPr txBox="1"/>
+          <p:nvPr/>
+        </p:nvSpPr>
+        <p:spPr>
+          <a:xfrm>
+            <a:off x="4301305" y="3920773"/>
+            <a:ext cx="687334" cy="369332"/>
+          </a:xfrm>
+          <a:prstGeom prst="rect">
+            <a:avLst/>
+          </a:prstGeom>
+          <a:noFill/>
+        </p:spPr>
+        <p:txBody>
+          <a:bodyPr wrap="square" rtlCol="0">
+            <a:spAutoFit/>
+          </a:bodyPr>
+          <a:lstStyle/>
+          <a:p>
+            <a:r>
+              <a:rPr lang="en-US" altLang="zh-TW" dirty="0"/>
+              <a:t>1/3  </a:t>
+            </a:r>
+            <a:endParaRPr lang="zh-TW" altLang="en-US" dirty="0"/>
+          </a:p>
+        </p:txBody>
+      </p:sp>
+    </p:spTree>
+    <p:extLst>
+      <p:ext uri="{BB962C8B-B14F-4D97-AF65-F5344CB8AC3E}">
+        <p14:creationId xmlns:p14="http://schemas.microsoft.com/office/powerpoint/2010/main" val="910919060"/>
+      </p:ext>
+    </p:extLst>
+  </p:cSld>
+  <p:clrMapOvr>
+    <a:masterClrMapping/>
+  </p:clrMapOvr>
+</p:sld>
+</file>
+
+<file path=ppt/slides/slide15.xml><?xml version="1.0" encoding="utf-8"?>
+<p:sld xmlns:a="http://schemas.openxmlformats.org/drawingml/2006/main" xmlns:r="http://schemas.openxmlformats.org/officeDocument/2006/relationships" xmlns:p="http://schemas.openxmlformats.org/presentationml/2006/main">
+  <p:cSld>
+    <p:spTree>
+      <p:nvGrpSpPr>
+        <p:cNvPr id="1" name="">
+          <a:extLst>
+            <a:ext uri="{FF2B5EF4-FFF2-40B4-BE49-F238E27FC236}">
+              <a16:creationId xmlns:a16="http://schemas.microsoft.com/office/drawing/2014/main" id="{BC833700-69F4-645B-5103-567A6DCDD2CB}"/>
+            </a:ext>
+          </a:extLst>
+        </p:cNvPr>
+        <p:cNvGrpSpPr/>
+        <p:nvPr/>
+      </p:nvGrpSpPr>
+      <p:grpSpPr>
+        <a:xfrm>
+          <a:off x="0" y="0"/>
+          <a:ext cx="0" cy="0"/>
+          <a:chOff x="0" y="0"/>
+          <a:chExt cx="0" cy="0"/>
+        </a:xfrm>
+      </p:grpSpPr>
+      <p:sp>
+        <p:nvSpPr>
+          <p:cNvPr id="2" name="標題 1">
+            <a:extLst>
+              <a:ext uri="{FF2B5EF4-FFF2-40B4-BE49-F238E27FC236}">
+                <a16:creationId xmlns:a16="http://schemas.microsoft.com/office/drawing/2014/main" id="{51350EBF-7D2F-989B-08C4-13F7A0B82A0B}"/>
+              </a:ext>
+            </a:extLst>
+          </p:cNvPr>
+          <p:cNvSpPr>
+            <a:spLocks noGrp="1"/>
+          </p:cNvSpPr>
+          <p:nvPr>
+            <p:ph type="title"/>
+          </p:nvPr>
+        </p:nvSpPr>
+        <p:spPr/>
+        <p:txBody>
+          <a:bodyPr/>
+          <a:lstStyle/>
+          <a:p>
+            <a:r>
+              <a:rPr lang="zh-TW" altLang="en-US" dirty="0"/>
+              <a:t>換門的勝率</a:t>
+            </a:r>
+          </a:p>
+        </p:txBody>
+      </p:sp>
+      <p:sp>
+        <p:nvSpPr>
+          <p:cNvPr id="3" name="文字方塊 2">
+            <a:extLst>
+              <a:ext uri="{FF2B5EF4-FFF2-40B4-BE49-F238E27FC236}">
+                <a16:creationId xmlns:a16="http://schemas.microsoft.com/office/drawing/2014/main" id="{65EACAF8-C4E7-30AF-4E0A-3DB02A5CD1DF}"/>
+              </a:ext>
+            </a:extLst>
+          </p:cNvPr>
+          <p:cNvSpPr txBox="1"/>
+          <p:nvPr/>
+        </p:nvSpPr>
+        <p:spPr>
+          <a:xfrm>
+            <a:off x="4020699" y="2235050"/>
+            <a:ext cx="6068386" cy="369332"/>
+          </a:xfrm>
+          <a:prstGeom prst="rect">
+            <a:avLst/>
+          </a:prstGeom>
+          <a:noFill/>
+        </p:spPr>
+        <p:txBody>
+          <a:bodyPr wrap="square" rtlCol="0">
+            <a:spAutoFit/>
+          </a:bodyPr>
+          <a:lstStyle/>
+          <a:p>
+            <a:r>
+              <a:rPr lang="en-US" altLang="zh-TW" dirty="0"/>
+              <a:t> </a:t>
+            </a:r>
+            <a:endParaRPr lang="zh-TW" altLang="en-US" dirty="0"/>
+          </a:p>
+        </p:txBody>
+      </p:sp>
+      <p:pic>
+        <p:nvPicPr>
+          <p:cNvPr id="14" name="圖片 13">
+            <a:extLst>
+              <a:ext uri="{FF2B5EF4-FFF2-40B4-BE49-F238E27FC236}">
+                <a16:creationId xmlns:a16="http://schemas.microsoft.com/office/drawing/2014/main" id="{2B1AA0AD-3322-F497-0190-3799D708DBCA}"/>
+              </a:ext>
+            </a:extLst>
+          </p:cNvPr>
+          <p:cNvPicPr>
+            <a:picLocks noChangeAspect="1"/>
+          </p:cNvPicPr>
+          <p:nvPr/>
+        </p:nvPicPr>
+        <p:blipFill>
+          <a:blip r:embed="rId2"/>
+          <a:stretch>
+            <a:fillRect/>
+          </a:stretch>
+        </p:blipFill>
+        <p:spPr>
+          <a:xfrm>
+            <a:off x="1523243" y="2057977"/>
+            <a:ext cx="9298637" cy="1371023"/>
+          </a:xfrm>
+          <a:prstGeom prst="rect">
+            <a:avLst/>
+          </a:prstGeom>
+        </p:spPr>
+      </p:pic>
+      <p:pic>
+        <p:nvPicPr>
+          <p:cNvPr id="18" name="圖片 17">
+            <a:extLst>
+              <a:ext uri="{FF2B5EF4-FFF2-40B4-BE49-F238E27FC236}">
+                <a16:creationId xmlns:a16="http://schemas.microsoft.com/office/drawing/2014/main" id="{C011A5CB-371C-6508-AF22-E21A2D294A4C}"/>
+              </a:ext>
+            </a:extLst>
+          </p:cNvPr>
+          <p:cNvPicPr>
+            <a:picLocks noChangeAspect="1"/>
+          </p:cNvPicPr>
+          <p:nvPr/>
+        </p:nvPicPr>
+        <p:blipFill>
+          <a:blip r:embed="rId3"/>
+          <a:stretch>
+            <a:fillRect/>
+          </a:stretch>
+        </p:blipFill>
+        <p:spPr>
+          <a:xfrm>
+            <a:off x="1523243" y="3992935"/>
+            <a:ext cx="6356553" cy="1613492"/>
+          </a:xfrm>
+          <a:prstGeom prst="rect">
+            <a:avLst/>
+          </a:prstGeom>
+        </p:spPr>
+      </p:pic>
+    </p:spTree>
+    <p:extLst>
+      <p:ext uri="{BB962C8B-B14F-4D97-AF65-F5344CB8AC3E}">
+        <p14:creationId xmlns:p14="http://schemas.microsoft.com/office/powerpoint/2010/main" val="966041907"/>
       </p:ext>
     </p:extLst>
   </p:cSld>
